--- a/docs/orgflow-manager-briefing.pptx
+++ b/docs/orgflow-manager-briefing.pptx
@@ -3113,7 +3113,7 @@
             <a:avLst/>
           </a:prstGeom>
           <a:solidFill>
-            <a:srgbClr val="12151C"/>
+            <a:srgbClr val="1B365D"/>
           </a:solidFill>
           <a:ln>
             <a:noFill/>
@@ -3149,8 +3149,8 @@
         </p:nvSpPr>
         <p:spPr>
           <a:xfrm>
-            <a:off x="640080" y="347472"/>
-            <a:ext cx="10972800" cy="320040"/>
+            <a:off x="640080" y="2880360"/>
+            <a:ext cx="10058400" cy="274320"/>
           </a:xfrm>
           <a:prstGeom prst="rect">
             <a:avLst/>
@@ -3163,30 +3163,71 @@
           </a:bodyPr>
           <a:lstStyle/>
           <a:p>
-            <a:pPr>
-              <a:defRPr sz="1200" b="1">
-                <a:solidFill>
-                  <a:srgbClr val="C5BBA8"/>
-                </a:solidFill>
-                <a:latin typeface="Calibri"/>
-              </a:defRPr>
-            </a:pPr>
-            <a:r>
-              <a:t>MANAGER BRIEFING</a:t>
-            </a:r>
-          </a:p>
-        </p:txBody>
-      </p:sp>
-      <p:sp>
-        <p:nvSpPr>
-          <p:cNvPr id="4" name="TextBox 3"/>
+            <a:r>
+              <a:rPr sz="1200" b="1">
+                <a:solidFill>
+                  <a:srgbClr val="D4C4A0"/>
+                </a:solidFill>
+                <a:latin typeface="Calibri"/>
+              </a:rPr>
+              <a:t>INTERNAL BRIEFING</a:t>
+            </a:r>
+          </a:p>
+        </p:txBody>
+      </p:sp>
+      <p:sp>
+        <p:nvSpPr>
+          <p:cNvPr id="4" name="Rectangle 3"/>
+          <p:cNvSpPr/>
+          <p:nvPr/>
+        </p:nvSpPr>
+        <p:spPr>
+          <a:xfrm>
+            <a:off x="640080" y="3218688"/>
+            <a:ext cx="502920" cy="36576"/>
+          </a:xfrm>
+          <a:prstGeom prst="rect">
+            <a:avLst/>
+          </a:prstGeom>
+          <a:solidFill>
+            <a:srgbClr val="D4C4A0"/>
+          </a:solidFill>
+          <a:ln>
+            <a:noFill/>
+          </a:ln>
+        </p:spPr>
+        <p:style>
+          <a:lnRef idx="1">
+            <a:schemeClr val="accent1"/>
+          </a:lnRef>
+          <a:fillRef idx="3">
+            <a:schemeClr val="accent1"/>
+          </a:fillRef>
+          <a:effectRef idx="2">
+            <a:schemeClr val="accent1"/>
+          </a:effectRef>
+          <a:fontRef idx="minor">
+            <a:schemeClr val="lt1"/>
+          </a:fontRef>
+        </p:style>
+        <p:txBody>
+          <a:bodyPr rtlCol="0" anchor="ctr"/>
+          <a:lstStyle/>
+          <a:p>
+            <a:pPr algn="ctr"/>
+          </a:p>
+        </p:txBody>
+      </p:sp>
+      <p:sp>
+        <p:nvSpPr>
+          <p:cNvPr id="5" name="TextBox 4"/>
           <p:cNvSpPr txBox="1"/>
           <p:nvPr/>
         </p:nvSpPr>
         <p:spPr>
           <a:xfrm>
-            <a:off x="640080" y="658368"/>
-            <a:ext cx="10972800" cy="1051560"/>
+            <a:off x="640080" y="3383280"/>
+            <a:ext cx="10515600" cy="731520"/>
           </a:xfrm>
           <a:prstGeom prst="rect">
             <a:avLst/>
@@ -3199,34 +3240,28 @@
           </a:bodyPr>
           <a:lstStyle/>
           <a:p>
-            <a:pPr>
-              <a:defRPr sz="3600" b="1">
+            <a:r>
+              <a:rPr sz="4000" b="1">
                 <a:solidFill>
                   <a:srgbClr val="FFFFFF"/>
                 </a:solidFill>
                 <a:latin typeface="Calibri"/>
-              </a:defRPr>
-            </a:pPr>
-            <a:r>
-              <a:t>Promote Salesforce configuration</a:t>
-            </a:r>
-            <a:br/>
-            <a:r>
-              <a:t>without a developer toolchain</a:t>
-            </a:r>
-          </a:p>
-        </p:txBody>
-      </p:sp>
-      <p:sp>
-        <p:nvSpPr>
-          <p:cNvPr id="5" name="TextBox 4"/>
+              </a:rPr>
+              <a:t>OrgFlow</a:t>
+            </a:r>
+          </a:p>
+        </p:txBody>
+      </p:sp>
+      <p:sp>
+        <p:nvSpPr>
+          <p:cNvPr id="6" name="TextBox 5"/>
           <p:cNvSpPr txBox="1"/>
           <p:nvPr/>
         </p:nvSpPr>
         <p:spPr>
           <a:xfrm>
-            <a:off x="640080" y="2834640"/>
-            <a:ext cx="10881360" cy="4206240"/>
+            <a:off x="640080" y="4160520"/>
+            <a:ext cx="10241280" cy="1371600"/>
           </a:xfrm>
           <a:prstGeom prst="rect">
             <a:avLst/>
@@ -3239,21 +3274,126 @@
           </a:bodyPr>
           <a:lstStyle/>
           <a:p>
-            <a:pPr>
-              <a:defRPr sz="2000" b="0">
-                <a:solidFill>
-                  <a:srgbClr val="E6E4DE"/>
-                </a:solidFill>
-                <a:latin typeface="Calibri"/>
-              </a:defRPr>
-            </a:pPr>
-            <a:r>
-              <a:t>OrgFlow is a Chrome extension for admins and configurators. They pick the change they just built in a sandbox and send that same package to QA, then production.</a:t>
-            </a:r>
-            <a:br/>
-            <a:br/>
-            <a:r>
-              <a:t>No new IDE. No mandatory Git repo. No Copado-class license. A guided From → To hop in the browser they already use.</a:t>
+            <a:r>
+              <a:rPr sz="1800" b="0">
+                <a:solidFill>
+                  <a:srgbClr val="D7DDE6"/>
+                </a:solidFill>
+                <a:latin typeface="Calibri"/>
+              </a:rPr>
+              <a:t>A lightweight way for Salesforce administrators to promote configuration between environments—without a developer workstation or a release-management platform.</a:t>
+            </a:r>
+          </a:p>
+        </p:txBody>
+      </p:sp>
+      <p:sp>
+        <p:nvSpPr>
+          <p:cNvPr id="7" name="Rectangle 6"/>
+          <p:cNvSpPr/>
+          <p:nvPr/>
+        </p:nvSpPr>
+        <p:spPr>
+          <a:xfrm>
+            <a:off x="0" y="6537960"/>
+            <a:ext cx="12191695" cy="320040"/>
+          </a:xfrm>
+          <a:prstGeom prst="rect">
+            <a:avLst/>
+          </a:prstGeom>
+          <a:solidFill>
+            <a:srgbClr val="0F2340"/>
+          </a:solidFill>
+          <a:ln>
+            <a:noFill/>
+          </a:ln>
+        </p:spPr>
+        <p:style>
+          <a:lnRef idx="1">
+            <a:schemeClr val="accent1"/>
+          </a:lnRef>
+          <a:fillRef idx="3">
+            <a:schemeClr val="accent1"/>
+          </a:fillRef>
+          <a:effectRef idx="2">
+            <a:schemeClr val="accent1"/>
+          </a:effectRef>
+          <a:fontRef idx="minor">
+            <a:schemeClr val="lt1"/>
+          </a:fontRef>
+        </p:style>
+        <p:txBody>
+          <a:bodyPr rtlCol="0" anchor="ctr"/>
+          <a:lstStyle/>
+          <a:p>
+            <a:pPr algn="ctr"/>
+          </a:p>
+        </p:txBody>
+      </p:sp>
+      <p:sp>
+        <p:nvSpPr>
+          <p:cNvPr id="8" name="TextBox 7"/>
+          <p:cNvSpPr txBox="1"/>
+          <p:nvPr/>
+        </p:nvSpPr>
+        <p:spPr>
+          <a:xfrm>
+            <a:off x="640080" y="6565392"/>
+            <a:ext cx="6400800" cy="256032"/>
+          </a:xfrm>
+          <a:prstGeom prst="rect">
+            <a:avLst/>
+          </a:prstGeom>
+          <a:noFill/>
+        </p:spPr>
+        <p:txBody>
+          <a:bodyPr wrap="square">
+            <a:spAutoFit/>
+          </a:bodyPr>
+          <a:lstStyle/>
+          <a:p>
+            <a:r>
+              <a:rPr sz="1100" b="0">
+                <a:solidFill>
+                  <a:srgbClr val="D4C4A0"/>
+                </a:solidFill>
+                <a:latin typeface="Calibri"/>
+              </a:rPr>
+              <a:t>OrgFlow  ·  Internal use</a:t>
+            </a:r>
+          </a:p>
+        </p:txBody>
+      </p:sp>
+      <p:sp>
+        <p:nvSpPr>
+          <p:cNvPr id="9" name="TextBox 8"/>
+          <p:cNvSpPr txBox="1"/>
+          <p:nvPr/>
+        </p:nvSpPr>
+        <p:spPr>
+          <a:xfrm>
+            <a:off x="9326880" y="6565392"/>
+            <a:ext cx="2194560" cy="256032"/>
+          </a:xfrm>
+          <a:prstGeom prst="rect">
+            <a:avLst/>
+          </a:prstGeom>
+          <a:noFill/>
+        </p:spPr>
+        <p:txBody>
+          <a:bodyPr wrap="none">
+            <a:spAutoFit/>
+          </a:bodyPr>
+          <a:lstStyle/>
+          <a:p>
+            <a:pPr algn="r"/>
+            <a:r>
+              <a:rPr sz="1100" b="0">
+                <a:solidFill>
+                  <a:srgbClr val="D4C4A0"/>
+                </a:solidFill>
+                <a:latin typeface="Calibri"/>
+              </a:rPr>
+              <a:t>1  /  11</a:t>
             </a:r>
           </a:p>
         </p:txBody>
@@ -3291,7 +3431,7 @@
             <a:avLst/>
           </a:prstGeom>
           <a:solidFill>
-            <a:srgbClr val="12151C"/>
+            <a:srgbClr val="FFFFFF"/>
           </a:solidFill>
           <a:ln>
             <a:noFill/>
@@ -3328,7 +3468,7 @@
         <p:spPr>
           <a:xfrm>
             <a:off x="640080" y="347472"/>
-            <a:ext cx="10972800" cy="320040"/>
+            <a:ext cx="10972800" cy="256032"/>
           </a:xfrm>
           <a:prstGeom prst="rect">
             <a:avLst/>
@@ -3341,16 +3481,14 @@
           </a:bodyPr>
           <a:lstStyle/>
           <a:p>
-            <a:pPr>
-              <a:defRPr sz="1200" b="1">
-                <a:solidFill>
-                  <a:srgbClr val="C5BBA8"/>
-                </a:solidFill>
-                <a:latin typeface="Calibri"/>
-              </a:defRPr>
-            </a:pPr>
-            <a:r>
-              <a:t>SUGGESTED NEXT STEP</a:t>
+            <a:r>
+              <a:rPr sz="1100" b="1">
+                <a:solidFill>
+                  <a:srgbClr val="8A7348"/>
+                </a:solidFill>
+                <a:latin typeface="Calibri"/>
+              </a:rPr>
+              <a:t>PROPOSAL</a:t>
             </a:r>
           </a:p>
         </p:txBody>
@@ -3363,8 +3501,8 @@
         </p:nvSpPr>
         <p:spPr>
           <a:xfrm>
-            <a:off x="640080" y="658368"/>
-            <a:ext cx="10972800" cy="1051560"/>
+            <a:off x="640080" y="621792"/>
+            <a:ext cx="10972800" cy="822960"/>
           </a:xfrm>
           <a:prstGeom prst="rect">
             <a:avLst/>
@@ -3377,41 +3515,37 @@
           </a:bodyPr>
           <a:lstStyle/>
           <a:p>
-            <a:pPr>
-              <a:defRPr sz="3200" b="1">
-                <a:solidFill>
-                  <a:srgbClr val="FFFFFF"/>
-                </a:solidFill>
-                <a:latin typeface="Calibri"/>
-              </a:defRPr>
-            </a:pPr>
-            <a:r>
-              <a:t>A two-week pilot, not a program</a:t>
-            </a:r>
-          </a:p>
-        </p:txBody>
-      </p:sp>
-      <p:sp>
-        <p:nvSpPr>
-          <p:cNvPr id="5" name="Rounded Rectangle 4"/>
+            <a:r>
+              <a:rPr sz="2600" b="1">
+                <a:solidFill>
+                  <a:srgbClr val="1B365D"/>
+                </a:solidFill>
+                <a:latin typeface="Calibri"/>
+              </a:rPr>
+              <a:t>A two-week pilot</a:t>
+            </a:r>
+          </a:p>
+        </p:txBody>
+      </p:sp>
+      <p:sp>
+        <p:nvSpPr>
+          <p:cNvPr id="5" name="Rectangle 4"/>
           <p:cNvSpPr/>
           <p:nvPr/>
         </p:nvSpPr>
         <p:spPr>
           <a:xfrm>
-            <a:off x="640080" y="1920240"/>
-            <a:ext cx="5303520" cy="4023360"/>
-          </a:xfrm>
-          <a:prstGeom prst="roundRect">
+            <a:off x="640080" y="1691640"/>
+            <a:ext cx="5349240" cy="54864"/>
+          </a:xfrm>
+          <a:prstGeom prst="rect">
             <a:avLst/>
           </a:prstGeom>
           <a:solidFill>
-            <a:srgbClr val="1C212C"/>
+            <a:srgbClr val="1B365D"/>
           </a:solidFill>
           <a:ln>
-            <a:solidFill>
-              <a:srgbClr val="3A3F4A"/>
-            </a:solidFill>
+            <a:noFill/>
           </a:ln>
         </p:spPr>
         <p:style>
@@ -3429,72 +3563,32 @@
           </a:fontRef>
         </p:style>
         <p:txBody>
-          <a:bodyPr rtlCol="0" anchor="ctr" wrap="square" lIns="146304" rIns="146304" tIns="109728"/>
-          <a:lstStyle/>
-          <a:p>
-            <a:pPr algn="ctr">
-              <a:defRPr sz="1600" b="1">
-                <a:solidFill>
-                  <a:srgbClr val="FFFFFF"/>
-                </a:solidFill>
-                <a:latin typeface="Calibri"/>
-              </a:defRPr>
-            </a:pPr>
-            <a:r>
-              <a:t>Pilot</a:t>
-            </a:r>
-          </a:p>
-          <a:p>
-            <a:pPr>
-              <a:spcBef>
-                <a:spcPts val="800"/>
-              </a:spcBef>
-              <a:defRPr sz="1300">
-                <a:solidFill>
-                  <a:srgbClr val="8F96A3"/>
-                </a:solidFill>
-                <a:latin typeface="Calibri"/>
-              </a:defRPr>
-            </a:pPr>
-            <a:r>
-              <a:t>Two people, two sandbox or disposable orgs.</a:t>
-            </a:r>
-            <a:br/>
-            <a:r>
-              <a:t>One real config change (field + layout or a flow).</a:t>
-            </a:r>
-            <a:br/>
-            <a:r>
-              <a:t>Promote sandbox → QA with storage on this device.</a:t>
-            </a:r>
-            <a:br/>
-            <a:r>
-              <a:t>Optional: turn on a test Git repo in week two.</a:t>
-            </a:r>
-          </a:p>
-        </p:txBody>
-      </p:sp>
-      <p:sp>
-        <p:nvSpPr>
-          <p:cNvPr id="6" name="Rounded Rectangle 5"/>
+          <a:bodyPr rtlCol="0" anchor="ctr"/>
+          <a:lstStyle/>
+          <a:p>
+            <a:pPr algn="ctr"/>
+          </a:p>
+        </p:txBody>
+      </p:sp>
+      <p:sp>
+        <p:nvSpPr>
+          <p:cNvPr id="6" name="Rectangle 5"/>
           <p:cNvSpPr/>
           <p:nvPr/>
         </p:nvSpPr>
         <p:spPr>
           <a:xfrm>
-            <a:off x="6217920" y="1920240"/>
-            <a:ext cx="5303520" cy="4023360"/>
-          </a:xfrm>
-          <a:prstGeom prst="roundRect">
+            <a:off x="640080" y="1746504"/>
+            <a:ext cx="5349240" cy="4197096"/>
+          </a:xfrm>
+          <a:prstGeom prst="rect">
             <a:avLst/>
           </a:prstGeom>
           <a:solidFill>
-            <a:srgbClr val="1C212C"/>
+            <a:srgbClr val="F4F6F9"/>
           </a:solidFill>
           <a:ln>
-            <a:solidFill>
-              <a:srgbClr val="3A3F4A"/>
-            </a:solidFill>
+            <a:noFill/>
           </a:ln>
         </p:spPr>
         <p:style>
@@ -3512,47 +3606,492 @@
           </a:fontRef>
         </p:style>
         <p:txBody>
-          <a:bodyPr rtlCol="0" anchor="ctr" wrap="square" lIns="146304" rIns="146304" tIns="109728"/>
-          <a:lstStyle/>
-          <a:p>
-            <a:pPr algn="ctr">
-              <a:defRPr sz="1600" b="1">
-                <a:solidFill>
-                  <a:srgbClr val="FFFFFF"/>
-                </a:solidFill>
-                <a:latin typeface="Calibri"/>
-              </a:defRPr>
+          <a:bodyPr rtlCol="0" anchor="ctr"/>
+          <a:lstStyle/>
+          <a:p>
+            <a:pPr algn="ctr"/>
+          </a:p>
+        </p:txBody>
+      </p:sp>
+      <p:sp>
+        <p:nvSpPr>
+          <p:cNvPr id="7" name="TextBox 6"/>
+          <p:cNvSpPr txBox="1"/>
+          <p:nvPr/>
+        </p:nvSpPr>
+        <p:spPr>
+          <a:xfrm>
+            <a:off x="786384" y="1837944"/>
+            <a:ext cx="5056632" cy="329184"/>
+          </a:xfrm>
+          <a:prstGeom prst="rect">
+            <a:avLst/>
+          </a:prstGeom>
+          <a:noFill/>
+        </p:spPr>
+        <p:txBody>
+          <a:bodyPr wrap="square">
+            <a:spAutoFit/>
+          </a:bodyPr>
+          <a:lstStyle/>
+          <a:p>
+            <a:r>
+              <a:rPr sz="1400" b="1">
+                <a:solidFill>
+                  <a:srgbClr val="1B365D"/>
+                </a:solidFill>
+                <a:latin typeface="Calibri"/>
+              </a:rPr>
+              <a:t>Scope</a:t>
+            </a:r>
+          </a:p>
+        </p:txBody>
+      </p:sp>
+      <p:sp>
+        <p:nvSpPr>
+          <p:cNvPr id="8" name="TextBox 7"/>
+          <p:cNvSpPr txBox="1"/>
+          <p:nvPr/>
+        </p:nvSpPr>
+        <p:spPr>
+          <a:xfrm>
+            <a:off x="786384" y="2167128"/>
+            <a:ext cx="5056632" cy="3630168"/>
+          </a:xfrm>
+          <a:prstGeom prst="rect">
+            <a:avLst/>
+          </a:prstGeom>
+          <a:noFill/>
+        </p:spPr>
+        <p:txBody>
+          <a:bodyPr wrap="square">
+            <a:spAutoFit/>
+          </a:bodyPr>
+          <a:lstStyle/>
+          <a:p>
+            <a:pPr>
+              <a:spcAft>
+                <a:spcPts val="600"/>
+              </a:spcAft>
             </a:pPr>
             <a:r>
-              <a:t>Success looks like</a:t>
+              <a:rPr sz="1300" b="0">
+                <a:solidFill>
+                  <a:srgbClr val="3D4450"/>
+                </a:solidFill>
+                <a:latin typeface="Calibri"/>
+              </a:rPr>
+              <a:t>Two administrators; two sandbox or disposable organizations.</a:t>
             </a:r>
           </a:p>
           <a:p>
             <a:pPr>
-              <a:spcBef>
-                <a:spcPts val="800"/>
-              </a:spcBef>
-              <a:defRPr sz="1300">
-                <a:solidFill>
-                  <a:srgbClr val="8F96A3"/>
-                </a:solidFill>
-                <a:latin typeface="Calibri"/>
-              </a:defRPr>
+              <a:spcAft>
+                <a:spcPts val="600"/>
+              </a:spcAft>
             </a:pPr>
             <a:r>
-              <a:t>They complete a hop without a developer.</a:t>
-            </a:r>
-            <a:br/>
-            <a:r>
-              <a:t>QA receives the same members they picked.</a:t>
-            </a:r>
-            <a:br/>
-            <a:r>
-              <a:t>No new platform license to evaluate first.</a:t>
-            </a:r>
-            <a:br/>
-            <a:r>
-              <a:t>You decide later if the team needs a shared repo.</a:t>
+              <a:rPr sz="1300" b="0">
+                <a:solidFill>
+                  <a:srgbClr val="3D4450"/>
+                </a:solidFill>
+                <a:latin typeface="Calibri"/>
+              </a:rPr>
+              <a:t>One representative change (for example a field and layout, or a flow).</a:t>
+            </a:r>
+          </a:p>
+          <a:p>
+            <a:pPr>
+              <a:spcAft>
+                <a:spcPts val="600"/>
+              </a:spcAft>
+            </a:pPr>
+            <a:r>
+              <a:rPr sz="1300" b="0">
+                <a:solidFill>
+                  <a:srgbClr val="3D4450"/>
+                </a:solidFill>
+                <a:latin typeface="Calibri"/>
+              </a:rPr>
+              <a:t>Promote source → QA using device storage.</a:t>
+            </a:r>
+          </a:p>
+          <a:p>
+            <a:pPr>
+              <a:spcAft>
+                <a:spcPts val="600"/>
+              </a:spcAft>
+            </a:pPr>
+            <a:r>
+              <a:rPr sz="1300" b="0">
+                <a:solidFill>
+                  <a:srgbClr val="3D4450"/>
+                </a:solidFill>
+                <a:latin typeface="Calibri"/>
+              </a:rPr>
+              <a:t>Optional: connect a test repository in the second week.</a:t>
+            </a:r>
+          </a:p>
+        </p:txBody>
+      </p:sp>
+      <p:sp>
+        <p:nvSpPr>
+          <p:cNvPr id="9" name="Rectangle 8"/>
+          <p:cNvSpPr/>
+          <p:nvPr/>
+        </p:nvSpPr>
+        <p:spPr>
+          <a:xfrm>
+            <a:off x="6217920" y="1691640"/>
+            <a:ext cx="5349240" cy="54864"/>
+          </a:xfrm>
+          <a:prstGeom prst="rect">
+            <a:avLst/>
+          </a:prstGeom>
+          <a:solidFill>
+            <a:srgbClr val="1B365D"/>
+          </a:solidFill>
+          <a:ln>
+            <a:noFill/>
+          </a:ln>
+        </p:spPr>
+        <p:style>
+          <a:lnRef idx="1">
+            <a:schemeClr val="accent1"/>
+          </a:lnRef>
+          <a:fillRef idx="3">
+            <a:schemeClr val="accent1"/>
+          </a:fillRef>
+          <a:effectRef idx="2">
+            <a:schemeClr val="accent1"/>
+          </a:effectRef>
+          <a:fontRef idx="minor">
+            <a:schemeClr val="lt1"/>
+          </a:fontRef>
+        </p:style>
+        <p:txBody>
+          <a:bodyPr rtlCol="0" anchor="ctr"/>
+          <a:lstStyle/>
+          <a:p>
+            <a:pPr algn="ctr"/>
+          </a:p>
+        </p:txBody>
+      </p:sp>
+      <p:sp>
+        <p:nvSpPr>
+          <p:cNvPr id="10" name="Rectangle 9"/>
+          <p:cNvSpPr/>
+          <p:nvPr/>
+        </p:nvSpPr>
+        <p:spPr>
+          <a:xfrm>
+            <a:off x="6217920" y="1746504"/>
+            <a:ext cx="5349240" cy="4197096"/>
+          </a:xfrm>
+          <a:prstGeom prst="rect">
+            <a:avLst/>
+          </a:prstGeom>
+          <a:solidFill>
+            <a:srgbClr val="F4F6F9"/>
+          </a:solidFill>
+          <a:ln>
+            <a:noFill/>
+          </a:ln>
+        </p:spPr>
+        <p:style>
+          <a:lnRef idx="1">
+            <a:schemeClr val="accent1"/>
+          </a:lnRef>
+          <a:fillRef idx="3">
+            <a:schemeClr val="accent1"/>
+          </a:fillRef>
+          <a:effectRef idx="2">
+            <a:schemeClr val="accent1"/>
+          </a:effectRef>
+          <a:fontRef idx="minor">
+            <a:schemeClr val="lt1"/>
+          </a:fontRef>
+        </p:style>
+        <p:txBody>
+          <a:bodyPr rtlCol="0" anchor="ctr"/>
+          <a:lstStyle/>
+          <a:p>
+            <a:pPr algn="ctr"/>
+          </a:p>
+        </p:txBody>
+      </p:sp>
+      <p:sp>
+        <p:nvSpPr>
+          <p:cNvPr id="11" name="TextBox 10"/>
+          <p:cNvSpPr txBox="1"/>
+          <p:nvPr/>
+        </p:nvSpPr>
+        <p:spPr>
+          <a:xfrm>
+            <a:off x="6364224" y="1837944"/>
+            <a:ext cx="5056632" cy="329184"/>
+          </a:xfrm>
+          <a:prstGeom prst="rect">
+            <a:avLst/>
+          </a:prstGeom>
+          <a:noFill/>
+        </p:spPr>
+        <p:txBody>
+          <a:bodyPr wrap="square">
+            <a:spAutoFit/>
+          </a:bodyPr>
+          <a:lstStyle/>
+          <a:p>
+            <a:r>
+              <a:rPr sz="1400" b="1">
+                <a:solidFill>
+                  <a:srgbClr val="1B365D"/>
+                </a:solidFill>
+                <a:latin typeface="Calibri"/>
+              </a:rPr>
+              <a:t>Success criteria</a:t>
+            </a:r>
+          </a:p>
+        </p:txBody>
+      </p:sp>
+      <p:sp>
+        <p:nvSpPr>
+          <p:cNvPr id="12" name="TextBox 11"/>
+          <p:cNvSpPr txBox="1"/>
+          <p:nvPr/>
+        </p:nvSpPr>
+        <p:spPr>
+          <a:xfrm>
+            <a:off x="6364224" y="2167128"/>
+            <a:ext cx="5056632" cy="3630168"/>
+          </a:xfrm>
+          <a:prstGeom prst="rect">
+            <a:avLst/>
+          </a:prstGeom>
+          <a:noFill/>
+        </p:spPr>
+        <p:txBody>
+          <a:bodyPr wrap="square">
+            <a:spAutoFit/>
+          </a:bodyPr>
+          <a:lstStyle/>
+          <a:p>
+            <a:pPr>
+              <a:spcAft>
+                <a:spcPts val="600"/>
+              </a:spcAft>
+            </a:pPr>
+            <a:r>
+              <a:rPr sz="1300" b="0">
+                <a:solidFill>
+                  <a:srgbClr val="3D4450"/>
+                </a:solidFill>
+                <a:latin typeface="Calibri"/>
+              </a:rPr>
+              <a:t>A complete promotion without developer assistance.</a:t>
+            </a:r>
+          </a:p>
+          <a:p>
+            <a:pPr>
+              <a:spcAft>
+                <a:spcPts val="600"/>
+              </a:spcAft>
+            </a:pPr>
+            <a:r>
+              <a:rPr sz="1300" b="0">
+                <a:solidFill>
+                  <a:srgbClr val="3D4450"/>
+                </a:solidFill>
+                <a:latin typeface="Calibri"/>
+              </a:rPr>
+              <a:t>The target organization receives the selected components.</a:t>
+            </a:r>
+          </a:p>
+          <a:p>
+            <a:pPr>
+              <a:spcAft>
+                <a:spcPts val="600"/>
+              </a:spcAft>
+            </a:pPr>
+            <a:r>
+              <a:rPr sz="1300" b="0">
+                <a:solidFill>
+                  <a:srgbClr val="3D4450"/>
+                </a:solidFill>
+                <a:latin typeface="Calibri"/>
+              </a:rPr>
+              <a:t>No new platform license required to complete the pilot.</a:t>
+            </a:r>
+          </a:p>
+          <a:p>
+            <a:pPr>
+              <a:spcAft>
+                <a:spcPts val="600"/>
+              </a:spcAft>
+            </a:pPr>
+            <a:r>
+              <a:rPr sz="1300" b="0">
+                <a:solidFill>
+                  <a:srgbClr val="3D4450"/>
+                </a:solidFill>
+                <a:latin typeface="Calibri"/>
+              </a:rPr>
+              <a:t>A clear decision on whether a shared repository is needed.</a:t>
+            </a:r>
+          </a:p>
+        </p:txBody>
+      </p:sp>
+      <p:sp>
+        <p:nvSpPr>
+          <p:cNvPr id="13" name="Rectangle 12"/>
+          <p:cNvSpPr/>
+          <p:nvPr/>
+        </p:nvSpPr>
+        <p:spPr>
+          <a:xfrm>
+            <a:off x="0" y="6537960"/>
+            <a:ext cx="12191695" cy="320040"/>
+          </a:xfrm>
+          <a:prstGeom prst="rect">
+            <a:avLst/>
+          </a:prstGeom>
+          <a:solidFill>
+            <a:srgbClr val="FFFFFF"/>
+          </a:solidFill>
+          <a:ln>
+            <a:noFill/>
+          </a:ln>
+        </p:spPr>
+        <p:style>
+          <a:lnRef idx="1">
+            <a:schemeClr val="accent1"/>
+          </a:lnRef>
+          <a:fillRef idx="3">
+            <a:schemeClr val="accent1"/>
+          </a:fillRef>
+          <a:effectRef idx="2">
+            <a:schemeClr val="accent1"/>
+          </a:effectRef>
+          <a:fontRef idx="minor">
+            <a:schemeClr val="lt1"/>
+          </a:fontRef>
+        </p:style>
+        <p:txBody>
+          <a:bodyPr rtlCol="0" anchor="ctr"/>
+          <a:lstStyle/>
+          <a:p>
+            <a:pPr algn="ctr"/>
+          </a:p>
+        </p:txBody>
+      </p:sp>
+      <p:sp>
+        <p:nvSpPr>
+          <p:cNvPr id="14" name="Rectangle 13"/>
+          <p:cNvSpPr/>
+          <p:nvPr/>
+        </p:nvSpPr>
+        <p:spPr>
+          <a:xfrm>
+            <a:off x="0" y="6537960"/>
+            <a:ext cx="12191695" cy="12700"/>
+          </a:xfrm>
+          <a:prstGeom prst="rect">
+            <a:avLst/>
+          </a:prstGeom>
+          <a:solidFill>
+            <a:srgbClr val="D8DEE6"/>
+          </a:solidFill>
+          <a:ln>
+            <a:noFill/>
+          </a:ln>
+        </p:spPr>
+        <p:style>
+          <a:lnRef idx="1">
+            <a:schemeClr val="accent1"/>
+          </a:lnRef>
+          <a:fillRef idx="3">
+            <a:schemeClr val="accent1"/>
+          </a:fillRef>
+          <a:effectRef idx="2">
+            <a:schemeClr val="accent1"/>
+          </a:effectRef>
+          <a:fontRef idx="minor">
+            <a:schemeClr val="lt1"/>
+          </a:fontRef>
+        </p:style>
+        <p:txBody>
+          <a:bodyPr rtlCol="0" anchor="ctr"/>
+          <a:lstStyle/>
+          <a:p>
+            <a:pPr algn="ctr"/>
+          </a:p>
+        </p:txBody>
+      </p:sp>
+      <p:sp>
+        <p:nvSpPr>
+          <p:cNvPr id="15" name="TextBox 14"/>
+          <p:cNvSpPr txBox="1"/>
+          <p:nvPr/>
+        </p:nvSpPr>
+        <p:spPr>
+          <a:xfrm>
+            <a:off x="640080" y="6565392"/>
+            <a:ext cx="6400800" cy="256032"/>
+          </a:xfrm>
+          <a:prstGeom prst="rect">
+            <a:avLst/>
+          </a:prstGeom>
+          <a:noFill/>
+        </p:spPr>
+        <p:txBody>
+          <a:bodyPr wrap="square">
+            <a:spAutoFit/>
+          </a:bodyPr>
+          <a:lstStyle/>
+          <a:p>
+            <a:r>
+              <a:rPr sz="1100" b="0">
+                <a:solidFill>
+                  <a:srgbClr val="6B7280"/>
+                </a:solidFill>
+                <a:latin typeface="Calibri"/>
+              </a:rPr>
+              <a:t>OrgFlow  ·  Internal use</a:t>
+            </a:r>
+          </a:p>
+        </p:txBody>
+      </p:sp>
+      <p:sp>
+        <p:nvSpPr>
+          <p:cNvPr id="16" name="TextBox 15"/>
+          <p:cNvSpPr txBox="1"/>
+          <p:nvPr/>
+        </p:nvSpPr>
+        <p:spPr>
+          <a:xfrm>
+            <a:off x="9326880" y="6565392"/>
+            <a:ext cx="2194560" cy="256032"/>
+          </a:xfrm>
+          <a:prstGeom prst="rect">
+            <a:avLst/>
+          </a:prstGeom>
+          <a:noFill/>
+        </p:spPr>
+        <p:txBody>
+          <a:bodyPr wrap="none">
+            <a:spAutoFit/>
+          </a:bodyPr>
+          <a:lstStyle/>
+          <a:p>
+            <a:pPr algn="r"/>
+            <a:r>
+              <a:rPr sz="1100" b="0">
+                <a:solidFill>
+                  <a:srgbClr val="6B7280"/>
+                </a:solidFill>
+                <a:latin typeface="Calibri"/>
+              </a:rPr>
+              <a:t>10  /  11</a:t>
             </a:r>
           </a:p>
         </p:txBody>
@@ -3590,7 +4129,7 @@
             <a:avLst/>
           </a:prstGeom>
           <a:solidFill>
-            <a:srgbClr val="12151C"/>
+            <a:srgbClr val="FFFFFF"/>
           </a:solidFill>
           <a:ln>
             <a:noFill/>
@@ -3627,7 +4166,7 @@
         <p:spPr>
           <a:xfrm>
             <a:off x="640080" y="347472"/>
-            <a:ext cx="10972800" cy="320040"/>
+            <a:ext cx="10972800" cy="256032"/>
           </a:xfrm>
           <a:prstGeom prst="rect">
             <a:avLst/>
@@ -3640,16 +4179,14 @@
           </a:bodyPr>
           <a:lstStyle/>
           <a:p>
-            <a:pPr>
-              <a:defRPr sz="1200" b="1">
-                <a:solidFill>
-                  <a:srgbClr val="C5BBA8"/>
-                </a:solidFill>
-                <a:latin typeface="Calibri"/>
-              </a:defRPr>
-            </a:pPr>
-            <a:r>
-              <a:t>HOW TO GET IT</a:t>
+            <a:r>
+              <a:rPr sz="1100" b="1">
+                <a:solidFill>
+                  <a:srgbClr val="8A7348"/>
+                </a:solidFill>
+                <a:latin typeface="Calibri"/>
+              </a:rPr>
+              <a:t>DECISION</a:t>
             </a:r>
           </a:p>
         </p:txBody>
@@ -3662,8 +4199,8 @@
         </p:nvSpPr>
         <p:spPr>
           <a:xfrm>
-            <a:off x="640080" y="658368"/>
-            <a:ext cx="10972800" cy="1051560"/>
+            <a:off x="640080" y="621792"/>
+            <a:ext cx="10972800" cy="822960"/>
           </a:xfrm>
           <a:prstGeom prst="rect">
             <a:avLst/>
@@ -3676,16 +4213,14 @@
           </a:bodyPr>
           <a:lstStyle/>
           <a:p>
-            <a:pPr>
-              <a:defRPr sz="3600" b="1">
-                <a:solidFill>
-                  <a:srgbClr val="FFFFFF"/>
-                </a:solidFill>
-                <a:latin typeface="Calibri"/>
-              </a:defRPr>
-            </a:pPr>
-            <a:r>
-              <a:t>Install, detect, send</a:t>
+            <a:r>
+              <a:rPr sz="2800" b="1">
+                <a:solidFill>
+                  <a:srgbClr val="1B365D"/>
+                </a:solidFill>
+                <a:latin typeface="Calibri"/>
+              </a:rPr>
+              <a:t>Requested action</a:t>
             </a:r>
           </a:p>
         </p:txBody>
@@ -3698,8 +4233,8 @@
         </p:nvSpPr>
         <p:spPr>
           <a:xfrm>
-            <a:off x="640080" y="2880360"/>
-            <a:ext cx="10881360" cy="4206240"/>
+            <a:off x="640080" y="1554480"/>
+            <a:ext cx="10972800" cy="914400"/>
           </a:xfrm>
           <a:prstGeom prst="rect">
             <a:avLst/>
@@ -3712,26 +4247,487 @@
           </a:bodyPr>
           <a:lstStyle/>
           <a:p>
+            <a:r>
+              <a:rPr sz="1800" b="0">
+                <a:solidFill>
+                  <a:srgbClr val="1A1D23"/>
+                </a:solidFill>
+                <a:latin typeface="Calibri"/>
+              </a:rPr>
+              <a:t>Approve a two-week pilot with two administrators. Defer any discussion of replacing existing DevOps tooling until that pilot has a written outcome.</a:t>
+            </a:r>
+          </a:p>
+        </p:txBody>
+      </p:sp>
+      <p:sp>
+        <p:nvSpPr>
+          <p:cNvPr id="6" name="Rectangle 5"/>
+          <p:cNvSpPr/>
+          <p:nvPr/>
+        </p:nvSpPr>
+        <p:spPr>
+          <a:xfrm>
+            <a:off x="640080" y="2743200"/>
+            <a:ext cx="5349240" cy="54864"/>
+          </a:xfrm>
+          <a:prstGeom prst="rect">
+            <a:avLst/>
+          </a:prstGeom>
+          <a:solidFill>
+            <a:srgbClr val="1B365D"/>
+          </a:solidFill>
+          <a:ln>
+            <a:noFill/>
+          </a:ln>
+        </p:spPr>
+        <p:style>
+          <a:lnRef idx="1">
+            <a:schemeClr val="accent1"/>
+          </a:lnRef>
+          <a:fillRef idx="3">
+            <a:schemeClr val="accent1"/>
+          </a:fillRef>
+          <a:effectRef idx="2">
+            <a:schemeClr val="accent1"/>
+          </a:effectRef>
+          <a:fontRef idx="minor">
+            <a:schemeClr val="lt1"/>
+          </a:fontRef>
+        </p:style>
+        <p:txBody>
+          <a:bodyPr rtlCol="0" anchor="ctr"/>
+          <a:lstStyle/>
+          <a:p>
+            <a:pPr algn="ctr"/>
+          </a:p>
+        </p:txBody>
+      </p:sp>
+      <p:sp>
+        <p:nvSpPr>
+          <p:cNvPr id="7" name="Rectangle 6"/>
+          <p:cNvSpPr/>
+          <p:nvPr/>
+        </p:nvSpPr>
+        <p:spPr>
+          <a:xfrm>
+            <a:off x="640080" y="2798064"/>
+            <a:ext cx="5349240" cy="3099816"/>
+          </a:xfrm>
+          <a:prstGeom prst="rect">
+            <a:avLst/>
+          </a:prstGeom>
+          <a:solidFill>
+            <a:srgbClr val="F4F6F9"/>
+          </a:solidFill>
+          <a:ln>
+            <a:noFill/>
+          </a:ln>
+        </p:spPr>
+        <p:style>
+          <a:lnRef idx="1">
+            <a:schemeClr val="accent1"/>
+          </a:lnRef>
+          <a:fillRef idx="3">
+            <a:schemeClr val="accent1"/>
+          </a:fillRef>
+          <a:effectRef idx="2">
+            <a:schemeClr val="accent1"/>
+          </a:effectRef>
+          <a:fontRef idx="minor">
+            <a:schemeClr val="lt1"/>
+          </a:fontRef>
+        </p:style>
+        <p:txBody>
+          <a:bodyPr rtlCol="0" anchor="ctr"/>
+          <a:lstStyle/>
+          <a:p>
+            <a:pPr algn="ctr"/>
+          </a:p>
+        </p:txBody>
+      </p:sp>
+      <p:sp>
+        <p:nvSpPr>
+          <p:cNvPr id="8" name="TextBox 7"/>
+          <p:cNvSpPr txBox="1"/>
+          <p:nvPr/>
+        </p:nvSpPr>
+        <p:spPr>
+          <a:xfrm>
+            <a:off x="786384" y="2889504"/>
+            <a:ext cx="5056632" cy="329184"/>
+          </a:xfrm>
+          <a:prstGeom prst="rect">
+            <a:avLst/>
+          </a:prstGeom>
+          <a:noFill/>
+        </p:spPr>
+        <p:txBody>
+          <a:bodyPr wrap="square">
+            <a:spAutoFit/>
+          </a:bodyPr>
+          <a:lstStyle/>
+          <a:p>
+            <a:r>
+              <a:rPr sz="1400" b="1">
+                <a:solidFill>
+                  <a:srgbClr val="1B365D"/>
+                </a:solidFill>
+                <a:latin typeface="Calibri"/>
+              </a:rPr>
+              <a:t>Distribution</a:t>
+            </a:r>
+          </a:p>
+        </p:txBody>
+      </p:sp>
+      <p:sp>
+        <p:nvSpPr>
+          <p:cNvPr id="9" name="TextBox 8"/>
+          <p:cNvSpPr txBox="1"/>
+          <p:nvPr/>
+        </p:nvSpPr>
+        <p:spPr>
+          <a:xfrm>
+            <a:off x="786384" y="3218688"/>
+            <a:ext cx="5056632" cy="2532888"/>
+          </a:xfrm>
+          <a:prstGeom prst="rect">
+            <a:avLst/>
+          </a:prstGeom>
+          <a:noFill/>
+        </p:spPr>
+        <p:txBody>
+          <a:bodyPr wrap="square">
+            <a:spAutoFit/>
+          </a:bodyPr>
+          <a:lstStyle/>
+          <a:p>
             <a:pPr>
-              <a:defRPr sz="2000" b="0">
-                <a:solidFill>
-                  <a:srgbClr val="E6E4DE"/>
-                </a:solidFill>
-                <a:latin typeface="Calibri"/>
-              </a:defRPr>
+              <a:spcAft>
+                <a:spcPts val="600"/>
+              </a:spcAft>
             </a:pPr>
             <a:r>
-              <a:t>Chrome Web Store listing, or load the unpacked extension from the team zip. Two logged-in Salesforce orgs. From and To must be different.</a:t>
-            </a:r>
-            <a:br/>
-            <a:br/>
-            <a:r>
+              <a:rPr sz="1300" b="0">
+                <a:solidFill>
+                  <a:srgbClr val="3D4450"/>
+                </a:solidFill>
+                <a:latin typeface="Calibri"/>
+              </a:rPr>
+              <a:t>Chrome Web Store listing, or load the unpacked extension from the internal zip. Two signed-in Salesforce organizations are required. Source and target must be different.</a:t>
+            </a:r>
+          </a:p>
+        </p:txBody>
+      </p:sp>
+      <p:sp>
+        <p:nvSpPr>
+          <p:cNvPr id="10" name="Rectangle 9"/>
+          <p:cNvSpPr/>
+          <p:nvPr/>
+        </p:nvSpPr>
+        <p:spPr>
+          <a:xfrm>
+            <a:off x="6217920" y="2743200"/>
+            <a:ext cx="5349240" cy="54864"/>
+          </a:xfrm>
+          <a:prstGeom prst="rect">
+            <a:avLst/>
+          </a:prstGeom>
+          <a:solidFill>
+            <a:srgbClr val="1B365D"/>
+          </a:solidFill>
+          <a:ln>
+            <a:noFill/>
+          </a:ln>
+        </p:spPr>
+        <p:style>
+          <a:lnRef idx="1">
+            <a:schemeClr val="accent1"/>
+          </a:lnRef>
+          <a:fillRef idx="3">
+            <a:schemeClr val="accent1"/>
+          </a:fillRef>
+          <a:effectRef idx="2">
+            <a:schemeClr val="accent1"/>
+          </a:effectRef>
+          <a:fontRef idx="minor">
+            <a:schemeClr val="lt1"/>
+          </a:fontRef>
+        </p:style>
+        <p:txBody>
+          <a:bodyPr rtlCol="0" anchor="ctr"/>
+          <a:lstStyle/>
+          <a:p>
+            <a:pPr algn="ctr"/>
+          </a:p>
+        </p:txBody>
+      </p:sp>
+      <p:sp>
+        <p:nvSpPr>
+          <p:cNvPr id="11" name="Rectangle 10"/>
+          <p:cNvSpPr/>
+          <p:nvPr/>
+        </p:nvSpPr>
+        <p:spPr>
+          <a:xfrm>
+            <a:off x="6217920" y="2798064"/>
+            <a:ext cx="5349240" cy="3099816"/>
+          </a:xfrm>
+          <a:prstGeom prst="rect">
+            <a:avLst/>
+          </a:prstGeom>
+          <a:solidFill>
+            <a:srgbClr val="F4F6F9"/>
+          </a:solidFill>
+          <a:ln>
+            <a:noFill/>
+          </a:ln>
+        </p:spPr>
+        <p:style>
+          <a:lnRef idx="1">
+            <a:schemeClr val="accent1"/>
+          </a:lnRef>
+          <a:fillRef idx="3">
+            <a:schemeClr val="accent1"/>
+          </a:fillRef>
+          <a:effectRef idx="2">
+            <a:schemeClr val="accent1"/>
+          </a:effectRef>
+          <a:fontRef idx="minor">
+            <a:schemeClr val="lt1"/>
+          </a:fontRef>
+        </p:style>
+        <p:txBody>
+          <a:bodyPr rtlCol="0" anchor="ctr"/>
+          <a:lstStyle/>
+          <a:p>
+            <a:pPr algn="ctr"/>
+          </a:p>
+        </p:txBody>
+      </p:sp>
+      <p:sp>
+        <p:nvSpPr>
+          <p:cNvPr id="12" name="TextBox 11"/>
+          <p:cNvSpPr txBox="1"/>
+          <p:nvPr/>
+        </p:nvSpPr>
+        <p:spPr>
+          <a:xfrm>
+            <a:off x="6364224" y="2889504"/>
+            <a:ext cx="5056632" cy="329184"/>
+          </a:xfrm>
+          <a:prstGeom prst="rect">
+            <a:avLst/>
+          </a:prstGeom>
+          <a:noFill/>
+        </p:spPr>
+        <p:txBody>
+          <a:bodyPr wrap="square">
+            <a:spAutoFit/>
+          </a:bodyPr>
+          <a:lstStyle/>
+          <a:p>
+            <a:r>
+              <a:rPr sz="1400" b="1">
+                <a:solidFill>
+                  <a:srgbClr val="1B365D"/>
+                </a:solidFill>
+                <a:latin typeface="Calibri"/>
+              </a:rPr>
+              <a:t>Listing</a:t>
+            </a:r>
+          </a:p>
+        </p:txBody>
+      </p:sp>
+      <p:sp>
+        <p:nvSpPr>
+          <p:cNvPr id="13" name="TextBox 12"/>
+          <p:cNvSpPr txBox="1"/>
+          <p:nvPr/>
+        </p:nvSpPr>
+        <p:spPr>
+          <a:xfrm>
+            <a:off x="6364224" y="3218688"/>
+            <a:ext cx="5056632" cy="2532888"/>
+          </a:xfrm>
+          <a:prstGeom prst="rect">
+            <a:avLst/>
+          </a:prstGeom>
+          <a:noFill/>
+        </p:spPr>
+        <p:txBody>
+          <a:bodyPr wrap="square">
+            <a:spAutoFit/>
+          </a:bodyPr>
+          <a:lstStyle/>
+          <a:p>
+            <a:pPr>
+              <a:spcAft>
+                <a:spcPts val="600"/>
+              </a:spcAft>
+            </a:pPr>
+            <a:r>
+              <a:rPr sz="1300" b="0">
+                <a:solidFill>
+                  <a:srgbClr val="3D4450"/>
+                </a:solidFill>
+                <a:latin typeface="Calibri"/>
+              </a:rPr>
               <a:t>https://chromewebstore.google.com/detail/orgflow/cldfmnjjonlakccebbfnaaihneonhflc</a:t>
             </a:r>
-            <a:br/>
-            <a:br/>
-            <a:r>
-              <a:t>This file opens in Google Slides: Drive → New → File upload → Open with Google Slides.</a:t>
+          </a:p>
+        </p:txBody>
+      </p:sp>
+      <p:sp>
+        <p:nvSpPr>
+          <p:cNvPr id="14" name="Rectangle 13"/>
+          <p:cNvSpPr/>
+          <p:nvPr/>
+        </p:nvSpPr>
+        <p:spPr>
+          <a:xfrm>
+            <a:off x="0" y="6537960"/>
+            <a:ext cx="12191695" cy="320040"/>
+          </a:xfrm>
+          <a:prstGeom prst="rect">
+            <a:avLst/>
+          </a:prstGeom>
+          <a:solidFill>
+            <a:srgbClr val="FFFFFF"/>
+          </a:solidFill>
+          <a:ln>
+            <a:noFill/>
+          </a:ln>
+        </p:spPr>
+        <p:style>
+          <a:lnRef idx="1">
+            <a:schemeClr val="accent1"/>
+          </a:lnRef>
+          <a:fillRef idx="3">
+            <a:schemeClr val="accent1"/>
+          </a:fillRef>
+          <a:effectRef idx="2">
+            <a:schemeClr val="accent1"/>
+          </a:effectRef>
+          <a:fontRef idx="minor">
+            <a:schemeClr val="lt1"/>
+          </a:fontRef>
+        </p:style>
+        <p:txBody>
+          <a:bodyPr rtlCol="0" anchor="ctr"/>
+          <a:lstStyle/>
+          <a:p>
+            <a:pPr algn="ctr"/>
+          </a:p>
+        </p:txBody>
+      </p:sp>
+      <p:sp>
+        <p:nvSpPr>
+          <p:cNvPr id="15" name="Rectangle 14"/>
+          <p:cNvSpPr/>
+          <p:nvPr/>
+        </p:nvSpPr>
+        <p:spPr>
+          <a:xfrm>
+            <a:off x="0" y="6537960"/>
+            <a:ext cx="12191695" cy="12700"/>
+          </a:xfrm>
+          <a:prstGeom prst="rect">
+            <a:avLst/>
+          </a:prstGeom>
+          <a:solidFill>
+            <a:srgbClr val="D8DEE6"/>
+          </a:solidFill>
+          <a:ln>
+            <a:noFill/>
+          </a:ln>
+        </p:spPr>
+        <p:style>
+          <a:lnRef idx="1">
+            <a:schemeClr val="accent1"/>
+          </a:lnRef>
+          <a:fillRef idx="3">
+            <a:schemeClr val="accent1"/>
+          </a:fillRef>
+          <a:effectRef idx="2">
+            <a:schemeClr val="accent1"/>
+          </a:effectRef>
+          <a:fontRef idx="minor">
+            <a:schemeClr val="lt1"/>
+          </a:fontRef>
+        </p:style>
+        <p:txBody>
+          <a:bodyPr rtlCol="0" anchor="ctr"/>
+          <a:lstStyle/>
+          <a:p>
+            <a:pPr algn="ctr"/>
+          </a:p>
+        </p:txBody>
+      </p:sp>
+      <p:sp>
+        <p:nvSpPr>
+          <p:cNvPr id="16" name="TextBox 15"/>
+          <p:cNvSpPr txBox="1"/>
+          <p:nvPr/>
+        </p:nvSpPr>
+        <p:spPr>
+          <a:xfrm>
+            <a:off x="640080" y="6565392"/>
+            <a:ext cx="6400800" cy="256032"/>
+          </a:xfrm>
+          <a:prstGeom prst="rect">
+            <a:avLst/>
+          </a:prstGeom>
+          <a:noFill/>
+        </p:spPr>
+        <p:txBody>
+          <a:bodyPr wrap="square">
+            <a:spAutoFit/>
+          </a:bodyPr>
+          <a:lstStyle/>
+          <a:p>
+            <a:r>
+              <a:rPr sz="1100" b="0">
+                <a:solidFill>
+                  <a:srgbClr val="6B7280"/>
+                </a:solidFill>
+                <a:latin typeface="Calibri"/>
+              </a:rPr>
+              <a:t>OrgFlow  ·  Internal use</a:t>
+            </a:r>
+          </a:p>
+        </p:txBody>
+      </p:sp>
+      <p:sp>
+        <p:nvSpPr>
+          <p:cNvPr id="17" name="TextBox 16"/>
+          <p:cNvSpPr txBox="1"/>
+          <p:nvPr/>
+        </p:nvSpPr>
+        <p:spPr>
+          <a:xfrm>
+            <a:off x="9326880" y="6565392"/>
+            <a:ext cx="2194560" cy="256032"/>
+          </a:xfrm>
+          <a:prstGeom prst="rect">
+            <a:avLst/>
+          </a:prstGeom>
+          <a:noFill/>
+        </p:spPr>
+        <p:txBody>
+          <a:bodyPr wrap="none">
+            <a:spAutoFit/>
+          </a:bodyPr>
+          <a:lstStyle/>
+          <a:p>
+            <a:pPr algn="r"/>
+            <a:r>
+              <a:rPr sz="1100" b="0">
+                <a:solidFill>
+                  <a:srgbClr val="6B7280"/>
+                </a:solidFill>
+                <a:latin typeface="Calibri"/>
+              </a:rPr>
+              <a:t>11  /  11</a:t>
             </a:r>
           </a:p>
         </p:txBody>
@@ -3769,7 +4765,7 @@
             <a:avLst/>
           </a:prstGeom>
           <a:solidFill>
-            <a:srgbClr val="12151C"/>
+            <a:srgbClr val="FFFFFF"/>
           </a:solidFill>
           <a:ln>
             <a:noFill/>
@@ -3806,7 +4802,7 @@
         <p:spPr>
           <a:xfrm>
             <a:off x="640080" y="347472"/>
-            <a:ext cx="10972800" cy="320040"/>
+            <a:ext cx="10972800" cy="256032"/>
           </a:xfrm>
           <a:prstGeom prst="rect">
             <a:avLst/>
@@ -3819,16 +4815,14 @@
           </a:bodyPr>
           <a:lstStyle/>
           <a:p>
-            <a:pPr>
-              <a:defRPr sz="1200" b="1">
-                <a:solidFill>
-                  <a:srgbClr val="C5BBA8"/>
-                </a:solidFill>
-                <a:latin typeface="Calibri"/>
-              </a:defRPr>
-            </a:pPr>
-            <a:r>
-              <a:t>WHY THIS IS ON A MANAGER’S DESK</a:t>
+            <a:r>
+              <a:rPr sz="1100" b="1">
+                <a:solidFill>
+                  <a:srgbClr val="8A7348"/>
+                </a:solidFill>
+                <a:latin typeface="Calibri"/>
+              </a:rPr>
+              <a:t>CONTENTS</a:t>
             </a:r>
           </a:p>
         </p:txBody>
@@ -3841,8 +4835,8 @@
         </p:nvSpPr>
         <p:spPr>
           <a:xfrm>
-            <a:off x="640080" y="658368"/>
-            <a:ext cx="10972800" cy="1051560"/>
+            <a:off x="640080" y="621792"/>
+            <a:ext cx="10972800" cy="822960"/>
           </a:xfrm>
           <a:prstGeom prst="rect">
             <a:avLst/>
@@ -3855,41 +4849,37 @@
           </a:bodyPr>
           <a:lstStyle/>
           <a:p>
-            <a:pPr>
-              <a:defRPr sz="3200" b="1">
-                <a:solidFill>
-                  <a:srgbClr val="FFFFFF"/>
-                </a:solidFill>
-                <a:latin typeface="Calibri"/>
-              </a:defRPr>
-            </a:pPr>
-            <a:r>
-              <a:t>Small config changes are still expensive</a:t>
-            </a:r>
-          </a:p>
-        </p:txBody>
-      </p:sp>
-      <p:sp>
-        <p:nvSpPr>
-          <p:cNvPr id="5" name="Rounded Rectangle 4"/>
+            <a:r>
+              <a:rPr sz="2600" b="1">
+                <a:solidFill>
+                  <a:srgbClr val="1B365D"/>
+                </a:solidFill>
+                <a:latin typeface="Calibri"/>
+              </a:rPr>
+              <a:t>Agenda</a:t>
+            </a:r>
+          </a:p>
+        </p:txBody>
+      </p:sp>
+      <p:sp>
+        <p:nvSpPr>
+          <p:cNvPr id="5" name="Rectangle 4"/>
           <p:cNvSpPr/>
           <p:nvPr/>
         </p:nvSpPr>
         <p:spPr>
           <a:xfrm>
-            <a:off x="640080" y="1920240"/>
-            <a:ext cx="3474720" cy="3931920"/>
-          </a:xfrm>
-          <a:prstGeom prst="roundRect">
+            <a:off x="640080" y="2258568"/>
+            <a:ext cx="10789920" cy="12700"/>
+          </a:xfrm>
+          <a:prstGeom prst="rect">
             <a:avLst/>
           </a:prstGeom>
           <a:solidFill>
-            <a:srgbClr val="1C212C"/>
+            <a:srgbClr val="D8DEE6"/>
           </a:solidFill>
           <a:ln>
-            <a:solidFill>
-              <a:srgbClr val="3A3F4A"/>
-            </a:solidFill>
+            <a:noFill/>
           </a:ln>
         </p:spPr>
         <p:style>
@@ -3907,60 +4897,100 @@
           </a:fontRef>
         </p:style>
         <p:txBody>
-          <a:bodyPr rtlCol="0" anchor="ctr" wrap="square" lIns="146304" rIns="146304" tIns="109728"/>
-          <a:lstStyle/>
-          <a:p>
-            <a:pPr algn="ctr">
-              <a:defRPr sz="1600" b="1">
-                <a:solidFill>
-                  <a:srgbClr val="FFFFFF"/>
-                </a:solidFill>
-                <a:latin typeface="Calibri"/>
-              </a:defRPr>
-            </a:pPr>
-            <a:r>
-              <a:t>Handoffs</a:t>
-            </a:r>
-          </a:p>
-          <a:p>
-            <a:pPr>
-              <a:spcBef>
-                <a:spcPts val="800"/>
-              </a:spcBef>
-              <a:defRPr sz="1300">
-                <a:solidFill>
-                  <a:srgbClr val="8F96A3"/>
-                </a:solidFill>
-                <a:latin typeface="Calibri"/>
-              </a:defRPr>
-            </a:pPr>
-            <a:r>
-              <a:t>A field or layout often waits on someone who knows VS Code, a change set, or a release tool. The work took twenty minutes. The promotion takes a day.</a:t>
-            </a:r>
-          </a:p>
-        </p:txBody>
-      </p:sp>
-      <p:sp>
-        <p:nvSpPr>
-          <p:cNvPr id="6" name="Rounded Rectangle 5"/>
+          <a:bodyPr rtlCol="0" anchor="ctr"/>
+          <a:lstStyle/>
+          <a:p>
+            <a:pPr algn="ctr"/>
+          </a:p>
+        </p:txBody>
+      </p:sp>
+      <p:sp>
+        <p:nvSpPr>
+          <p:cNvPr id="6" name="TextBox 5"/>
+          <p:cNvSpPr txBox="1"/>
+          <p:nvPr/>
+        </p:nvSpPr>
+        <p:spPr>
+          <a:xfrm>
+            <a:off x="640080" y="1691640"/>
+            <a:ext cx="640080" cy="457200"/>
+          </a:xfrm>
+          <a:prstGeom prst="rect">
+            <a:avLst/>
+          </a:prstGeom>
+          <a:noFill/>
+        </p:spPr>
+        <p:txBody>
+          <a:bodyPr wrap="square">
+            <a:spAutoFit/>
+          </a:bodyPr>
+          <a:lstStyle/>
+          <a:p>
+            <a:r>
+              <a:rPr sz="2000" b="1">
+                <a:solidFill>
+                  <a:srgbClr val="8A7348"/>
+                </a:solidFill>
+                <a:latin typeface="Calibri"/>
+              </a:rPr>
+              <a:t>01</a:t>
+            </a:r>
+          </a:p>
+        </p:txBody>
+      </p:sp>
+      <p:sp>
+        <p:nvSpPr>
+          <p:cNvPr id="7" name="TextBox 6"/>
+          <p:cNvSpPr txBox="1"/>
+          <p:nvPr/>
+        </p:nvSpPr>
+        <p:spPr>
+          <a:xfrm>
+            <a:off x="1417320" y="1691640"/>
+            <a:ext cx="9601200" cy="457200"/>
+          </a:xfrm>
+          <a:prstGeom prst="rect">
+            <a:avLst/>
+          </a:prstGeom>
+          <a:noFill/>
+        </p:spPr>
+        <p:txBody>
+          <a:bodyPr wrap="square">
+            <a:spAutoFit/>
+          </a:bodyPr>
+          <a:lstStyle/>
+          <a:p>
+            <a:r>
+              <a:rPr sz="2000" b="0">
+                <a:solidFill>
+                  <a:srgbClr val="1A1D23"/>
+                </a:solidFill>
+                <a:latin typeface="Calibri"/>
+              </a:rPr>
+              <a:t>Context and the recommendation</a:t>
+            </a:r>
+          </a:p>
+        </p:txBody>
+      </p:sp>
+      <p:sp>
+        <p:nvSpPr>
+          <p:cNvPr id="8" name="Rectangle 7"/>
           <p:cNvSpPr/>
           <p:nvPr/>
         </p:nvSpPr>
         <p:spPr>
           <a:xfrm>
-            <a:off x="4297680" y="1920240"/>
-            <a:ext cx="3474720" cy="3931920"/>
-          </a:xfrm>
-          <a:prstGeom prst="roundRect">
+            <a:off x="640080" y="2971800"/>
+            <a:ext cx="10789920" cy="12700"/>
+          </a:xfrm>
+          <a:prstGeom prst="rect">
             <a:avLst/>
           </a:prstGeom>
           <a:solidFill>
-            <a:srgbClr val="1C212C"/>
+            <a:srgbClr val="D8DEE6"/>
           </a:solidFill>
           <a:ln>
-            <a:solidFill>
-              <a:srgbClr val="3A3F4A"/>
-            </a:solidFill>
+            <a:noFill/>
           </a:ln>
         </p:spPr>
         <p:style>
@@ -3978,60 +5008,100 @@
           </a:fontRef>
         </p:style>
         <p:txBody>
-          <a:bodyPr rtlCol="0" anchor="ctr" wrap="square" lIns="146304" rIns="146304" tIns="109728"/>
-          <a:lstStyle/>
-          <a:p>
-            <a:pPr algn="ctr">
-              <a:defRPr sz="1600" b="1">
-                <a:solidFill>
-                  <a:srgbClr val="FFFFFF"/>
-                </a:solidFill>
-                <a:latin typeface="Calibri"/>
-              </a:defRPr>
-            </a:pPr>
-            <a:r>
-              <a:t>Tool sprawl</a:t>
-            </a:r>
-          </a:p>
-          <a:p>
-            <a:pPr>
-              <a:spcBef>
-                <a:spcPts val="800"/>
-              </a:spcBef>
-              <a:defRPr sz="1300">
-                <a:solidFill>
-                  <a:srgbClr val="8F96A3"/>
-                </a:solidFill>
-                <a:latin typeface="Calibri"/>
-              </a:defRPr>
-            </a:pPr>
-            <a:r>
-              <a:t>Workbench for zips. VS Code for source. A DevOps platform for releases. None match “send this named change to the next org.”</a:t>
-            </a:r>
-          </a:p>
-        </p:txBody>
-      </p:sp>
-      <p:sp>
-        <p:nvSpPr>
-          <p:cNvPr id="7" name="Rounded Rectangle 6"/>
+          <a:bodyPr rtlCol="0" anchor="ctr"/>
+          <a:lstStyle/>
+          <a:p>
+            <a:pPr algn="ctr"/>
+          </a:p>
+        </p:txBody>
+      </p:sp>
+      <p:sp>
+        <p:nvSpPr>
+          <p:cNvPr id="9" name="TextBox 8"/>
+          <p:cNvSpPr txBox="1"/>
+          <p:nvPr/>
+        </p:nvSpPr>
+        <p:spPr>
+          <a:xfrm>
+            <a:off x="640080" y="2404872"/>
+            <a:ext cx="640080" cy="457200"/>
+          </a:xfrm>
+          <a:prstGeom prst="rect">
+            <a:avLst/>
+          </a:prstGeom>
+          <a:noFill/>
+        </p:spPr>
+        <p:txBody>
+          <a:bodyPr wrap="square">
+            <a:spAutoFit/>
+          </a:bodyPr>
+          <a:lstStyle/>
+          <a:p>
+            <a:r>
+              <a:rPr sz="2000" b="1">
+                <a:solidFill>
+                  <a:srgbClr val="8A7348"/>
+                </a:solidFill>
+                <a:latin typeface="Calibri"/>
+              </a:rPr>
+              <a:t>02</a:t>
+            </a:r>
+          </a:p>
+        </p:txBody>
+      </p:sp>
+      <p:sp>
+        <p:nvSpPr>
+          <p:cNvPr id="10" name="TextBox 9"/>
+          <p:cNvSpPr txBox="1"/>
+          <p:nvPr/>
+        </p:nvSpPr>
+        <p:spPr>
+          <a:xfrm>
+            <a:off x="1417320" y="2404872"/>
+            <a:ext cx="9601200" cy="457200"/>
+          </a:xfrm>
+          <a:prstGeom prst="rect">
+            <a:avLst/>
+          </a:prstGeom>
+          <a:noFill/>
+        </p:spPr>
+        <p:txBody>
+          <a:bodyPr wrap="square">
+            <a:spAutoFit/>
+          </a:bodyPr>
+          <a:lstStyle/>
+          <a:p>
+            <a:r>
+              <a:rPr sz="2000" b="0">
+                <a:solidFill>
+                  <a:srgbClr val="1A1D23"/>
+                </a:solidFill>
+                <a:latin typeface="Calibri"/>
+              </a:rPr>
+              <a:t>Intended users and operating model</a:t>
+            </a:r>
+          </a:p>
+        </p:txBody>
+      </p:sp>
+      <p:sp>
+        <p:nvSpPr>
+          <p:cNvPr id="11" name="Rectangle 10"/>
           <p:cNvSpPr/>
           <p:nvPr/>
         </p:nvSpPr>
         <p:spPr>
           <a:xfrm>
-            <a:off x="7955279" y="1920240"/>
-            <a:ext cx="3474720" cy="3931920"/>
-          </a:xfrm>
-          <a:prstGeom prst="roundRect">
+            <a:off x="640080" y="3685032"/>
+            <a:ext cx="10789920" cy="12700"/>
+          </a:xfrm>
+          <a:prstGeom prst="rect">
             <a:avLst/>
           </a:prstGeom>
           <a:solidFill>
-            <a:srgbClr val="1C212C"/>
+            <a:srgbClr val="D8DEE6"/>
           </a:solidFill>
           <a:ln>
-            <a:solidFill>
-              <a:srgbClr val="3A3F4A"/>
-            </a:solidFill>
+            <a:noFill/>
           </a:ln>
         </p:spPr>
         <p:style>
@@ -4049,35 +5119,343 @@
           </a:fontRef>
         </p:style>
         <p:txBody>
-          <a:bodyPr rtlCol="0" anchor="ctr" wrap="square" lIns="146304" rIns="146304" tIns="109728"/>
-          <a:lstStyle/>
-          <a:p>
-            <a:pPr algn="ctr">
-              <a:defRPr sz="1600" b="1">
-                <a:solidFill>
-                  <a:srgbClr val="FFFFFF"/>
-                </a:solidFill>
-                <a:latin typeface="Calibri"/>
-              </a:defRPr>
-            </a:pPr>
-            <a:r>
-              <a:t>Wrong package risk</a:t>
-            </a:r>
-          </a:p>
-          <a:p>
-            <a:pPr>
-              <a:spcBef>
-                <a:spcPts val="800"/>
-              </a:spcBef>
-              <a:defRPr sz="1300">
-                <a:solidFill>
-                  <a:srgbClr val="8F96A3"/>
-                </a:solidFill>
-                <a:latin typeface="Calibri"/>
-              </a:defRPr>
-            </a:pPr>
-            <a:r>
-              <a:t>People rebuild the list in each org. OrgFlow keeps one snapshot and walks it DEC → QA → prod so both receive the same files.</a:t>
+          <a:bodyPr rtlCol="0" anchor="ctr"/>
+          <a:lstStyle/>
+          <a:p>
+            <a:pPr algn="ctr"/>
+          </a:p>
+        </p:txBody>
+      </p:sp>
+      <p:sp>
+        <p:nvSpPr>
+          <p:cNvPr id="12" name="TextBox 11"/>
+          <p:cNvSpPr txBox="1"/>
+          <p:nvPr/>
+        </p:nvSpPr>
+        <p:spPr>
+          <a:xfrm>
+            <a:off x="640080" y="3118104"/>
+            <a:ext cx="640080" cy="457200"/>
+          </a:xfrm>
+          <a:prstGeom prst="rect">
+            <a:avLst/>
+          </a:prstGeom>
+          <a:noFill/>
+        </p:spPr>
+        <p:txBody>
+          <a:bodyPr wrap="square">
+            <a:spAutoFit/>
+          </a:bodyPr>
+          <a:lstStyle/>
+          <a:p>
+            <a:r>
+              <a:rPr sz="2000" b="1">
+                <a:solidFill>
+                  <a:srgbClr val="8A7348"/>
+                </a:solidFill>
+                <a:latin typeface="Calibri"/>
+              </a:rPr>
+              <a:t>03</a:t>
+            </a:r>
+          </a:p>
+        </p:txBody>
+      </p:sp>
+      <p:sp>
+        <p:nvSpPr>
+          <p:cNvPr id="13" name="TextBox 12"/>
+          <p:cNvSpPr txBox="1"/>
+          <p:nvPr/>
+        </p:nvSpPr>
+        <p:spPr>
+          <a:xfrm>
+            <a:off x="1417320" y="3118104"/>
+            <a:ext cx="9601200" cy="457200"/>
+          </a:xfrm>
+          <a:prstGeom prst="rect">
+            <a:avLst/>
+          </a:prstGeom>
+          <a:noFill/>
+        </p:spPr>
+        <p:txBody>
+          <a:bodyPr wrap="square">
+            <a:spAutoFit/>
+          </a:bodyPr>
+          <a:lstStyle/>
+          <a:p>
+            <a:r>
+              <a:rPr sz="2000" b="0">
+                <a:solidFill>
+                  <a:srgbClr val="1A1D23"/>
+                </a:solidFill>
+                <a:latin typeface="Calibri"/>
+              </a:rPr>
+              <a:t>Comparison with tools already in use</a:t>
+            </a:r>
+          </a:p>
+        </p:txBody>
+      </p:sp>
+      <p:sp>
+        <p:nvSpPr>
+          <p:cNvPr id="14" name="Rectangle 13"/>
+          <p:cNvSpPr/>
+          <p:nvPr/>
+        </p:nvSpPr>
+        <p:spPr>
+          <a:xfrm>
+            <a:off x="640080" y="4398264"/>
+            <a:ext cx="10789920" cy="12700"/>
+          </a:xfrm>
+          <a:prstGeom prst="rect">
+            <a:avLst/>
+          </a:prstGeom>
+          <a:solidFill>
+            <a:srgbClr val="D8DEE6"/>
+          </a:solidFill>
+          <a:ln>
+            <a:noFill/>
+          </a:ln>
+        </p:spPr>
+        <p:style>
+          <a:lnRef idx="1">
+            <a:schemeClr val="accent1"/>
+          </a:lnRef>
+          <a:fillRef idx="3">
+            <a:schemeClr val="accent1"/>
+          </a:fillRef>
+          <a:effectRef idx="2">
+            <a:schemeClr val="accent1"/>
+          </a:effectRef>
+          <a:fontRef idx="minor">
+            <a:schemeClr val="lt1"/>
+          </a:fontRef>
+        </p:style>
+        <p:txBody>
+          <a:bodyPr rtlCol="0" anchor="ctr"/>
+          <a:lstStyle/>
+          <a:p>
+            <a:pPr algn="ctr"/>
+          </a:p>
+        </p:txBody>
+      </p:sp>
+      <p:sp>
+        <p:nvSpPr>
+          <p:cNvPr id="15" name="TextBox 14"/>
+          <p:cNvSpPr txBox="1"/>
+          <p:nvPr/>
+        </p:nvSpPr>
+        <p:spPr>
+          <a:xfrm>
+            <a:off x="640080" y="3831336"/>
+            <a:ext cx="640080" cy="457200"/>
+          </a:xfrm>
+          <a:prstGeom prst="rect">
+            <a:avLst/>
+          </a:prstGeom>
+          <a:noFill/>
+        </p:spPr>
+        <p:txBody>
+          <a:bodyPr wrap="square">
+            <a:spAutoFit/>
+          </a:bodyPr>
+          <a:lstStyle/>
+          <a:p>
+            <a:r>
+              <a:rPr sz="2000" b="1">
+                <a:solidFill>
+                  <a:srgbClr val="8A7348"/>
+                </a:solidFill>
+                <a:latin typeface="Calibri"/>
+              </a:rPr>
+              <a:t>04</a:t>
+            </a:r>
+          </a:p>
+        </p:txBody>
+      </p:sp>
+      <p:sp>
+        <p:nvSpPr>
+          <p:cNvPr id="16" name="TextBox 15"/>
+          <p:cNvSpPr txBox="1"/>
+          <p:nvPr/>
+        </p:nvSpPr>
+        <p:spPr>
+          <a:xfrm>
+            <a:off x="1417320" y="3831336"/>
+            <a:ext cx="9601200" cy="457200"/>
+          </a:xfrm>
+          <a:prstGeom prst="rect">
+            <a:avLst/>
+          </a:prstGeom>
+          <a:noFill/>
+        </p:spPr>
+        <p:txBody>
+          <a:bodyPr wrap="square">
+            <a:spAutoFit/>
+          </a:bodyPr>
+          <a:lstStyle/>
+          <a:p>
+            <a:r>
+              <a:rPr sz="2000" b="0">
+                <a:solidFill>
+                  <a:srgbClr val="1A1D23"/>
+                </a:solidFill>
+                <a:latin typeface="Calibri"/>
+              </a:rPr>
+              <a:t>Scope, governance, and a proposed pilot</a:t>
+            </a:r>
+          </a:p>
+        </p:txBody>
+      </p:sp>
+      <p:sp>
+        <p:nvSpPr>
+          <p:cNvPr id="17" name="Rectangle 16"/>
+          <p:cNvSpPr/>
+          <p:nvPr/>
+        </p:nvSpPr>
+        <p:spPr>
+          <a:xfrm>
+            <a:off x="0" y="6537960"/>
+            <a:ext cx="12191695" cy="320040"/>
+          </a:xfrm>
+          <a:prstGeom prst="rect">
+            <a:avLst/>
+          </a:prstGeom>
+          <a:solidFill>
+            <a:srgbClr val="FFFFFF"/>
+          </a:solidFill>
+          <a:ln>
+            <a:noFill/>
+          </a:ln>
+        </p:spPr>
+        <p:style>
+          <a:lnRef idx="1">
+            <a:schemeClr val="accent1"/>
+          </a:lnRef>
+          <a:fillRef idx="3">
+            <a:schemeClr val="accent1"/>
+          </a:fillRef>
+          <a:effectRef idx="2">
+            <a:schemeClr val="accent1"/>
+          </a:effectRef>
+          <a:fontRef idx="minor">
+            <a:schemeClr val="lt1"/>
+          </a:fontRef>
+        </p:style>
+        <p:txBody>
+          <a:bodyPr rtlCol="0" anchor="ctr"/>
+          <a:lstStyle/>
+          <a:p>
+            <a:pPr algn="ctr"/>
+          </a:p>
+        </p:txBody>
+      </p:sp>
+      <p:sp>
+        <p:nvSpPr>
+          <p:cNvPr id="18" name="Rectangle 17"/>
+          <p:cNvSpPr/>
+          <p:nvPr/>
+        </p:nvSpPr>
+        <p:spPr>
+          <a:xfrm>
+            <a:off x="0" y="6537960"/>
+            <a:ext cx="12191695" cy="12700"/>
+          </a:xfrm>
+          <a:prstGeom prst="rect">
+            <a:avLst/>
+          </a:prstGeom>
+          <a:solidFill>
+            <a:srgbClr val="D8DEE6"/>
+          </a:solidFill>
+          <a:ln>
+            <a:noFill/>
+          </a:ln>
+        </p:spPr>
+        <p:style>
+          <a:lnRef idx="1">
+            <a:schemeClr val="accent1"/>
+          </a:lnRef>
+          <a:fillRef idx="3">
+            <a:schemeClr val="accent1"/>
+          </a:fillRef>
+          <a:effectRef idx="2">
+            <a:schemeClr val="accent1"/>
+          </a:effectRef>
+          <a:fontRef idx="minor">
+            <a:schemeClr val="lt1"/>
+          </a:fontRef>
+        </p:style>
+        <p:txBody>
+          <a:bodyPr rtlCol="0" anchor="ctr"/>
+          <a:lstStyle/>
+          <a:p>
+            <a:pPr algn="ctr"/>
+          </a:p>
+        </p:txBody>
+      </p:sp>
+      <p:sp>
+        <p:nvSpPr>
+          <p:cNvPr id="19" name="TextBox 18"/>
+          <p:cNvSpPr txBox="1"/>
+          <p:nvPr/>
+        </p:nvSpPr>
+        <p:spPr>
+          <a:xfrm>
+            <a:off x="640080" y="6565392"/>
+            <a:ext cx="6400800" cy="256032"/>
+          </a:xfrm>
+          <a:prstGeom prst="rect">
+            <a:avLst/>
+          </a:prstGeom>
+          <a:noFill/>
+        </p:spPr>
+        <p:txBody>
+          <a:bodyPr wrap="square">
+            <a:spAutoFit/>
+          </a:bodyPr>
+          <a:lstStyle/>
+          <a:p>
+            <a:r>
+              <a:rPr sz="1100" b="0">
+                <a:solidFill>
+                  <a:srgbClr val="6B7280"/>
+                </a:solidFill>
+                <a:latin typeface="Calibri"/>
+              </a:rPr>
+              <a:t>OrgFlow  ·  Internal use</a:t>
+            </a:r>
+          </a:p>
+        </p:txBody>
+      </p:sp>
+      <p:sp>
+        <p:nvSpPr>
+          <p:cNvPr id="20" name="TextBox 19"/>
+          <p:cNvSpPr txBox="1"/>
+          <p:nvPr/>
+        </p:nvSpPr>
+        <p:spPr>
+          <a:xfrm>
+            <a:off x="9326880" y="6565392"/>
+            <a:ext cx="2194560" cy="256032"/>
+          </a:xfrm>
+          <a:prstGeom prst="rect">
+            <a:avLst/>
+          </a:prstGeom>
+          <a:noFill/>
+        </p:spPr>
+        <p:txBody>
+          <a:bodyPr wrap="none">
+            <a:spAutoFit/>
+          </a:bodyPr>
+          <a:lstStyle/>
+          <a:p>
+            <a:pPr algn="r"/>
+            <a:r>
+              <a:rPr sz="1100" b="0">
+                <a:solidFill>
+                  <a:srgbClr val="6B7280"/>
+                </a:solidFill>
+                <a:latin typeface="Calibri"/>
+              </a:rPr>
+              <a:t>2  /  11</a:t>
             </a:r>
           </a:p>
         </p:txBody>
@@ -4115,7 +5493,7 @@
             <a:avLst/>
           </a:prstGeom>
           <a:solidFill>
-            <a:srgbClr val="12151C"/>
+            <a:srgbClr val="FFFFFF"/>
           </a:solidFill>
           <a:ln>
             <a:noFill/>
@@ -4152,7 +5530,7 @@
         <p:spPr>
           <a:xfrm>
             <a:off x="640080" y="347472"/>
-            <a:ext cx="10972800" cy="320040"/>
+            <a:ext cx="10972800" cy="256032"/>
           </a:xfrm>
           <a:prstGeom prst="rect">
             <a:avLst/>
@@ -4165,16 +5543,14 @@
           </a:bodyPr>
           <a:lstStyle/>
           <a:p>
-            <a:pPr>
-              <a:defRPr sz="1200" b="1">
-                <a:solidFill>
-                  <a:srgbClr val="C5BBA8"/>
-                </a:solidFill>
-                <a:latin typeface="Calibri"/>
-              </a:defRPr>
-            </a:pPr>
-            <a:r>
-              <a:t>FIT</a:t>
+            <a:r>
+              <a:rPr sz="1100" b="1">
+                <a:solidFill>
+                  <a:srgbClr val="8A7348"/>
+                </a:solidFill>
+                <a:latin typeface="Calibri"/>
+              </a:rPr>
+              <a:t>CONTEXT</a:t>
             </a:r>
           </a:p>
         </p:txBody>
@@ -4187,8 +5563,8 @@
         </p:nvSpPr>
         <p:spPr>
           <a:xfrm>
-            <a:off x="640080" y="658368"/>
-            <a:ext cx="10972800" cy="1051560"/>
+            <a:off x="640080" y="621792"/>
+            <a:ext cx="10972800" cy="822960"/>
           </a:xfrm>
           <a:prstGeom prst="rect">
             <a:avLst/>
@@ -4201,41 +5577,71 @@
           </a:bodyPr>
           <a:lstStyle/>
           <a:p>
-            <a:pPr>
-              <a:defRPr sz="3200" b="1">
-                <a:solidFill>
-                  <a:srgbClr val="FFFFFF"/>
-                </a:solidFill>
-                <a:latin typeface="Calibri"/>
-              </a:defRPr>
-            </a:pPr>
-            <a:r>
-              <a:t>Who should use it — and who should not</a:t>
-            </a:r>
-          </a:p>
-        </p:txBody>
-      </p:sp>
-      <p:sp>
-        <p:nvSpPr>
-          <p:cNvPr id="5" name="Rounded Rectangle 4"/>
+            <a:r>
+              <a:rPr sz="2200" b="1">
+                <a:solidFill>
+                  <a:srgbClr val="1B365D"/>
+                </a:solidFill>
+                <a:latin typeface="Calibri"/>
+              </a:rPr>
+              <a:t>Small configuration changes still consume disproportionate time</a:t>
+            </a:r>
+          </a:p>
+        </p:txBody>
+      </p:sp>
+      <p:sp>
+        <p:nvSpPr>
+          <p:cNvPr id="5" name="TextBox 4"/>
+          <p:cNvSpPr txBox="1"/>
+          <p:nvPr/>
+        </p:nvSpPr>
+        <p:spPr>
+          <a:xfrm>
+            <a:off x="640080" y="1417320"/>
+            <a:ext cx="10972800" cy="640080"/>
+          </a:xfrm>
+          <a:prstGeom prst="rect">
+            <a:avLst/>
+          </a:prstGeom>
+          <a:noFill/>
+        </p:spPr>
+        <p:txBody>
+          <a:bodyPr wrap="square">
+            <a:spAutoFit/>
+          </a:bodyPr>
+          <a:lstStyle/>
+          <a:p>
+            <a:r>
+              <a:rPr sz="1600" b="0">
+                <a:solidFill>
+                  <a:srgbClr val="1A1D23"/>
+                </a:solidFill>
+                <a:latin typeface="Calibri"/>
+              </a:rPr>
+              <a:t>Administrators typically complete a field, layout, or flow in a sandbox in well under an hour. Moving that work to QA or production often takes much longer than building it.</a:t>
+            </a:r>
+          </a:p>
+        </p:txBody>
+      </p:sp>
+      <p:sp>
+        <p:nvSpPr>
+          <p:cNvPr id="6" name="Rectangle 5"/>
           <p:cNvSpPr/>
           <p:nvPr/>
         </p:nvSpPr>
         <p:spPr>
           <a:xfrm>
-            <a:off x="640080" y="1920240"/>
-            <a:ext cx="5303520" cy="4023360"/>
-          </a:xfrm>
-          <a:prstGeom prst="roundRect">
+            <a:off x="640080" y="2240280"/>
+            <a:ext cx="3520440" cy="54864"/>
+          </a:xfrm>
+          <a:prstGeom prst="rect">
             <a:avLst/>
           </a:prstGeom>
           <a:solidFill>
-            <a:srgbClr val="1C212C"/>
+            <a:srgbClr val="1B365D"/>
           </a:solidFill>
           <a:ln>
-            <a:solidFill>
-              <a:srgbClr val="3A3F4A"/>
-            </a:solidFill>
+            <a:noFill/>
           </a:ln>
         </p:spPr>
         <p:style>
@@ -4253,72 +5659,32 @@
           </a:fontRef>
         </p:style>
         <p:txBody>
-          <a:bodyPr rtlCol="0" anchor="ctr" wrap="square" lIns="146304" rIns="146304" tIns="109728"/>
-          <a:lstStyle/>
-          <a:p>
-            <a:pPr algn="ctr">
-              <a:defRPr sz="1600" b="1">
-                <a:solidFill>
-                  <a:srgbClr val="FFFFFF"/>
-                </a:solidFill>
-                <a:latin typeface="Calibri"/>
-              </a:defRPr>
-            </a:pPr>
-            <a:r>
-              <a:t>Good fit</a:t>
-            </a:r>
-          </a:p>
-          <a:p>
-            <a:pPr>
-              <a:spcBef>
-                <a:spcPts val="800"/>
-              </a:spcBef>
-              <a:defRPr sz="1300">
-                <a:solidFill>
-                  <a:srgbClr val="8F96A3"/>
-                </a:solidFill>
-                <a:latin typeface="Calibri"/>
-              </a:defRPr>
-            </a:pPr>
-            <a:r>
-              <a:t>Admins and configurators who live in Setup.</a:t>
-            </a:r>
-            <a:br/>
-            <a:r>
-              <a:t>Teams that promote a handful of named items at a time.</a:t>
-            </a:r>
-            <a:br/>
-            <a:r>
-              <a:t>Orgs that want a shared history later, not on day one.</a:t>
-            </a:r>
-            <a:br/>
-            <a:r>
-              <a:t>Managers who want a pilot without a platform RFP.</a:t>
-            </a:r>
-          </a:p>
-        </p:txBody>
-      </p:sp>
-      <p:sp>
-        <p:nvSpPr>
-          <p:cNvPr id="6" name="Rounded Rectangle 5"/>
+          <a:bodyPr rtlCol="0" anchor="ctr"/>
+          <a:lstStyle/>
+          <a:p>
+            <a:pPr algn="ctr"/>
+          </a:p>
+        </p:txBody>
+      </p:sp>
+      <p:sp>
+        <p:nvSpPr>
+          <p:cNvPr id="7" name="Rectangle 6"/>
           <p:cNvSpPr/>
           <p:nvPr/>
         </p:nvSpPr>
         <p:spPr>
           <a:xfrm>
-            <a:off x="6217920" y="1920240"/>
-            <a:ext cx="5303520" cy="4023360"/>
-          </a:xfrm>
-          <a:prstGeom prst="roundRect">
+            <a:off x="640080" y="2295144"/>
+            <a:ext cx="3520440" cy="3602736"/>
+          </a:xfrm>
+          <a:prstGeom prst="rect">
             <a:avLst/>
           </a:prstGeom>
           <a:solidFill>
-            <a:srgbClr val="1C212C"/>
+            <a:srgbClr val="F4F6F9"/>
           </a:solidFill>
           <a:ln>
-            <a:solidFill>
-              <a:srgbClr val="3A3F4A"/>
-            </a:solidFill>
+            <a:noFill/>
           </a:ln>
         </p:spPr>
         <p:style>
@@ -4336,47 +5702,555 @@
           </a:fontRef>
         </p:style>
         <p:txBody>
-          <a:bodyPr rtlCol="0" anchor="ctr" wrap="square" lIns="146304" rIns="146304" tIns="109728"/>
-          <a:lstStyle/>
-          <a:p>
-            <a:pPr algn="ctr">
-              <a:defRPr sz="1600" b="1">
-                <a:solidFill>
-                  <a:srgbClr val="FFFFFF"/>
-                </a:solidFill>
-                <a:latin typeface="Calibri"/>
-              </a:defRPr>
+          <a:bodyPr rtlCol="0" anchor="ctr"/>
+          <a:lstStyle/>
+          <a:p>
+            <a:pPr algn="ctr"/>
+          </a:p>
+        </p:txBody>
+      </p:sp>
+      <p:sp>
+        <p:nvSpPr>
+          <p:cNvPr id="8" name="TextBox 7"/>
+          <p:cNvSpPr txBox="1"/>
+          <p:nvPr/>
+        </p:nvSpPr>
+        <p:spPr>
+          <a:xfrm>
+            <a:off x="786384" y="2386584"/>
+            <a:ext cx="3227832" cy="329184"/>
+          </a:xfrm>
+          <a:prstGeom prst="rect">
+            <a:avLst/>
+          </a:prstGeom>
+          <a:noFill/>
+        </p:spPr>
+        <p:txBody>
+          <a:bodyPr wrap="square">
+            <a:spAutoFit/>
+          </a:bodyPr>
+          <a:lstStyle/>
+          <a:p>
+            <a:r>
+              <a:rPr sz="1400" b="1">
+                <a:solidFill>
+                  <a:srgbClr val="1B365D"/>
+                </a:solidFill>
+                <a:latin typeface="Calibri"/>
+              </a:rPr>
+              <a:t>Handoffs</a:t>
+            </a:r>
+          </a:p>
+        </p:txBody>
+      </p:sp>
+      <p:sp>
+        <p:nvSpPr>
+          <p:cNvPr id="9" name="TextBox 8"/>
+          <p:cNvSpPr txBox="1"/>
+          <p:nvPr/>
+        </p:nvSpPr>
+        <p:spPr>
+          <a:xfrm>
+            <a:off x="786384" y="2715768"/>
+            <a:ext cx="3227832" cy="3035808"/>
+          </a:xfrm>
+          <a:prstGeom prst="rect">
+            <a:avLst/>
+          </a:prstGeom>
+          <a:noFill/>
+        </p:spPr>
+        <p:txBody>
+          <a:bodyPr wrap="square">
+            <a:spAutoFit/>
+          </a:bodyPr>
+          <a:lstStyle/>
+          <a:p>
+            <a:pPr>
+              <a:spcAft>
+                <a:spcPts val="600"/>
+              </a:spcAft>
             </a:pPr>
             <a:r>
-              <a:t>Not a replacement for</a:t>
-            </a:r>
-          </a:p>
+              <a:rPr sz="1300" b="0">
+                <a:solidFill>
+                  <a:srgbClr val="3D4450"/>
+                </a:solidFill>
+                <a:latin typeface="Calibri"/>
+              </a:rPr>
+              <a:t>Promotion frequently waits on someone fluent in VS Code, change sets, or a release tool. The delay is process, not complexity.</a:t>
+            </a:r>
+          </a:p>
+        </p:txBody>
+      </p:sp>
+      <p:sp>
+        <p:nvSpPr>
+          <p:cNvPr id="10" name="Rectangle 9"/>
+          <p:cNvSpPr/>
+          <p:nvPr/>
+        </p:nvSpPr>
+        <p:spPr>
+          <a:xfrm>
+            <a:off x="4343400" y="2240280"/>
+            <a:ext cx="3520440" cy="54864"/>
+          </a:xfrm>
+          <a:prstGeom prst="rect">
+            <a:avLst/>
+          </a:prstGeom>
+          <a:solidFill>
+            <a:srgbClr val="1B365D"/>
+          </a:solidFill>
+          <a:ln>
+            <a:noFill/>
+          </a:ln>
+        </p:spPr>
+        <p:style>
+          <a:lnRef idx="1">
+            <a:schemeClr val="accent1"/>
+          </a:lnRef>
+          <a:fillRef idx="3">
+            <a:schemeClr val="accent1"/>
+          </a:fillRef>
+          <a:effectRef idx="2">
+            <a:schemeClr val="accent1"/>
+          </a:effectRef>
+          <a:fontRef idx="minor">
+            <a:schemeClr val="lt1"/>
+          </a:fontRef>
+        </p:style>
+        <p:txBody>
+          <a:bodyPr rtlCol="0" anchor="ctr"/>
+          <a:lstStyle/>
+          <a:p>
+            <a:pPr algn="ctr"/>
+          </a:p>
+        </p:txBody>
+      </p:sp>
+      <p:sp>
+        <p:nvSpPr>
+          <p:cNvPr id="11" name="Rectangle 10"/>
+          <p:cNvSpPr/>
+          <p:nvPr/>
+        </p:nvSpPr>
+        <p:spPr>
+          <a:xfrm>
+            <a:off x="4343400" y="2295144"/>
+            <a:ext cx="3520440" cy="3602736"/>
+          </a:xfrm>
+          <a:prstGeom prst="rect">
+            <a:avLst/>
+          </a:prstGeom>
+          <a:solidFill>
+            <a:srgbClr val="F4F6F9"/>
+          </a:solidFill>
+          <a:ln>
+            <a:noFill/>
+          </a:ln>
+        </p:spPr>
+        <p:style>
+          <a:lnRef idx="1">
+            <a:schemeClr val="accent1"/>
+          </a:lnRef>
+          <a:fillRef idx="3">
+            <a:schemeClr val="accent1"/>
+          </a:fillRef>
+          <a:effectRef idx="2">
+            <a:schemeClr val="accent1"/>
+          </a:effectRef>
+          <a:fontRef idx="minor">
+            <a:schemeClr val="lt1"/>
+          </a:fontRef>
+        </p:style>
+        <p:txBody>
+          <a:bodyPr rtlCol="0" anchor="ctr"/>
+          <a:lstStyle/>
+          <a:p>
+            <a:pPr algn="ctr"/>
+          </a:p>
+        </p:txBody>
+      </p:sp>
+      <p:sp>
+        <p:nvSpPr>
+          <p:cNvPr id="12" name="TextBox 11"/>
+          <p:cNvSpPr txBox="1"/>
+          <p:nvPr/>
+        </p:nvSpPr>
+        <p:spPr>
+          <a:xfrm>
+            <a:off x="4489704" y="2386584"/>
+            <a:ext cx="3227832" cy="329184"/>
+          </a:xfrm>
+          <a:prstGeom prst="rect">
+            <a:avLst/>
+          </a:prstGeom>
+          <a:noFill/>
+        </p:spPr>
+        <p:txBody>
+          <a:bodyPr wrap="square">
+            <a:spAutoFit/>
+          </a:bodyPr>
+          <a:lstStyle/>
+          <a:p>
+            <a:r>
+              <a:rPr sz="1400" b="1">
+                <a:solidFill>
+                  <a:srgbClr val="1B365D"/>
+                </a:solidFill>
+                <a:latin typeface="Calibri"/>
+              </a:rPr>
+              <a:t>Fragmented tooling</a:t>
+            </a:r>
+          </a:p>
+        </p:txBody>
+      </p:sp>
+      <p:sp>
+        <p:nvSpPr>
+          <p:cNvPr id="13" name="TextBox 12"/>
+          <p:cNvSpPr txBox="1"/>
+          <p:nvPr/>
+        </p:nvSpPr>
+        <p:spPr>
+          <a:xfrm>
+            <a:off x="4489704" y="2715768"/>
+            <a:ext cx="3227832" cy="3035808"/>
+          </a:xfrm>
+          <a:prstGeom prst="rect">
+            <a:avLst/>
+          </a:prstGeom>
+          <a:noFill/>
+        </p:spPr>
+        <p:txBody>
+          <a:bodyPr wrap="square">
+            <a:spAutoFit/>
+          </a:bodyPr>
+          <a:lstStyle/>
           <a:p>
             <a:pPr>
-              <a:spcBef>
-                <a:spcPts val="800"/>
-              </a:spcBef>
-              <a:defRPr sz="1300">
-                <a:solidFill>
-                  <a:srgbClr val="8F96A3"/>
-                </a:solidFill>
-                <a:latin typeface="Calibri"/>
-              </a:defRPr>
+              <a:spcAft>
+                <a:spcPts val="600"/>
+              </a:spcAft>
             </a:pPr>
             <a:r>
-              <a:t>Developer source work (Apex, LWC, CI) in VS Code.</a:t>
-            </a:r>
-            <a:br/>
-            <a:r>
-              <a:t>Enterprise release trains (Copado, Gearset, Flosum).</a:t>
-            </a:r>
-            <a:br/>
-            <a:r>
-              <a:t>Data / record migration.</a:t>
-            </a:r>
-            <a:br/>
-            <a:r>
-              <a:t>Automatic dependency analysis of a whole org.</a:t>
+              <a:rPr sz="1300" b="0">
+                <a:solidFill>
+                  <a:srgbClr val="3D4450"/>
+                </a:solidFill>
+                <a:latin typeface="Calibri"/>
+              </a:rPr>
+              <a:t>Workbench, the Salesforce CLI, and enterprise DevOps platforms each solve a different job. None is designed for a short, named configuration move.</a:t>
+            </a:r>
+          </a:p>
+        </p:txBody>
+      </p:sp>
+      <p:sp>
+        <p:nvSpPr>
+          <p:cNvPr id="14" name="Rectangle 13"/>
+          <p:cNvSpPr/>
+          <p:nvPr/>
+        </p:nvSpPr>
+        <p:spPr>
+          <a:xfrm>
+            <a:off x="8046720" y="2240280"/>
+            <a:ext cx="3520440" cy="54864"/>
+          </a:xfrm>
+          <a:prstGeom prst="rect">
+            <a:avLst/>
+          </a:prstGeom>
+          <a:solidFill>
+            <a:srgbClr val="1B365D"/>
+          </a:solidFill>
+          <a:ln>
+            <a:noFill/>
+          </a:ln>
+        </p:spPr>
+        <p:style>
+          <a:lnRef idx="1">
+            <a:schemeClr val="accent1"/>
+          </a:lnRef>
+          <a:fillRef idx="3">
+            <a:schemeClr val="accent1"/>
+          </a:fillRef>
+          <a:effectRef idx="2">
+            <a:schemeClr val="accent1"/>
+          </a:effectRef>
+          <a:fontRef idx="minor">
+            <a:schemeClr val="lt1"/>
+          </a:fontRef>
+        </p:style>
+        <p:txBody>
+          <a:bodyPr rtlCol="0" anchor="ctr"/>
+          <a:lstStyle/>
+          <a:p>
+            <a:pPr algn="ctr"/>
+          </a:p>
+        </p:txBody>
+      </p:sp>
+      <p:sp>
+        <p:nvSpPr>
+          <p:cNvPr id="15" name="Rectangle 14"/>
+          <p:cNvSpPr/>
+          <p:nvPr/>
+        </p:nvSpPr>
+        <p:spPr>
+          <a:xfrm>
+            <a:off x="8046720" y="2295144"/>
+            <a:ext cx="3520440" cy="3602736"/>
+          </a:xfrm>
+          <a:prstGeom prst="rect">
+            <a:avLst/>
+          </a:prstGeom>
+          <a:solidFill>
+            <a:srgbClr val="F4F6F9"/>
+          </a:solidFill>
+          <a:ln>
+            <a:noFill/>
+          </a:ln>
+        </p:spPr>
+        <p:style>
+          <a:lnRef idx="1">
+            <a:schemeClr val="accent1"/>
+          </a:lnRef>
+          <a:fillRef idx="3">
+            <a:schemeClr val="accent1"/>
+          </a:fillRef>
+          <a:effectRef idx="2">
+            <a:schemeClr val="accent1"/>
+          </a:effectRef>
+          <a:fontRef idx="minor">
+            <a:schemeClr val="lt1"/>
+          </a:fontRef>
+        </p:style>
+        <p:txBody>
+          <a:bodyPr rtlCol="0" anchor="ctr"/>
+          <a:lstStyle/>
+          <a:p>
+            <a:pPr algn="ctr"/>
+          </a:p>
+        </p:txBody>
+      </p:sp>
+      <p:sp>
+        <p:nvSpPr>
+          <p:cNvPr id="16" name="TextBox 15"/>
+          <p:cNvSpPr txBox="1"/>
+          <p:nvPr/>
+        </p:nvSpPr>
+        <p:spPr>
+          <a:xfrm>
+            <a:off x="8193024" y="2386584"/>
+            <a:ext cx="3227832" cy="329184"/>
+          </a:xfrm>
+          <a:prstGeom prst="rect">
+            <a:avLst/>
+          </a:prstGeom>
+          <a:noFill/>
+        </p:spPr>
+        <p:txBody>
+          <a:bodyPr wrap="square">
+            <a:spAutoFit/>
+          </a:bodyPr>
+          <a:lstStyle/>
+          <a:p>
+            <a:r>
+              <a:rPr sz="1400" b="1">
+                <a:solidFill>
+                  <a:srgbClr val="1B365D"/>
+                </a:solidFill>
+                <a:latin typeface="Calibri"/>
+              </a:rPr>
+              <a:t>Inconsistent packages</a:t>
+            </a:r>
+          </a:p>
+        </p:txBody>
+      </p:sp>
+      <p:sp>
+        <p:nvSpPr>
+          <p:cNvPr id="17" name="TextBox 16"/>
+          <p:cNvSpPr txBox="1"/>
+          <p:nvPr/>
+        </p:nvSpPr>
+        <p:spPr>
+          <a:xfrm>
+            <a:off x="8193024" y="2715768"/>
+            <a:ext cx="3227832" cy="3035808"/>
+          </a:xfrm>
+          <a:prstGeom prst="rect">
+            <a:avLst/>
+          </a:prstGeom>
+          <a:noFill/>
+        </p:spPr>
+        <p:txBody>
+          <a:bodyPr wrap="square">
+            <a:spAutoFit/>
+          </a:bodyPr>
+          <a:lstStyle/>
+          <a:p>
+            <a:pPr>
+              <a:spcAft>
+                <a:spcPts val="600"/>
+              </a:spcAft>
+            </a:pPr>
+            <a:r>
+              <a:rPr sz="1300" b="0">
+                <a:solidFill>
+                  <a:srgbClr val="3D4450"/>
+                </a:solidFill>
+                <a:latin typeface="Calibri"/>
+              </a:rPr>
+              <a:t>Rebuilding the component list in each environment increases the chance that QA and production do not receive the same change.</a:t>
+            </a:r>
+          </a:p>
+        </p:txBody>
+      </p:sp>
+      <p:sp>
+        <p:nvSpPr>
+          <p:cNvPr id="18" name="Rectangle 17"/>
+          <p:cNvSpPr/>
+          <p:nvPr/>
+        </p:nvSpPr>
+        <p:spPr>
+          <a:xfrm>
+            <a:off x="0" y="6537960"/>
+            <a:ext cx="12191695" cy="320040"/>
+          </a:xfrm>
+          <a:prstGeom prst="rect">
+            <a:avLst/>
+          </a:prstGeom>
+          <a:solidFill>
+            <a:srgbClr val="FFFFFF"/>
+          </a:solidFill>
+          <a:ln>
+            <a:noFill/>
+          </a:ln>
+        </p:spPr>
+        <p:style>
+          <a:lnRef idx="1">
+            <a:schemeClr val="accent1"/>
+          </a:lnRef>
+          <a:fillRef idx="3">
+            <a:schemeClr val="accent1"/>
+          </a:fillRef>
+          <a:effectRef idx="2">
+            <a:schemeClr val="accent1"/>
+          </a:effectRef>
+          <a:fontRef idx="minor">
+            <a:schemeClr val="lt1"/>
+          </a:fontRef>
+        </p:style>
+        <p:txBody>
+          <a:bodyPr rtlCol="0" anchor="ctr"/>
+          <a:lstStyle/>
+          <a:p>
+            <a:pPr algn="ctr"/>
+          </a:p>
+        </p:txBody>
+      </p:sp>
+      <p:sp>
+        <p:nvSpPr>
+          <p:cNvPr id="19" name="Rectangle 18"/>
+          <p:cNvSpPr/>
+          <p:nvPr/>
+        </p:nvSpPr>
+        <p:spPr>
+          <a:xfrm>
+            <a:off x="0" y="6537960"/>
+            <a:ext cx="12191695" cy="12700"/>
+          </a:xfrm>
+          <a:prstGeom prst="rect">
+            <a:avLst/>
+          </a:prstGeom>
+          <a:solidFill>
+            <a:srgbClr val="D8DEE6"/>
+          </a:solidFill>
+          <a:ln>
+            <a:noFill/>
+          </a:ln>
+        </p:spPr>
+        <p:style>
+          <a:lnRef idx="1">
+            <a:schemeClr val="accent1"/>
+          </a:lnRef>
+          <a:fillRef idx="3">
+            <a:schemeClr val="accent1"/>
+          </a:fillRef>
+          <a:effectRef idx="2">
+            <a:schemeClr val="accent1"/>
+          </a:effectRef>
+          <a:fontRef idx="minor">
+            <a:schemeClr val="lt1"/>
+          </a:fontRef>
+        </p:style>
+        <p:txBody>
+          <a:bodyPr rtlCol="0" anchor="ctr"/>
+          <a:lstStyle/>
+          <a:p>
+            <a:pPr algn="ctr"/>
+          </a:p>
+        </p:txBody>
+      </p:sp>
+      <p:sp>
+        <p:nvSpPr>
+          <p:cNvPr id="20" name="TextBox 19"/>
+          <p:cNvSpPr txBox="1"/>
+          <p:nvPr/>
+        </p:nvSpPr>
+        <p:spPr>
+          <a:xfrm>
+            <a:off x="640080" y="6565392"/>
+            <a:ext cx="6400800" cy="256032"/>
+          </a:xfrm>
+          <a:prstGeom prst="rect">
+            <a:avLst/>
+          </a:prstGeom>
+          <a:noFill/>
+        </p:spPr>
+        <p:txBody>
+          <a:bodyPr wrap="square">
+            <a:spAutoFit/>
+          </a:bodyPr>
+          <a:lstStyle/>
+          <a:p>
+            <a:r>
+              <a:rPr sz="1100" b="0">
+                <a:solidFill>
+                  <a:srgbClr val="6B7280"/>
+                </a:solidFill>
+                <a:latin typeface="Calibri"/>
+              </a:rPr>
+              <a:t>OrgFlow  ·  Internal use</a:t>
+            </a:r>
+          </a:p>
+        </p:txBody>
+      </p:sp>
+      <p:sp>
+        <p:nvSpPr>
+          <p:cNvPr id="21" name="TextBox 20"/>
+          <p:cNvSpPr txBox="1"/>
+          <p:nvPr/>
+        </p:nvSpPr>
+        <p:spPr>
+          <a:xfrm>
+            <a:off x="9326880" y="6565392"/>
+            <a:ext cx="2194560" cy="256032"/>
+          </a:xfrm>
+          <a:prstGeom prst="rect">
+            <a:avLst/>
+          </a:prstGeom>
+          <a:noFill/>
+        </p:spPr>
+        <p:txBody>
+          <a:bodyPr wrap="none">
+            <a:spAutoFit/>
+          </a:bodyPr>
+          <a:lstStyle/>
+          <a:p>
+            <a:pPr algn="r"/>
+            <a:r>
+              <a:rPr sz="1100" b="0">
+                <a:solidFill>
+                  <a:srgbClr val="6B7280"/>
+                </a:solidFill>
+                <a:latin typeface="Calibri"/>
+              </a:rPr>
+              <a:t>3  /  11</a:t>
             </a:r>
           </a:p>
         </p:txBody>
@@ -4414,7 +6288,7 @@
             <a:avLst/>
           </a:prstGeom>
           <a:solidFill>
-            <a:srgbClr val="12151C"/>
+            <a:srgbClr val="FFFFFF"/>
           </a:solidFill>
           <a:ln>
             <a:noFill/>
@@ -4451,7 +6325,7 @@
         <p:spPr>
           <a:xfrm>
             <a:off x="640080" y="347472"/>
-            <a:ext cx="10972800" cy="320040"/>
+            <a:ext cx="10972800" cy="256032"/>
           </a:xfrm>
           <a:prstGeom prst="rect">
             <a:avLst/>
@@ -4464,16 +6338,14 @@
           </a:bodyPr>
           <a:lstStyle/>
           <a:p>
-            <a:pPr>
-              <a:defRPr sz="1200" b="1">
-                <a:solidFill>
-                  <a:srgbClr val="C5BBA8"/>
-                </a:solidFill>
-                <a:latin typeface="Calibri"/>
-              </a:defRPr>
-            </a:pPr>
-            <a:r>
-              <a:t>THE WORK</a:t>
+            <a:r>
+              <a:rPr sz="1100" b="1">
+                <a:solidFill>
+                  <a:srgbClr val="8A7348"/>
+                </a:solidFill>
+                <a:latin typeface="Calibri"/>
+              </a:rPr>
+              <a:t>RECOMMENDATION</a:t>
             </a:r>
           </a:p>
         </p:txBody>
@@ -4486,8 +6358,8 @@
         </p:nvSpPr>
         <p:spPr>
           <a:xfrm>
-            <a:off x="640080" y="658368"/>
-            <a:ext cx="10972800" cy="1051560"/>
+            <a:off x="640080" y="621792"/>
+            <a:ext cx="10972800" cy="822960"/>
           </a:xfrm>
           <a:prstGeom prst="rect">
             <a:avLst/>
@@ -4500,41 +6372,71 @@
           </a:bodyPr>
           <a:lstStyle/>
           <a:p>
-            <a:pPr>
-              <a:defRPr sz="3200" b="1">
-                <a:solidFill>
-                  <a:srgbClr val="FFFFFF"/>
-                </a:solidFill>
-                <a:latin typeface="Calibri"/>
-              </a:defRPr>
-            </a:pPr>
-            <a:r>
-              <a:t>One path. Four steps. They cannot skip.</a:t>
-            </a:r>
-          </a:p>
-        </p:txBody>
-      </p:sp>
-      <p:sp>
-        <p:nvSpPr>
-          <p:cNvPr id="5" name="Rounded Rectangle 4"/>
+            <a:r>
+              <a:rPr sz="2400" b="1">
+                <a:solidFill>
+                  <a:srgbClr val="1B365D"/>
+                </a:solidFill>
+                <a:latin typeface="Calibri"/>
+              </a:rPr>
+              <a:t>Adopt OrgFlow for administrator-led promotions</a:t>
+            </a:r>
+          </a:p>
+        </p:txBody>
+      </p:sp>
+      <p:sp>
+        <p:nvSpPr>
+          <p:cNvPr id="5" name="TextBox 4"/>
+          <p:cNvSpPr txBox="1"/>
+          <p:nvPr/>
+        </p:nvSpPr>
+        <p:spPr>
+          <a:xfrm>
+            <a:off x="640080" y="1417320"/>
+            <a:ext cx="10972800" cy="685800"/>
+          </a:xfrm>
+          <a:prstGeom prst="rect">
+            <a:avLst/>
+          </a:prstGeom>
+          <a:noFill/>
+        </p:spPr>
+        <p:txBody>
+          <a:bodyPr wrap="square">
+            <a:spAutoFit/>
+          </a:bodyPr>
+          <a:lstStyle/>
+          <a:p>
+            <a:r>
+              <a:rPr sz="1600" b="0">
+                <a:solidFill>
+                  <a:srgbClr val="1A1D23"/>
+                </a:solidFill>
+                <a:latin typeface="Calibri"/>
+              </a:rPr>
+              <a:t>OrgFlow is a Chrome extension. Staff select the configuration they built, retrieve a snapshot from the source organization, and deploy that same snapshot to the target organization.</a:t>
+            </a:r>
+          </a:p>
+        </p:txBody>
+      </p:sp>
+      <p:sp>
+        <p:nvSpPr>
+          <p:cNvPr id="6" name="Rectangle 5"/>
           <p:cNvSpPr/>
           <p:nvPr/>
         </p:nvSpPr>
         <p:spPr>
           <a:xfrm>
-            <a:off x="502920" y="1920240"/>
-            <a:ext cx="2697480" cy="4023360"/>
-          </a:xfrm>
-          <a:prstGeom prst="roundRect">
+            <a:off x="640080" y="2286000"/>
+            <a:ext cx="5349240" cy="54864"/>
+          </a:xfrm>
+          <a:prstGeom prst="rect">
             <a:avLst/>
           </a:prstGeom>
           <a:solidFill>
-            <a:srgbClr val="1C212C"/>
+            <a:srgbClr val="1B365D"/>
           </a:solidFill>
           <a:ln>
-            <a:solidFill>
-              <a:srgbClr val="3A3F4A"/>
-            </a:solidFill>
+            <a:noFill/>
           </a:ln>
         </p:spPr>
         <p:style>
@@ -4552,60 +6454,32 @@
           </a:fontRef>
         </p:style>
         <p:txBody>
-          <a:bodyPr rtlCol="0" anchor="ctr" wrap="square" lIns="146304" rIns="146304" tIns="109728"/>
-          <a:lstStyle/>
-          <a:p>
-            <a:pPr algn="ctr">
-              <a:defRPr sz="1600" b="1">
-                <a:solidFill>
-                  <a:srgbClr val="FFFFFF"/>
-                </a:solidFill>
-                <a:latin typeface="Calibri"/>
-              </a:defRPr>
-            </a:pPr>
-            <a:r>
-              <a:t>1  Start</a:t>
-            </a:r>
-          </a:p>
-          <a:p>
-            <a:pPr>
-              <a:spcBef>
-                <a:spcPts val="800"/>
-              </a:spcBef>
-              <a:defRPr sz="1300">
-                <a:solidFill>
-                  <a:srgbClr val="8F96A3"/>
-                </a:solidFill>
-                <a:latin typeface="Calibri"/>
-              </a:defRPr>
-            </a:pPr>
-            <a:r>
-              <a:t>Log into both Salesforce orgs in Chrome. Detect them. Set From and To. They must be different.</a:t>
-            </a:r>
-          </a:p>
-        </p:txBody>
-      </p:sp>
-      <p:sp>
-        <p:nvSpPr>
-          <p:cNvPr id="6" name="Rounded Rectangle 5"/>
+          <a:bodyPr rtlCol="0" anchor="ctr"/>
+          <a:lstStyle/>
+          <a:p>
+            <a:pPr algn="ctr"/>
+          </a:p>
+        </p:txBody>
+      </p:sp>
+      <p:sp>
+        <p:nvSpPr>
+          <p:cNvPr id="7" name="Rectangle 6"/>
           <p:cNvSpPr/>
           <p:nvPr/>
         </p:nvSpPr>
         <p:spPr>
           <a:xfrm>
-            <a:off x="3337560" y="1920240"/>
-            <a:ext cx="2697480" cy="4023360"/>
-          </a:xfrm>
-          <a:prstGeom prst="roundRect">
+            <a:off x="640080" y="2340864"/>
+            <a:ext cx="5349240" cy="3602736"/>
+          </a:xfrm>
+          <a:prstGeom prst="rect">
             <a:avLst/>
           </a:prstGeom>
           <a:solidFill>
-            <a:srgbClr val="1C212C"/>
+            <a:srgbClr val="F4F6F9"/>
           </a:solidFill>
           <a:ln>
-            <a:solidFill>
-              <a:srgbClr val="3A3F4A"/>
-            </a:solidFill>
+            <a:noFill/>
           </a:ln>
         </p:spPr>
         <p:style>
@@ -4623,60 +6497,153 @@
           </a:fontRef>
         </p:style>
         <p:txBody>
-          <a:bodyPr rtlCol="0" anchor="ctr" wrap="square" lIns="146304" rIns="146304" tIns="109728"/>
-          <a:lstStyle/>
-          <a:p>
-            <a:pPr algn="ctr">
-              <a:defRPr sz="1600" b="1">
-                <a:solidFill>
-                  <a:srgbClr val="FFFFFF"/>
-                </a:solidFill>
-                <a:latin typeface="Calibri"/>
-              </a:defRPr>
+          <a:bodyPr rtlCol="0" anchor="ctr"/>
+          <a:lstStyle/>
+          <a:p>
+            <a:pPr algn="ctr"/>
+          </a:p>
+        </p:txBody>
+      </p:sp>
+      <p:sp>
+        <p:nvSpPr>
+          <p:cNvPr id="8" name="TextBox 7"/>
+          <p:cNvSpPr txBox="1"/>
+          <p:nvPr/>
+        </p:nvSpPr>
+        <p:spPr>
+          <a:xfrm>
+            <a:off x="786384" y="2432304"/>
+            <a:ext cx="5056632" cy="329184"/>
+          </a:xfrm>
+          <a:prstGeom prst="rect">
+            <a:avLst/>
+          </a:prstGeom>
+          <a:noFill/>
+        </p:spPr>
+        <p:txBody>
+          <a:bodyPr wrap="square">
+            <a:spAutoFit/>
+          </a:bodyPr>
+          <a:lstStyle/>
+          <a:p>
+            <a:r>
+              <a:rPr sz="1400" b="1">
+                <a:solidFill>
+                  <a:srgbClr val="1B365D"/>
+                </a:solidFill>
+                <a:latin typeface="Calibri"/>
+              </a:rPr>
+              <a:t>What this provides</a:t>
+            </a:r>
+          </a:p>
+        </p:txBody>
+      </p:sp>
+      <p:sp>
+        <p:nvSpPr>
+          <p:cNvPr id="9" name="TextBox 8"/>
+          <p:cNvSpPr txBox="1"/>
+          <p:nvPr/>
+        </p:nvSpPr>
+        <p:spPr>
+          <a:xfrm>
+            <a:off x="786384" y="2761488"/>
+            <a:ext cx="5056632" cy="3035808"/>
+          </a:xfrm>
+          <a:prstGeom prst="rect">
+            <a:avLst/>
+          </a:prstGeom>
+          <a:noFill/>
+        </p:spPr>
+        <p:txBody>
+          <a:bodyPr wrap="square">
+            <a:spAutoFit/>
+          </a:bodyPr>
+          <a:lstStyle/>
+          <a:p>
+            <a:pPr>
+              <a:spcAft>
+                <a:spcPts val="600"/>
+              </a:spcAft>
             </a:pPr>
             <a:r>
-              <a:t>2  Package</a:t>
+              <a:rPr sz="1300" b="0">
+                <a:solidFill>
+                  <a:srgbClr val="3D4450"/>
+                </a:solidFill>
+                <a:latin typeface="Calibri"/>
+              </a:rPr>
+              <a:t>A guided source-to-target path in the existing browser.</a:t>
             </a:r>
           </a:p>
           <a:p>
             <a:pPr>
-              <a:spcBef>
-                <a:spcPts val="800"/>
-              </a:spcBef>
-              <a:defRPr sz="1300">
-                <a:solidFill>
-                  <a:srgbClr val="8F96A3"/>
-                </a:solidFill>
-                <a:latin typeface="Calibri"/>
-              </a:defRPr>
+              <a:spcAft>
+                <a:spcPts val="600"/>
+              </a:spcAft>
             </a:pPr>
             <a:r>
-              <a:t>OrgFlow shows what just changed in From. They tick the items to move — not a blank XML file.</a:t>
-            </a:r>
-          </a:p>
-        </p:txBody>
-      </p:sp>
-      <p:sp>
-        <p:nvSpPr>
-          <p:cNvPr id="7" name="Rounded Rectangle 6"/>
+              <a:rPr sz="1300" b="0">
+                <a:solidFill>
+                  <a:srgbClr val="3D4450"/>
+                </a:solidFill>
+                <a:latin typeface="Calibri"/>
+              </a:rPr>
+              <a:t>No Salesforce CLI, DX project, or Connected App.</a:t>
+            </a:r>
+          </a:p>
+          <a:p>
+            <a:pPr>
+              <a:spcAft>
+                <a:spcPts val="600"/>
+              </a:spcAft>
+            </a:pPr>
+            <a:r>
+              <a:rPr sz="1300" b="0">
+                <a:solidFill>
+                  <a:srgbClr val="3D4450"/>
+                </a:solidFill>
+                <a:latin typeface="Calibri"/>
+              </a:rPr>
+              <a:t>Optional team repository later; not required to start.</a:t>
+            </a:r>
+          </a:p>
+          <a:p>
+            <a:pPr>
+              <a:spcAft>
+                <a:spcPts val="600"/>
+              </a:spcAft>
+            </a:pPr>
+            <a:r>
+              <a:rPr sz="1300" b="0">
+                <a:solidFill>
+                  <a:srgbClr val="3D4450"/>
+                </a:solidFill>
+                <a:latin typeface="Calibri"/>
+              </a:rPr>
+              <a:t>No incremental platform license to evaluate first.</a:t>
+            </a:r>
+          </a:p>
+        </p:txBody>
+      </p:sp>
+      <p:sp>
+        <p:nvSpPr>
+          <p:cNvPr id="10" name="Rectangle 9"/>
           <p:cNvSpPr/>
           <p:nvPr/>
         </p:nvSpPr>
         <p:spPr>
           <a:xfrm>
-            <a:off x="6172200" y="1920240"/>
-            <a:ext cx="2697480" cy="4023360"/>
-          </a:xfrm>
-          <a:prstGeom prst="roundRect">
+            <a:off x="6217920" y="2286000"/>
+            <a:ext cx="5349240" cy="54864"/>
+          </a:xfrm>
+          <a:prstGeom prst="rect">
             <a:avLst/>
           </a:prstGeom>
           <a:solidFill>
-            <a:srgbClr val="1C212C"/>
+            <a:srgbClr val="1B365D"/>
           </a:solidFill>
           <a:ln>
-            <a:solidFill>
-              <a:srgbClr val="3A3F4A"/>
-            </a:solidFill>
+            <a:noFill/>
           </a:ln>
         </p:spPr>
         <p:style>
@@ -4694,60 +6661,32 @@
           </a:fontRef>
         </p:style>
         <p:txBody>
-          <a:bodyPr rtlCol="0" anchor="ctr" wrap="square" lIns="146304" rIns="146304" tIns="109728"/>
-          <a:lstStyle/>
-          <a:p>
-            <a:pPr algn="ctr">
-              <a:defRPr sz="1600" b="1">
-                <a:solidFill>
-                  <a:srgbClr val="FFFFFF"/>
-                </a:solidFill>
-                <a:latin typeface="Calibri"/>
-              </a:defRPr>
-            </a:pPr>
-            <a:r>
-              <a:t>3  Retrieve</a:t>
-            </a:r>
-          </a:p>
-          <a:p>
-            <a:pPr>
-              <a:spcBef>
-                <a:spcPts val="800"/>
-              </a:spcBef>
-              <a:defRPr sz="1300">
-                <a:solidFill>
-                  <a:srgbClr val="8F96A3"/>
-                </a:solidFill>
-                <a:latin typeface="Calibri"/>
-              </a:defRPr>
-            </a:pPr>
-            <a:r>
-              <a:t>Pull those items from From. Optional Jira. Same files can travel to the next org later.</a:t>
-            </a:r>
-          </a:p>
-        </p:txBody>
-      </p:sp>
-      <p:sp>
-        <p:nvSpPr>
-          <p:cNvPr id="8" name="Rounded Rectangle 7"/>
+          <a:bodyPr rtlCol="0" anchor="ctr"/>
+          <a:lstStyle/>
+          <a:p>
+            <a:pPr algn="ctr"/>
+          </a:p>
+        </p:txBody>
+      </p:sp>
+      <p:sp>
+        <p:nvSpPr>
+          <p:cNvPr id="11" name="Rectangle 10"/>
           <p:cNvSpPr/>
           <p:nvPr/>
         </p:nvSpPr>
         <p:spPr>
           <a:xfrm>
-            <a:off x="9006840" y="1920240"/>
-            <a:ext cx="2697480" cy="4023360"/>
-          </a:xfrm>
-          <a:prstGeom prst="roundRect">
+            <a:off x="6217920" y="2340864"/>
+            <a:ext cx="5349240" cy="3602736"/>
+          </a:xfrm>
+          <a:prstGeom prst="rect">
             <a:avLst/>
           </a:prstGeom>
           <a:solidFill>
-            <a:srgbClr val="1C212C"/>
+            <a:srgbClr val="F4F6F9"/>
           </a:solidFill>
           <a:ln>
-            <a:solidFill>
-              <a:srgbClr val="3A3F4A"/>
-            </a:solidFill>
+            <a:noFill/>
           </a:ln>
         </p:spPr>
         <p:style>
@@ -4765,35 +6704,285 @@
           </a:fontRef>
         </p:style>
         <p:txBody>
-          <a:bodyPr rtlCol="0" anchor="ctr" wrap="square" lIns="146304" rIns="146304" tIns="109728"/>
-          <a:lstStyle/>
-          <a:p>
-            <a:pPr algn="ctr">
-              <a:defRPr sz="1600" b="1">
-                <a:solidFill>
-                  <a:srgbClr val="FFFFFF"/>
-                </a:solidFill>
-                <a:latin typeface="Calibri"/>
-              </a:defRPr>
+          <a:bodyPr rtlCol="0" anchor="ctr"/>
+          <a:lstStyle/>
+          <a:p>
+            <a:pPr algn="ctr"/>
+          </a:p>
+        </p:txBody>
+      </p:sp>
+      <p:sp>
+        <p:nvSpPr>
+          <p:cNvPr id="12" name="TextBox 11"/>
+          <p:cNvSpPr txBox="1"/>
+          <p:nvPr/>
+        </p:nvSpPr>
+        <p:spPr>
+          <a:xfrm>
+            <a:off x="6364224" y="2432304"/>
+            <a:ext cx="5056632" cy="329184"/>
+          </a:xfrm>
+          <a:prstGeom prst="rect">
+            <a:avLst/>
+          </a:prstGeom>
+          <a:noFill/>
+        </p:spPr>
+        <p:txBody>
+          <a:bodyPr wrap="square">
+            <a:spAutoFit/>
+          </a:bodyPr>
+          <a:lstStyle/>
+          <a:p>
+            <a:r>
+              <a:rPr sz="1400" b="1">
+                <a:solidFill>
+                  <a:srgbClr val="1B365D"/>
+                </a:solidFill>
+                <a:latin typeface="Calibri"/>
+              </a:rPr>
+              <a:t>What this is not</a:t>
+            </a:r>
+          </a:p>
+        </p:txBody>
+      </p:sp>
+      <p:sp>
+        <p:nvSpPr>
+          <p:cNvPr id="13" name="TextBox 12"/>
+          <p:cNvSpPr txBox="1"/>
+          <p:nvPr/>
+        </p:nvSpPr>
+        <p:spPr>
+          <a:xfrm>
+            <a:off x="6364224" y="2761488"/>
+            <a:ext cx="5056632" cy="3035808"/>
+          </a:xfrm>
+          <a:prstGeom prst="rect">
+            <a:avLst/>
+          </a:prstGeom>
+          <a:noFill/>
+        </p:spPr>
+        <p:txBody>
+          <a:bodyPr wrap="square">
+            <a:spAutoFit/>
+          </a:bodyPr>
+          <a:lstStyle/>
+          <a:p>
+            <a:pPr>
+              <a:spcAft>
+                <a:spcPts val="600"/>
+              </a:spcAft>
             </a:pPr>
             <a:r>
-              <a:t>4  Confirm</a:t>
+              <a:rPr sz="1300" b="0">
+                <a:solidFill>
+                  <a:srgbClr val="3D4450"/>
+                </a:solidFill>
+                <a:latin typeface="Calibri"/>
+              </a:rPr>
+              <a:t>Not a replacement for VS Code or engineering CI.</a:t>
             </a:r>
           </a:p>
           <a:p>
             <a:pPr>
-              <a:spcBef>
-                <a:spcPts val="800"/>
-              </a:spcBef>
-              <a:defRPr sz="1300">
-                <a:solidFill>
-                  <a:srgbClr val="8F96A3"/>
-                </a:solidFill>
-                <a:latin typeface="Calibri"/>
-              </a:defRPr>
+              <a:spcAft>
+                <a:spcPts val="600"/>
+              </a:spcAft>
             </a:pPr>
             <a:r>
-              <a:t>See the path and what will land in To. Validate first if you want. Then Deploy.</a:t>
+              <a:rPr sz="1300" b="0">
+                <a:solidFill>
+                  <a:srgbClr val="3D4450"/>
+                </a:solidFill>
+                <a:latin typeface="Calibri"/>
+              </a:rPr>
+              <a:t>Not a substitute for Copado, Gearset, or Flosum.</a:t>
+            </a:r>
+          </a:p>
+          <a:p>
+            <a:pPr>
+              <a:spcAft>
+                <a:spcPts val="600"/>
+              </a:spcAft>
+            </a:pPr>
+            <a:r>
+              <a:rPr sz="1300" b="0">
+                <a:solidFill>
+                  <a:srgbClr val="3D4450"/>
+                </a:solidFill>
+                <a:latin typeface="Calibri"/>
+              </a:rPr>
+              <a:t>Not a data-migration or full-org compare product.</a:t>
+            </a:r>
+          </a:p>
+          <a:p>
+            <a:pPr>
+              <a:spcAft>
+                <a:spcPts val="600"/>
+              </a:spcAft>
+            </a:pPr>
+            <a:r>
+              <a:rPr sz="1300" b="0">
+                <a:solidFill>
+                  <a:srgbClr val="3D4450"/>
+                </a:solidFill>
+                <a:latin typeface="Calibri"/>
+              </a:rPr>
+              <a:t>Not an automated dependency analyzer.</a:t>
+            </a:r>
+          </a:p>
+        </p:txBody>
+      </p:sp>
+      <p:sp>
+        <p:nvSpPr>
+          <p:cNvPr id="14" name="Rectangle 13"/>
+          <p:cNvSpPr/>
+          <p:nvPr/>
+        </p:nvSpPr>
+        <p:spPr>
+          <a:xfrm>
+            <a:off x="0" y="6537960"/>
+            <a:ext cx="12191695" cy="320040"/>
+          </a:xfrm>
+          <a:prstGeom prst="rect">
+            <a:avLst/>
+          </a:prstGeom>
+          <a:solidFill>
+            <a:srgbClr val="FFFFFF"/>
+          </a:solidFill>
+          <a:ln>
+            <a:noFill/>
+          </a:ln>
+        </p:spPr>
+        <p:style>
+          <a:lnRef idx="1">
+            <a:schemeClr val="accent1"/>
+          </a:lnRef>
+          <a:fillRef idx="3">
+            <a:schemeClr val="accent1"/>
+          </a:fillRef>
+          <a:effectRef idx="2">
+            <a:schemeClr val="accent1"/>
+          </a:effectRef>
+          <a:fontRef idx="minor">
+            <a:schemeClr val="lt1"/>
+          </a:fontRef>
+        </p:style>
+        <p:txBody>
+          <a:bodyPr rtlCol="0" anchor="ctr"/>
+          <a:lstStyle/>
+          <a:p>
+            <a:pPr algn="ctr"/>
+          </a:p>
+        </p:txBody>
+      </p:sp>
+      <p:sp>
+        <p:nvSpPr>
+          <p:cNvPr id="15" name="Rectangle 14"/>
+          <p:cNvSpPr/>
+          <p:nvPr/>
+        </p:nvSpPr>
+        <p:spPr>
+          <a:xfrm>
+            <a:off x="0" y="6537960"/>
+            <a:ext cx="12191695" cy="12700"/>
+          </a:xfrm>
+          <a:prstGeom prst="rect">
+            <a:avLst/>
+          </a:prstGeom>
+          <a:solidFill>
+            <a:srgbClr val="D8DEE6"/>
+          </a:solidFill>
+          <a:ln>
+            <a:noFill/>
+          </a:ln>
+        </p:spPr>
+        <p:style>
+          <a:lnRef idx="1">
+            <a:schemeClr val="accent1"/>
+          </a:lnRef>
+          <a:fillRef idx="3">
+            <a:schemeClr val="accent1"/>
+          </a:fillRef>
+          <a:effectRef idx="2">
+            <a:schemeClr val="accent1"/>
+          </a:effectRef>
+          <a:fontRef idx="minor">
+            <a:schemeClr val="lt1"/>
+          </a:fontRef>
+        </p:style>
+        <p:txBody>
+          <a:bodyPr rtlCol="0" anchor="ctr"/>
+          <a:lstStyle/>
+          <a:p>
+            <a:pPr algn="ctr"/>
+          </a:p>
+        </p:txBody>
+      </p:sp>
+      <p:sp>
+        <p:nvSpPr>
+          <p:cNvPr id="16" name="TextBox 15"/>
+          <p:cNvSpPr txBox="1"/>
+          <p:nvPr/>
+        </p:nvSpPr>
+        <p:spPr>
+          <a:xfrm>
+            <a:off x="640080" y="6565392"/>
+            <a:ext cx="6400800" cy="256032"/>
+          </a:xfrm>
+          <a:prstGeom prst="rect">
+            <a:avLst/>
+          </a:prstGeom>
+          <a:noFill/>
+        </p:spPr>
+        <p:txBody>
+          <a:bodyPr wrap="square">
+            <a:spAutoFit/>
+          </a:bodyPr>
+          <a:lstStyle/>
+          <a:p>
+            <a:r>
+              <a:rPr sz="1100" b="0">
+                <a:solidFill>
+                  <a:srgbClr val="6B7280"/>
+                </a:solidFill>
+                <a:latin typeface="Calibri"/>
+              </a:rPr>
+              <a:t>OrgFlow  ·  Internal use</a:t>
+            </a:r>
+          </a:p>
+        </p:txBody>
+      </p:sp>
+      <p:sp>
+        <p:nvSpPr>
+          <p:cNvPr id="17" name="TextBox 16"/>
+          <p:cNvSpPr txBox="1"/>
+          <p:nvPr/>
+        </p:nvSpPr>
+        <p:spPr>
+          <a:xfrm>
+            <a:off x="9326880" y="6565392"/>
+            <a:ext cx="2194560" cy="256032"/>
+          </a:xfrm>
+          <a:prstGeom prst="rect">
+            <a:avLst/>
+          </a:prstGeom>
+          <a:noFill/>
+        </p:spPr>
+        <p:txBody>
+          <a:bodyPr wrap="none">
+            <a:spAutoFit/>
+          </a:bodyPr>
+          <a:lstStyle/>
+          <a:p>
+            <a:pPr algn="r"/>
+            <a:r>
+              <a:rPr sz="1100" b="0">
+                <a:solidFill>
+                  <a:srgbClr val="6B7280"/>
+                </a:solidFill>
+                <a:latin typeface="Calibri"/>
+              </a:rPr>
+              <a:t>4  /  11</a:t>
             </a:r>
           </a:p>
         </p:txBody>
@@ -4831,7 +7020,7 @@
             <a:avLst/>
           </a:prstGeom>
           <a:solidFill>
-            <a:srgbClr val="12151C"/>
+            <a:srgbClr val="FFFFFF"/>
           </a:solidFill>
           <a:ln>
             <a:noFill/>
@@ -4868,7 +7057,7 @@
         <p:spPr>
           <a:xfrm>
             <a:off x="640080" y="347472"/>
-            <a:ext cx="10972800" cy="320040"/>
+            <a:ext cx="10972800" cy="256032"/>
           </a:xfrm>
           <a:prstGeom prst="rect">
             <a:avLst/>
@@ -4881,16 +7070,14 @@
           </a:bodyPr>
           <a:lstStyle/>
           <a:p>
-            <a:pPr>
-              <a:defRPr sz="1200" b="1">
-                <a:solidFill>
-                  <a:srgbClr val="C5BBA8"/>
-                </a:solidFill>
-                <a:latin typeface="Calibri"/>
-              </a:defRPr>
-            </a:pPr>
-            <a:r>
-              <a:t>ADOPTION</a:t>
+            <a:r>
+              <a:rPr sz="1100" b="1">
+                <a:solidFill>
+                  <a:srgbClr val="8A7348"/>
+                </a:solidFill>
+                <a:latin typeface="Calibri"/>
+              </a:rPr>
+              <a:t>FIT</a:t>
             </a:r>
           </a:p>
         </p:txBody>
@@ -4903,8 +7090,8 @@
         </p:nvSpPr>
         <p:spPr>
           <a:xfrm>
-            <a:off x="640080" y="658368"/>
-            <a:ext cx="10972800" cy="1051560"/>
+            <a:off x="640080" y="621792"/>
+            <a:ext cx="10972800" cy="822960"/>
           </a:xfrm>
           <a:prstGeom prst="rect">
             <a:avLst/>
@@ -4917,41 +7104,37 @@
           </a:bodyPr>
           <a:lstStyle/>
           <a:p>
-            <a:pPr>
-              <a:defRPr sz="3200" b="1">
-                <a:solidFill>
-                  <a:srgbClr val="FFFFFF"/>
-                </a:solidFill>
-                <a:latin typeface="Calibri"/>
-              </a:defRPr>
-            </a:pPr>
-            <a:r>
-              <a:t>Training is measured in minutes, not weeks</a:t>
-            </a:r>
-          </a:p>
-        </p:txBody>
-      </p:sp>
-      <p:sp>
-        <p:nvSpPr>
-          <p:cNvPr id="5" name="Rounded Rectangle 4"/>
+            <a:r>
+              <a:rPr sz="2600" b="1">
+                <a:solidFill>
+                  <a:srgbClr val="1B365D"/>
+                </a:solidFill>
+                <a:latin typeface="Calibri"/>
+              </a:rPr>
+              <a:t>Intended users</a:t>
+            </a:r>
+          </a:p>
+        </p:txBody>
+      </p:sp>
+      <p:sp>
+        <p:nvSpPr>
+          <p:cNvPr id="5" name="Rectangle 4"/>
           <p:cNvSpPr/>
           <p:nvPr/>
         </p:nvSpPr>
         <p:spPr>
           <a:xfrm>
-            <a:off x="640080" y="1920240"/>
-            <a:ext cx="5303520" cy="4023360"/>
-          </a:xfrm>
-          <a:prstGeom prst="roundRect">
+            <a:off x="640080" y="1691640"/>
+            <a:ext cx="5349240" cy="54864"/>
+          </a:xfrm>
+          <a:prstGeom prst="rect">
             <a:avLst/>
           </a:prstGeom>
           <a:solidFill>
-            <a:srgbClr val="1C212C"/>
+            <a:srgbClr val="1B365D"/>
           </a:solidFill>
           <a:ln>
-            <a:solidFill>
-              <a:srgbClr val="3A3F4A"/>
-            </a:solidFill>
+            <a:noFill/>
           </a:ln>
         </p:spPr>
         <p:style>
@@ -4969,60 +7152,32 @@
           </a:fontRef>
         </p:style>
         <p:txBody>
-          <a:bodyPr rtlCol="0" anchor="ctr" wrap="square" lIns="146304" rIns="146304" tIns="109728"/>
-          <a:lstStyle/>
-          <a:p>
-            <a:pPr algn="ctr">
-              <a:defRPr sz="1600" b="1">
-                <a:solidFill>
-                  <a:srgbClr val="FFFFFF"/>
-                </a:solidFill>
-                <a:latin typeface="Calibri"/>
-              </a:defRPr>
-            </a:pPr>
-            <a:r>
-              <a:t>What people already have</a:t>
-            </a:r>
-          </a:p>
-          <a:p>
-            <a:pPr>
-              <a:spcBef>
-                <a:spcPts val="800"/>
-              </a:spcBef>
-              <a:defRPr sz="1300">
-                <a:solidFill>
-                  <a:srgbClr val="8F96A3"/>
-                </a:solidFill>
-                <a:latin typeface="Calibri"/>
-              </a:defRPr>
-            </a:pPr>
-            <a:r>
-              <a:t>Chrome. Two Salesforce logins. That is the setup. OrgFlow uses the existing browser session. No Connected App, no CLI install, no project folder.</a:t>
-            </a:r>
-          </a:p>
-        </p:txBody>
-      </p:sp>
-      <p:sp>
-        <p:nvSpPr>
-          <p:cNvPr id="6" name="Rounded Rectangle 5"/>
+          <a:bodyPr rtlCol="0" anchor="ctr"/>
+          <a:lstStyle/>
+          <a:p>
+            <a:pPr algn="ctr"/>
+          </a:p>
+        </p:txBody>
+      </p:sp>
+      <p:sp>
+        <p:nvSpPr>
+          <p:cNvPr id="6" name="Rectangle 5"/>
           <p:cNvSpPr/>
           <p:nvPr/>
         </p:nvSpPr>
         <p:spPr>
           <a:xfrm>
-            <a:off x="6217920" y="1920240"/>
-            <a:ext cx="5303520" cy="4023360"/>
-          </a:xfrm>
-          <a:prstGeom prst="roundRect">
+            <a:off x="640080" y="1746504"/>
+            <a:ext cx="5349240" cy="4197096"/>
+          </a:xfrm>
+          <a:prstGeom prst="rect">
             <a:avLst/>
           </a:prstGeom>
           <a:solidFill>
-            <a:srgbClr val="1C212C"/>
+            <a:srgbClr val="F4F6F9"/>
           </a:solidFill>
           <a:ln>
-            <a:solidFill>
-              <a:srgbClr val="3A3F4A"/>
-            </a:solidFill>
+            <a:noFill/>
           </a:ln>
         </p:spPr>
         <p:style>
@@ -5040,35 +7195,492 @@
           </a:fontRef>
         </p:style>
         <p:txBody>
-          <a:bodyPr rtlCol="0" anchor="ctr" wrap="square" lIns="146304" rIns="146304" tIns="109728"/>
-          <a:lstStyle/>
-          <a:p>
-            <a:pPr algn="ctr">
-              <a:defRPr sz="1600" b="1">
-                <a:solidFill>
-                  <a:srgbClr val="FFFFFF"/>
-                </a:solidFill>
-                <a:latin typeface="Calibri"/>
-              </a:defRPr>
+          <a:bodyPr rtlCol="0" anchor="ctr"/>
+          <a:lstStyle/>
+          <a:p>
+            <a:pPr algn="ctr"/>
+          </a:p>
+        </p:txBody>
+      </p:sp>
+      <p:sp>
+        <p:nvSpPr>
+          <p:cNvPr id="7" name="TextBox 6"/>
+          <p:cNvSpPr txBox="1"/>
+          <p:nvPr/>
+        </p:nvSpPr>
+        <p:spPr>
+          <a:xfrm>
+            <a:off x="786384" y="1837944"/>
+            <a:ext cx="5056632" cy="329184"/>
+          </a:xfrm>
+          <a:prstGeom prst="rect">
+            <a:avLst/>
+          </a:prstGeom>
+          <a:noFill/>
+        </p:spPr>
+        <p:txBody>
+          <a:bodyPr wrap="square">
+            <a:spAutoFit/>
+          </a:bodyPr>
+          <a:lstStyle/>
+          <a:p>
+            <a:r>
+              <a:rPr sz="1400" b="1">
+                <a:solidFill>
+                  <a:srgbClr val="1B365D"/>
+                </a:solidFill>
+                <a:latin typeface="Calibri"/>
+              </a:rPr>
+              <a:t>Appropriate</a:t>
+            </a:r>
+          </a:p>
+        </p:txBody>
+      </p:sp>
+      <p:sp>
+        <p:nvSpPr>
+          <p:cNvPr id="8" name="TextBox 7"/>
+          <p:cNvSpPr txBox="1"/>
+          <p:nvPr/>
+        </p:nvSpPr>
+        <p:spPr>
+          <a:xfrm>
+            <a:off x="786384" y="2167128"/>
+            <a:ext cx="5056632" cy="3630168"/>
+          </a:xfrm>
+          <a:prstGeom prst="rect">
+            <a:avLst/>
+          </a:prstGeom>
+          <a:noFill/>
+        </p:spPr>
+        <p:txBody>
+          <a:bodyPr wrap="square">
+            <a:spAutoFit/>
+          </a:bodyPr>
+          <a:lstStyle/>
+          <a:p>
+            <a:pPr>
+              <a:spcAft>
+                <a:spcPts val="600"/>
+              </a:spcAft>
             </a:pPr>
             <a:r>
-              <a:t>What the product refuses to do</a:t>
+              <a:rPr sz="1300" b="0">
+                <a:solidFill>
+                  <a:srgbClr val="3D4450"/>
+                </a:solidFill>
+                <a:latin typeface="Calibri"/>
+              </a:rPr>
+              <a:t>Salesforce administrators and configurators working primarily in Setup.</a:t>
             </a:r>
           </a:p>
           <a:p>
             <a:pPr>
-              <a:spcBef>
-                <a:spcPts val="800"/>
-              </a:spcBef>
-              <a:defRPr sz="1300">
-                <a:solidFill>
-                  <a:srgbClr val="8F96A3"/>
-                </a:solidFill>
-                <a:latin typeface="Calibri"/>
-              </a:defRPr>
+              <a:spcAft>
+                <a:spcPts val="600"/>
+              </a:spcAft>
             </a:pPr>
             <a:r>
-              <a:t>Next stays off until From and To are different orgs. Deploy stays off until retrieve succeeded. Changing From clears the old selection so yesterday’s package does not silently go to the wrong place.</a:t>
+              <a:rPr sz="1300" b="0">
+                <a:solidFill>
+                  <a:srgbClr val="3D4450"/>
+                </a:solidFill>
+                <a:latin typeface="Calibri"/>
+              </a:rPr>
+              <a:t>Promotions of a defined set of named metadata (fields, layouts, flows, permission sets).</a:t>
+            </a:r>
+          </a:p>
+          <a:p>
+            <a:pPr>
+              <a:spcAft>
+                <a:spcPts val="600"/>
+              </a:spcAft>
+            </a:pPr>
+            <a:r>
+              <a:rPr sz="1300" b="0">
+                <a:solidFill>
+                  <a:srgbClr val="3D4450"/>
+                </a:solidFill>
+                <a:latin typeface="Calibri"/>
+              </a:rPr>
+              <a:t>Teams that want a shared history later, not as a prerequisite.</a:t>
+            </a:r>
+          </a:p>
+          <a:p>
+            <a:pPr>
+              <a:spcAft>
+                <a:spcPts val="600"/>
+              </a:spcAft>
+            </a:pPr>
+            <a:r>
+              <a:rPr sz="1300" b="0">
+                <a:solidFill>
+                  <a:srgbClr val="3D4450"/>
+                </a:solidFill>
+                <a:latin typeface="Calibri"/>
+              </a:rPr>
+              <a:t>A time-boxed pilot before any platform discussion.</a:t>
+            </a:r>
+          </a:p>
+        </p:txBody>
+      </p:sp>
+      <p:sp>
+        <p:nvSpPr>
+          <p:cNvPr id="9" name="Rectangle 8"/>
+          <p:cNvSpPr/>
+          <p:nvPr/>
+        </p:nvSpPr>
+        <p:spPr>
+          <a:xfrm>
+            <a:off x="6217920" y="1691640"/>
+            <a:ext cx="5349240" cy="54864"/>
+          </a:xfrm>
+          <a:prstGeom prst="rect">
+            <a:avLst/>
+          </a:prstGeom>
+          <a:solidFill>
+            <a:srgbClr val="1B365D"/>
+          </a:solidFill>
+          <a:ln>
+            <a:noFill/>
+          </a:ln>
+        </p:spPr>
+        <p:style>
+          <a:lnRef idx="1">
+            <a:schemeClr val="accent1"/>
+          </a:lnRef>
+          <a:fillRef idx="3">
+            <a:schemeClr val="accent1"/>
+          </a:fillRef>
+          <a:effectRef idx="2">
+            <a:schemeClr val="accent1"/>
+          </a:effectRef>
+          <a:fontRef idx="minor">
+            <a:schemeClr val="lt1"/>
+          </a:fontRef>
+        </p:style>
+        <p:txBody>
+          <a:bodyPr rtlCol="0" anchor="ctr"/>
+          <a:lstStyle/>
+          <a:p>
+            <a:pPr algn="ctr"/>
+          </a:p>
+        </p:txBody>
+      </p:sp>
+      <p:sp>
+        <p:nvSpPr>
+          <p:cNvPr id="10" name="Rectangle 9"/>
+          <p:cNvSpPr/>
+          <p:nvPr/>
+        </p:nvSpPr>
+        <p:spPr>
+          <a:xfrm>
+            <a:off x="6217920" y="1746504"/>
+            <a:ext cx="5349240" cy="4197096"/>
+          </a:xfrm>
+          <a:prstGeom prst="rect">
+            <a:avLst/>
+          </a:prstGeom>
+          <a:solidFill>
+            <a:srgbClr val="F4F6F9"/>
+          </a:solidFill>
+          <a:ln>
+            <a:noFill/>
+          </a:ln>
+        </p:spPr>
+        <p:style>
+          <a:lnRef idx="1">
+            <a:schemeClr val="accent1"/>
+          </a:lnRef>
+          <a:fillRef idx="3">
+            <a:schemeClr val="accent1"/>
+          </a:fillRef>
+          <a:effectRef idx="2">
+            <a:schemeClr val="accent1"/>
+          </a:effectRef>
+          <a:fontRef idx="minor">
+            <a:schemeClr val="lt1"/>
+          </a:fontRef>
+        </p:style>
+        <p:txBody>
+          <a:bodyPr rtlCol="0" anchor="ctr"/>
+          <a:lstStyle/>
+          <a:p>
+            <a:pPr algn="ctr"/>
+          </a:p>
+        </p:txBody>
+      </p:sp>
+      <p:sp>
+        <p:nvSpPr>
+          <p:cNvPr id="11" name="TextBox 10"/>
+          <p:cNvSpPr txBox="1"/>
+          <p:nvPr/>
+        </p:nvSpPr>
+        <p:spPr>
+          <a:xfrm>
+            <a:off x="6364224" y="1837944"/>
+            <a:ext cx="5056632" cy="329184"/>
+          </a:xfrm>
+          <a:prstGeom prst="rect">
+            <a:avLst/>
+          </a:prstGeom>
+          <a:noFill/>
+        </p:spPr>
+        <p:txBody>
+          <a:bodyPr wrap="square">
+            <a:spAutoFit/>
+          </a:bodyPr>
+          <a:lstStyle/>
+          <a:p>
+            <a:r>
+              <a:rPr sz="1400" b="1">
+                <a:solidFill>
+                  <a:srgbClr val="1B365D"/>
+                </a:solidFill>
+                <a:latin typeface="Calibri"/>
+              </a:rPr>
+              <a:t>Not appropriate</a:t>
+            </a:r>
+          </a:p>
+        </p:txBody>
+      </p:sp>
+      <p:sp>
+        <p:nvSpPr>
+          <p:cNvPr id="12" name="TextBox 11"/>
+          <p:cNvSpPr txBox="1"/>
+          <p:nvPr/>
+        </p:nvSpPr>
+        <p:spPr>
+          <a:xfrm>
+            <a:off x="6364224" y="2167128"/>
+            <a:ext cx="5056632" cy="3630168"/>
+          </a:xfrm>
+          <a:prstGeom prst="rect">
+            <a:avLst/>
+          </a:prstGeom>
+          <a:noFill/>
+        </p:spPr>
+        <p:txBody>
+          <a:bodyPr wrap="square">
+            <a:spAutoFit/>
+          </a:bodyPr>
+          <a:lstStyle/>
+          <a:p>
+            <a:pPr>
+              <a:spcAft>
+                <a:spcPts val="600"/>
+              </a:spcAft>
+            </a:pPr>
+            <a:r>
+              <a:rPr sz="1300" b="0">
+                <a:solidFill>
+                  <a:srgbClr val="3D4450"/>
+                </a:solidFill>
+                <a:latin typeface="Calibri"/>
+              </a:rPr>
+              <a:t>Apex, Lightning Web Components, and continuous integration.</a:t>
+            </a:r>
+          </a:p>
+          <a:p>
+            <a:pPr>
+              <a:spcAft>
+                <a:spcPts val="600"/>
+              </a:spcAft>
+            </a:pPr>
+            <a:r>
+              <a:rPr sz="1300" b="0">
+                <a:solidFill>
+                  <a:srgbClr val="3D4450"/>
+                </a:solidFill>
+                <a:latin typeface="Calibri"/>
+              </a:rPr>
+              <a:t>Multi-stream release trains and formal environment governance programs.</a:t>
+            </a:r>
+          </a:p>
+          <a:p>
+            <a:pPr>
+              <a:spcAft>
+                <a:spcPts val="600"/>
+              </a:spcAft>
+            </a:pPr>
+            <a:r>
+              <a:rPr sz="1300" b="0">
+                <a:solidFill>
+                  <a:srgbClr val="3D4450"/>
+                </a:solidFill>
+                <a:latin typeface="Calibri"/>
+              </a:rPr>
+              <a:t>Record or data movement between organizations.</a:t>
+            </a:r>
+          </a:p>
+          <a:p>
+            <a:pPr>
+              <a:spcAft>
+                <a:spcPts val="600"/>
+              </a:spcAft>
+            </a:pPr>
+            <a:r>
+              <a:rPr sz="1300" b="0">
+                <a:solidFill>
+                  <a:srgbClr val="3D4450"/>
+                </a:solidFill>
+                <a:latin typeface="Calibri"/>
+              </a:rPr>
+              <a:t>Discovery of unknown dependencies across an entire org.</a:t>
+            </a:r>
+          </a:p>
+        </p:txBody>
+      </p:sp>
+      <p:sp>
+        <p:nvSpPr>
+          <p:cNvPr id="13" name="Rectangle 12"/>
+          <p:cNvSpPr/>
+          <p:nvPr/>
+        </p:nvSpPr>
+        <p:spPr>
+          <a:xfrm>
+            <a:off x="0" y="6537960"/>
+            <a:ext cx="12191695" cy="320040"/>
+          </a:xfrm>
+          <a:prstGeom prst="rect">
+            <a:avLst/>
+          </a:prstGeom>
+          <a:solidFill>
+            <a:srgbClr val="FFFFFF"/>
+          </a:solidFill>
+          <a:ln>
+            <a:noFill/>
+          </a:ln>
+        </p:spPr>
+        <p:style>
+          <a:lnRef idx="1">
+            <a:schemeClr val="accent1"/>
+          </a:lnRef>
+          <a:fillRef idx="3">
+            <a:schemeClr val="accent1"/>
+          </a:fillRef>
+          <a:effectRef idx="2">
+            <a:schemeClr val="accent1"/>
+          </a:effectRef>
+          <a:fontRef idx="minor">
+            <a:schemeClr val="lt1"/>
+          </a:fontRef>
+        </p:style>
+        <p:txBody>
+          <a:bodyPr rtlCol="0" anchor="ctr"/>
+          <a:lstStyle/>
+          <a:p>
+            <a:pPr algn="ctr"/>
+          </a:p>
+        </p:txBody>
+      </p:sp>
+      <p:sp>
+        <p:nvSpPr>
+          <p:cNvPr id="14" name="Rectangle 13"/>
+          <p:cNvSpPr/>
+          <p:nvPr/>
+        </p:nvSpPr>
+        <p:spPr>
+          <a:xfrm>
+            <a:off x="0" y="6537960"/>
+            <a:ext cx="12191695" cy="12700"/>
+          </a:xfrm>
+          <a:prstGeom prst="rect">
+            <a:avLst/>
+          </a:prstGeom>
+          <a:solidFill>
+            <a:srgbClr val="D8DEE6"/>
+          </a:solidFill>
+          <a:ln>
+            <a:noFill/>
+          </a:ln>
+        </p:spPr>
+        <p:style>
+          <a:lnRef idx="1">
+            <a:schemeClr val="accent1"/>
+          </a:lnRef>
+          <a:fillRef idx="3">
+            <a:schemeClr val="accent1"/>
+          </a:fillRef>
+          <a:effectRef idx="2">
+            <a:schemeClr val="accent1"/>
+          </a:effectRef>
+          <a:fontRef idx="minor">
+            <a:schemeClr val="lt1"/>
+          </a:fontRef>
+        </p:style>
+        <p:txBody>
+          <a:bodyPr rtlCol="0" anchor="ctr"/>
+          <a:lstStyle/>
+          <a:p>
+            <a:pPr algn="ctr"/>
+          </a:p>
+        </p:txBody>
+      </p:sp>
+      <p:sp>
+        <p:nvSpPr>
+          <p:cNvPr id="15" name="TextBox 14"/>
+          <p:cNvSpPr txBox="1"/>
+          <p:nvPr/>
+        </p:nvSpPr>
+        <p:spPr>
+          <a:xfrm>
+            <a:off x="640080" y="6565392"/>
+            <a:ext cx="6400800" cy="256032"/>
+          </a:xfrm>
+          <a:prstGeom prst="rect">
+            <a:avLst/>
+          </a:prstGeom>
+          <a:noFill/>
+        </p:spPr>
+        <p:txBody>
+          <a:bodyPr wrap="square">
+            <a:spAutoFit/>
+          </a:bodyPr>
+          <a:lstStyle/>
+          <a:p>
+            <a:r>
+              <a:rPr sz="1100" b="0">
+                <a:solidFill>
+                  <a:srgbClr val="6B7280"/>
+                </a:solidFill>
+                <a:latin typeface="Calibri"/>
+              </a:rPr>
+              <a:t>OrgFlow  ·  Internal use</a:t>
+            </a:r>
+          </a:p>
+        </p:txBody>
+      </p:sp>
+      <p:sp>
+        <p:nvSpPr>
+          <p:cNvPr id="16" name="TextBox 15"/>
+          <p:cNvSpPr txBox="1"/>
+          <p:nvPr/>
+        </p:nvSpPr>
+        <p:spPr>
+          <a:xfrm>
+            <a:off x="9326880" y="6565392"/>
+            <a:ext cx="2194560" cy="256032"/>
+          </a:xfrm>
+          <a:prstGeom prst="rect">
+            <a:avLst/>
+          </a:prstGeom>
+          <a:noFill/>
+        </p:spPr>
+        <p:txBody>
+          <a:bodyPr wrap="none">
+            <a:spAutoFit/>
+          </a:bodyPr>
+          <a:lstStyle/>
+          <a:p>
+            <a:pPr algn="r"/>
+            <a:r>
+              <a:rPr sz="1100" b="0">
+                <a:solidFill>
+                  <a:srgbClr val="6B7280"/>
+                </a:solidFill>
+                <a:latin typeface="Calibri"/>
+              </a:rPr>
+              <a:t>5  /  11</a:t>
             </a:r>
           </a:p>
         </p:txBody>
@@ -5106,7 +7718,7 @@
             <a:avLst/>
           </a:prstGeom>
           <a:solidFill>
-            <a:srgbClr val="12151C"/>
+            <a:srgbClr val="FFFFFF"/>
           </a:solidFill>
           <a:ln>
             <a:noFill/>
@@ -5143,7 +7755,7 @@
         <p:spPr>
           <a:xfrm>
             <a:off x="640080" y="347472"/>
-            <a:ext cx="10972800" cy="320040"/>
+            <a:ext cx="10972800" cy="256032"/>
           </a:xfrm>
           <a:prstGeom prst="rect">
             <a:avLst/>
@@ -5156,16 +7768,14 @@
           </a:bodyPr>
           <a:lstStyle/>
           <a:p>
-            <a:pPr>
-              <a:defRPr sz="1200" b="1">
-                <a:solidFill>
-                  <a:srgbClr val="C5BBA8"/>
-                </a:solidFill>
-                <a:latin typeface="Calibri"/>
-              </a:defRPr>
-            </a:pPr>
-            <a:r>
-              <a:t>VERSUS WORKBENCH</a:t>
+            <a:r>
+              <a:rPr sz="1100" b="1">
+                <a:solidFill>
+                  <a:srgbClr val="8A7348"/>
+                </a:solidFill>
+                <a:latin typeface="Calibri"/>
+              </a:rPr>
+              <a:t>OPERATING MODEL</a:t>
             </a:r>
           </a:p>
         </p:txBody>
@@ -5178,8 +7788,8 @@
         </p:nvSpPr>
         <p:spPr>
           <a:xfrm>
-            <a:off x="640080" y="658368"/>
-            <a:ext cx="10972800" cy="1051560"/>
+            <a:off x="640080" y="621792"/>
+            <a:ext cx="10972800" cy="822960"/>
           </a:xfrm>
           <a:prstGeom prst="rect">
             <a:avLst/>
@@ -5192,414 +7802,809 @@
           </a:bodyPr>
           <a:lstStyle/>
           <a:p>
+            <a:r>
+              <a:rPr sz="2000" b="1">
+                <a:solidFill>
+                  <a:srgbClr val="1B365D"/>
+                </a:solidFill>
+                <a:latin typeface="Calibri"/>
+              </a:rPr>
+              <a:t>Four sequential steps; later steps stay closed until the prior one is complete</a:t>
+            </a:r>
+          </a:p>
+        </p:txBody>
+      </p:sp>
+      <p:sp>
+        <p:nvSpPr>
+          <p:cNvPr id="5" name="Rectangle 4"/>
+          <p:cNvSpPr/>
+          <p:nvPr/>
+        </p:nvSpPr>
+        <p:spPr>
+          <a:xfrm>
+            <a:off x="502920" y="1737360"/>
+            <a:ext cx="2697480" cy="54864"/>
+          </a:xfrm>
+          <a:prstGeom prst="rect">
+            <a:avLst/>
+          </a:prstGeom>
+          <a:solidFill>
+            <a:srgbClr val="1B365D"/>
+          </a:solidFill>
+          <a:ln>
+            <a:noFill/>
+          </a:ln>
+        </p:spPr>
+        <p:style>
+          <a:lnRef idx="1">
+            <a:schemeClr val="accent1"/>
+          </a:lnRef>
+          <a:fillRef idx="3">
+            <a:schemeClr val="accent1"/>
+          </a:fillRef>
+          <a:effectRef idx="2">
+            <a:schemeClr val="accent1"/>
+          </a:effectRef>
+          <a:fontRef idx="minor">
+            <a:schemeClr val="lt1"/>
+          </a:fontRef>
+        </p:style>
+        <p:txBody>
+          <a:bodyPr rtlCol="0" anchor="ctr"/>
+          <a:lstStyle/>
+          <a:p>
+            <a:pPr algn="ctr"/>
+          </a:p>
+        </p:txBody>
+      </p:sp>
+      <p:sp>
+        <p:nvSpPr>
+          <p:cNvPr id="6" name="Rectangle 5"/>
+          <p:cNvSpPr/>
+          <p:nvPr/>
+        </p:nvSpPr>
+        <p:spPr>
+          <a:xfrm>
+            <a:off x="502920" y="1792224"/>
+            <a:ext cx="2697480" cy="4105656"/>
+          </a:xfrm>
+          <a:prstGeom prst="rect">
+            <a:avLst/>
+          </a:prstGeom>
+          <a:solidFill>
+            <a:srgbClr val="F4F6F9"/>
+          </a:solidFill>
+          <a:ln>
+            <a:noFill/>
+          </a:ln>
+        </p:spPr>
+        <p:style>
+          <a:lnRef idx="1">
+            <a:schemeClr val="accent1"/>
+          </a:lnRef>
+          <a:fillRef idx="3">
+            <a:schemeClr val="accent1"/>
+          </a:fillRef>
+          <a:effectRef idx="2">
+            <a:schemeClr val="accent1"/>
+          </a:effectRef>
+          <a:fontRef idx="minor">
+            <a:schemeClr val="lt1"/>
+          </a:fontRef>
+        </p:style>
+        <p:txBody>
+          <a:bodyPr rtlCol="0" anchor="ctr"/>
+          <a:lstStyle/>
+          <a:p>
+            <a:pPr algn="ctr"/>
+          </a:p>
+        </p:txBody>
+      </p:sp>
+      <p:sp>
+        <p:nvSpPr>
+          <p:cNvPr id="7" name="TextBox 6"/>
+          <p:cNvSpPr txBox="1"/>
+          <p:nvPr/>
+        </p:nvSpPr>
+        <p:spPr>
+          <a:xfrm>
+            <a:off x="649224" y="1883664"/>
+            <a:ext cx="2404872" cy="329184"/>
+          </a:xfrm>
+          <a:prstGeom prst="rect">
+            <a:avLst/>
+          </a:prstGeom>
+          <a:noFill/>
+        </p:spPr>
+        <p:txBody>
+          <a:bodyPr wrap="square">
+            <a:spAutoFit/>
+          </a:bodyPr>
+          <a:lstStyle/>
+          <a:p>
+            <a:r>
+              <a:rPr sz="1400" b="1">
+                <a:solidFill>
+                  <a:srgbClr val="1B365D"/>
+                </a:solidFill>
+                <a:latin typeface="Calibri"/>
+              </a:rPr>
+              <a:t>1. Start</a:t>
+            </a:r>
+          </a:p>
+        </p:txBody>
+      </p:sp>
+      <p:sp>
+        <p:nvSpPr>
+          <p:cNvPr id="8" name="TextBox 7"/>
+          <p:cNvSpPr txBox="1"/>
+          <p:nvPr/>
+        </p:nvSpPr>
+        <p:spPr>
+          <a:xfrm>
+            <a:off x="649224" y="2212848"/>
+            <a:ext cx="2404872" cy="3538728"/>
+          </a:xfrm>
+          <a:prstGeom prst="rect">
+            <a:avLst/>
+          </a:prstGeom>
+          <a:noFill/>
+        </p:spPr>
+        <p:txBody>
+          <a:bodyPr wrap="square">
+            <a:spAutoFit/>
+          </a:bodyPr>
+          <a:lstStyle/>
+          <a:p>
             <a:pPr>
-              <a:defRPr sz="3200" b="1">
-                <a:solidFill>
-                  <a:srgbClr val="FFFFFF"/>
-                </a:solidFill>
-                <a:latin typeface="Calibri"/>
-              </a:defRPr>
+              <a:spcAft>
+                <a:spcPts val="600"/>
+              </a:spcAft>
             </a:pPr>
             <a:r>
-              <a:t>Workbench is a console. OrgFlow is a promotion.</a:t>
-            </a:r>
-          </a:p>
-        </p:txBody>
-      </p:sp>
-      <p:graphicFrame>
-        <p:nvGraphicFramePr>
-          <p:cNvPr id="5" name="Table 4"/>
-          <p:cNvGraphicFramePr>
-            <a:graphicFrameLocks noGrp="1"/>
-          </p:cNvGraphicFramePr>
-          <p:nvPr/>
-        </p:nvGraphicFramePr>
-        <p:xfrm>
-          <a:off x="640080" y="1874519"/>
-          <a:ext cx="10881360" cy="4206240"/>
-        </p:xfrm>
-        <a:graphic>
-          <a:graphicData uri="http://schemas.openxmlformats.org/drawingml/2006/table">
-            <a:tbl>
-              <a:tblPr firstRow="1" bandRow="1">
-                <a:tableStyleId>{5C22544A-7EE6-4342-B048-85BDC9FD1C3A}</a:tableStyleId>
-              </a:tblPr>
-              <a:tblGrid>
-                <a:gridCol w="2011680"/>
-                <a:gridCol w="4434840"/>
-                <a:gridCol w="4434840"/>
-              </a:tblGrid>
-              <a:tr h="841248">
-                <a:tc>
-                  <a:txBody>
-                    <a:bodyPr/>
-                    <a:lstStyle/>
-                    <a:p>
-                      <a:pPr>
-                        <a:defRPr sz="1100" b="1">
-                          <a:solidFill>
-                            <a:srgbClr val="C5BBA8"/>
-                          </a:solidFill>
-                          <a:latin typeface="Calibri"/>
-                        </a:defRPr>
-                      </a:pPr>
-                    </a:p>
-                  </a:txBody>
-                  <a:tcPr>
-                    <a:solidFill>
-                      <a:srgbClr val="1C212C"/>
-                    </a:solidFill>
-                  </a:tcPr>
-                </a:tc>
-                <a:tc>
-                  <a:txBody>
-                    <a:bodyPr/>
-                    <a:lstStyle/>
-                    <a:p>
-                      <a:pPr>
-                        <a:defRPr sz="1100" b="1">
-                          <a:solidFill>
-                            <a:srgbClr val="C5BBA8"/>
-                          </a:solidFill>
-                          <a:latin typeface="Calibri"/>
-                        </a:defRPr>
-                      </a:pPr>
-                      <a:r>
-                        <a:t>Salesforce Workbench</a:t>
-                      </a:r>
-                    </a:p>
-                  </a:txBody>
-                  <a:tcPr>
-                    <a:solidFill>
-                      <a:srgbClr val="1C212C"/>
-                    </a:solidFill>
-                  </a:tcPr>
-                </a:tc>
-                <a:tc>
-                  <a:txBody>
-                    <a:bodyPr/>
-                    <a:lstStyle/>
-                    <a:p>
-                      <a:pPr>
-                        <a:defRPr sz="1100" b="1">
-                          <a:solidFill>
-                            <a:srgbClr val="C5BBA8"/>
-                          </a:solidFill>
-                          <a:latin typeface="Calibri"/>
-                        </a:defRPr>
-                      </a:pPr>
-                      <a:r>
-                        <a:t>OrgFlow</a:t>
-                      </a:r>
-                    </a:p>
-                  </a:txBody>
-                  <a:tcPr>
-                    <a:solidFill>
-                      <a:srgbClr val="1C212C"/>
-                    </a:solidFill>
-                  </a:tcPr>
-                </a:tc>
-              </a:tr>
-              <a:tr h="841248">
-                <a:tc>
-                  <a:txBody>
-                    <a:bodyPr/>
-                    <a:lstStyle/>
-                    <a:p>
-                      <a:pPr>
-                        <a:defRPr sz="1200" b="0">
-                          <a:solidFill>
-                            <a:srgbClr val="E6E4DE"/>
-                          </a:solidFill>
-                          <a:latin typeface="Calibri"/>
-                        </a:defRPr>
-                      </a:pPr>
-                      <a:r>
-                        <a:t>Role</a:t>
-                      </a:r>
-                    </a:p>
-                  </a:txBody>
-                  <a:tcPr>
-                    <a:solidFill>
-                      <a:srgbClr val="1C212C"/>
-                    </a:solidFill>
-                  </a:tcPr>
-                </a:tc>
-                <a:tc>
-                  <a:txBody>
-                    <a:bodyPr/>
-                    <a:lstStyle/>
-                    <a:p>
-                      <a:pPr>
-                        <a:defRPr sz="1200" b="0">
-                          <a:solidFill>
-                            <a:srgbClr val="E6E4DE"/>
-                          </a:solidFill>
-                          <a:latin typeface="Calibri"/>
-                        </a:defRPr>
-                      </a:pPr>
-                      <a:r>
-                        <a:t>Expert API tool. Retrieve or deploy a zip someone already prepared.</a:t>
-                      </a:r>
-                    </a:p>
-                  </a:txBody>
-                  <a:tcPr>
-                    <a:solidFill>
-                      <a:srgbClr val="1C212C"/>
-                    </a:solidFill>
-                  </a:tcPr>
-                </a:tc>
-                <a:tc>
-                  <a:txBody>
-                    <a:bodyPr/>
-                    <a:lstStyle/>
-                    <a:p>
-                      <a:pPr>
-                        <a:defRPr sz="1200" b="0">
-                          <a:solidFill>
-                            <a:srgbClr val="E6E4DE"/>
-                          </a:solidFill>
-                          <a:latin typeface="Calibri"/>
-                        </a:defRPr>
-                      </a:pPr>
-                      <a:r>
-                        <a:t>Daily path for “I built this in sandbox — send it to QA.”</a:t>
-                      </a:r>
-                    </a:p>
-                  </a:txBody>
-                  <a:tcPr>
-                    <a:solidFill>
-                      <a:srgbClr val="1C212C"/>
-                    </a:solidFill>
-                  </a:tcPr>
-                </a:tc>
-              </a:tr>
-              <a:tr h="841248">
-                <a:tc>
-                  <a:txBody>
-                    <a:bodyPr/>
-                    <a:lstStyle/>
-                    <a:p>
-                      <a:pPr>
-                        <a:defRPr sz="1200" b="0">
-                          <a:solidFill>
-                            <a:srgbClr val="E6E4DE"/>
-                          </a:solidFill>
-                          <a:latin typeface="Calibri"/>
-                        </a:defRPr>
-                      </a:pPr>
-                      <a:r>
-                        <a:t>Skill</a:t>
-                      </a:r>
-                    </a:p>
-                  </a:txBody>
-                  <a:tcPr>
-                    <a:solidFill>
-                      <a:srgbClr val="1C212C"/>
-                    </a:solidFill>
-                  </a:tcPr>
-                </a:tc>
-                <a:tc>
-                  <a:txBody>
-                    <a:bodyPr/>
-                    <a:lstStyle/>
-                    <a:p>
-                      <a:pPr>
-                        <a:defRPr sz="1200" b="0">
-                          <a:solidFill>
-                            <a:srgbClr val="E6E4DE"/>
-                          </a:solidFill>
-                          <a:latin typeface="Calibri"/>
-                        </a:defRPr>
-                      </a:pPr>
-                      <a:r>
-                        <a:t>You must know package.xml and Metadata API layout.</a:t>
-                      </a:r>
-                    </a:p>
-                  </a:txBody>
-                  <a:tcPr>
-                    <a:solidFill>
-                      <a:srgbClr val="1C212C"/>
-                    </a:solidFill>
-                  </a:tcPr>
-                </a:tc>
-                <a:tc>
-                  <a:txBody>
-                    <a:bodyPr/>
-                    <a:lstStyle/>
-                    <a:p>
-                      <a:pPr>
-                        <a:defRPr sz="1200" b="0">
-                          <a:solidFill>
-                            <a:srgbClr val="E6E4DE"/>
-                          </a:solidFill>
-                          <a:latin typeface="Calibri"/>
-                        </a:defRPr>
-                      </a:pPr>
-                      <a:r>
-                        <a:t>Tick names. The package is built for them.</a:t>
-                      </a:r>
-                    </a:p>
-                  </a:txBody>
-                  <a:tcPr>
-                    <a:solidFill>
-                      <a:srgbClr val="1C212C"/>
-                    </a:solidFill>
-                  </a:tcPr>
-                </a:tc>
-              </a:tr>
-              <a:tr h="841248">
-                <a:tc>
-                  <a:txBody>
-                    <a:bodyPr/>
-                    <a:lstStyle/>
-                    <a:p>
-                      <a:pPr>
-                        <a:defRPr sz="1200" b="0">
-                          <a:solidFill>
-                            <a:srgbClr val="E6E4DE"/>
-                          </a:solidFill>
-                          <a:latin typeface="Calibri"/>
-                        </a:defRPr>
-                      </a:pPr>
-                      <a:r>
-                        <a:t>Repeatability</a:t>
-                      </a:r>
-                    </a:p>
-                  </a:txBody>
-                  <a:tcPr>
-                    <a:solidFill>
-                      <a:srgbClr val="1C212C"/>
-                    </a:solidFill>
-                  </a:tcPr>
-                </a:tc>
-                <a:tc>
-                  <a:txBody>
-                    <a:bodyPr/>
-                    <a:lstStyle/>
-                    <a:p>
-                      <a:pPr>
-                        <a:defRPr sz="1200" b="0">
-                          <a:solidFill>
-                            <a:srgbClr val="E6E4DE"/>
-                          </a:solidFill>
-                          <a:latin typeface="Calibri"/>
-                        </a:defRPr>
-                      </a:pPr>
-                      <a:r>
-                        <a:t>Each org is a new session. Easy to send a different list next time.</a:t>
-                      </a:r>
-                    </a:p>
-                  </a:txBody>
-                  <a:tcPr>
-                    <a:solidFill>
-                      <a:srgbClr val="1C212C"/>
-                    </a:solidFill>
-                  </a:tcPr>
-                </a:tc>
-                <a:tc>
-                  <a:txBody>
-                    <a:bodyPr/>
-                    <a:lstStyle/>
-                    <a:p>
-                      <a:pPr>
-                        <a:defRPr sz="1200" b="0">
-                          <a:solidFill>
-                            <a:srgbClr val="E6E4DE"/>
-                          </a:solidFill>
-                          <a:latin typeface="Calibri"/>
-                        </a:defRPr>
-                      </a:pPr>
-                      <a:r>
-                        <a:t>One snapshot. Same files can hop to the next environment.</a:t>
-                      </a:r>
-                    </a:p>
-                  </a:txBody>
-                  <a:tcPr>
-                    <a:solidFill>
-                      <a:srgbClr val="1C212C"/>
-                    </a:solidFill>
-                  </a:tcPr>
-                </a:tc>
-              </a:tr>
-              <a:tr h="841248">
-                <a:tc>
-                  <a:txBody>
-                    <a:bodyPr/>
-                    <a:lstStyle/>
-                    <a:p>
-                      <a:pPr>
-                        <a:defRPr sz="1200" b="0">
-                          <a:solidFill>
-                            <a:srgbClr val="E6E4DE"/>
-                          </a:solidFill>
-                          <a:latin typeface="Calibri"/>
-                        </a:defRPr>
-                      </a:pPr>
-                      <a:r>
-                        <a:t>Oversight</a:t>
-                      </a:r>
-                    </a:p>
-                  </a:txBody>
-                  <a:tcPr>
-                    <a:solidFill>
-                      <a:srgbClr val="1C212C"/>
-                    </a:solidFill>
-                  </a:tcPr>
-                </a:tc>
-                <a:tc>
-                  <a:txBody>
-                    <a:bodyPr/>
-                    <a:lstStyle/>
-                    <a:p>
-                      <a:pPr>
-                        <a:defRPr sz="1200" b="0">
-                          <a:solidFill>
-                            <a:srgbClr val="E6E4DE"/>
-                          </a:solidFill>
-                          <a:latin typeface="Calibri"/>
-                        </a:defRPr>
-                      </a:pPr>
-                      <a:r>
-                        <a:t>No From → To bar. Easy to deploy back into the same org.</a:t>
-                      </a:r>
-                    </a:p>
-                  </a:txBody>
-                  <a:tcPr>
-                    <a:solidFill>
-                      <a:srgbClr val="1C212C"/>
-                    </a:solidFill>
-                  </a:tcPr>
-                </a:tc>
-                <a:tc>
-                  <a:txBody>
-                    <a:bodyPr/>
-                    <a:lstStyle/>
-                    <a:p>
-                      <a:pPr>
-                        <a:defRPr sz="1200" b="0">
-                          <a:solidFill>
-                            <a:srgbClr val="E6E4DE"/>
-                          </a:solidFill>
-                          <a:latin typeface="Calibri"/>
-                        </a:defRPr>
-                      </a:pPr>
-                      <a:r>
-                        <a:t>From and To must differ. Confirm shows the path before send.</a:t>
-                      </a:r>
-                    </a:p>
-                  </a:txBody>
-                  <a:tcPr>
-                    <a:solidFill>
-                      <a:srgbClr val="1C212C"/>
-                    </a:solidFill>
-                  </a:tcPr>
-                </a:tc>
-              </a:tr>
-            </a:tbl>
-          </a:graphicData>
-        </a:graphic>
-      </p:graphicFrame>
+              <a:rPr sz="1300" b="0">
+                <a:solidFill>
+                  <a:srgbClr val="3D4450"/>
+                </a:solidFill>
+                <a:latin typeface="Calibri"/>
+              </a:rPr>
+              <a:t>Sign in to the source and target Salesforce organizations in Chrome. Detect sessions. Select From and To. The two organizations must be different.</a:t>
+            </a:r>
+          </a:p>
+        </p:txBody>
+      </p:sp>
+      <p:sp>
+        <p:nvSpPr>
+          <p:cNvPr id="9" name="Rectangle 8"/>
+          <p:cNvSpPr/>
+          <p:nvPr/>
+        </p:nvSpPr>
+        <p:spPr>
+          <a:xfrm>
+            <a:off x="3337560" y="1737360"/>
+            <a:ext cx="2697480" cy="54864"/>
+          </a:xfrm>
+          <a:prstGeom prst="rect">
+            <a:avLst/>
+          </a:prstGeom>
+          <a:solidFill>
+            <a:srgbClr val="1B365D"/>
+          </a:solidFill>
+          <a:ln>
+            <a:noFill/>
+          </a:ln>
+        </p:spPr>
+        <p:style>
+          <a:lnRef idx="1">
+            <a:schemeClr val="accent1"/>
+          </a:lnRef>
+          <a:fillRef idx="3">
+            <a:schemeClr val="accent1"/>
+          </a:fillRef>
+          <a:effectRef idx="2">
+            <a:schemeClr val="accent1"/>
+          </a:effectRef>
+          <a:fontRef idx="minor">
+            <a:schemeClr val="lt1"/>
+          </a:fontRef>
+        </p:style>
+        <p:txBody>
+          <a:bodyPr rtlCol="0" anchor="ctr"/>
+          <a:lstStyle/>
+          <a:p>
+            <a:pPr algn="ctr"/>
+          </a:p>
+        </p:txBody>
+      </p:sp>
+      <p:sp>
+        <p:nvSpPr>
+          <p:cNvPr id="10" name="Rectangle 9"/>
+          <p:cNvSpPr/>
+          <p:nvPr/>
+        </p:nvSpPr>
+        <p:spPr>
+          <a:xfrm>
+            <a:off x="3337560" y="1792224"/>
+            <a:ext cx="2697480" cy="4105656"/>
+          </a:xfrm>
+          <a:prstGeom prst="rect">
+            <a:avLst/>
+          </a:prstGeom>
+          <a:solidFill>
+            <a:srgbClr val="F4F6F9"/>
+          </a:solidFill>
+          <a:ln>
+            <a:noFill/>
+          </a:ln>
+        </p:spPr>
+        <p:style>
+          <a:lnRef idx="1">
+            <a:schemeClr val="accent1"/>
+          </a:lnRef>
+          <a:fillRef idx="3">
+            <a:schemeClr val="accent1"/>
+          </a:fillRef>
+          <a:effectRef idx="2">
+            <a:schemeClr val="accent1"/>
+          </a:effectRef>
+          <a:fontRef idx="minor">
+            <a:schemeClr val="lt1"/>
+          </a:fontRef>
+        </p:style>
+        <p:txBody>
+          <a:bodyPr rtlCol="0" anchor="ctr"/>
+          <a:lstStyle/>
+          <a:p>
+            <a:pPr algn="ctr"/>
+          </a:p>
+        </p:txBody>
+      </p:sp>
+      <p:sp>
+        <p:nvSpPr>
+          <p:cNvPr id="11" name="TextBox 10"/>
+          <p:cNvSpPr txBox="1"/>
+          <p:nvPr/>
+        </p:nvSpPr>
+        <p:spPr>
+          <a:xfrm>
+            <a:off x="3483864" y="1883664"/>
+            <a:ext cx="2404872" cy="329184"/>
+          </a:xfrm>
+          <a:prstGeom prst="rect">
+            <a:avLst/>
+          </a:prstGeom>
+          <a:noFill/>
+        </p:spPr>
+        <p:txBody>
+          <a:bodyPr wrap="square">
+            <a:spAutoFit/>
+          </a:bodyPr>
+          <a:lstStyle/>
+          <a:p>
+            <a:r>
+              <a:rPr sz="1400" b="1">
+                <a:solidFill>
+                  <a:srgbClr val="1B365D"/>
+                </a:solidFill>
+                <a:latin typeface="Calibri"/>
+              </a:rPr>
+              <a:t>2. Package</a:t>
+            </a:r>
+          </a:p>
+        </p:txBody>
+      </p:sp>
+      <p:sp>
+        <p:nvSpPr>
+          <p:cNvPr id="12" name="TextBox 11"/>
+          <p:cNvSpPr txBox="1"/>
+          <p:nvPr/>
+        </p:nvSpPr>
+        <p:spPr>
+          <a:xfrm>
+            <a:off x="3483864" y="2212848"/>
+            <a:ext cx="2404872" cy="3538728"/>
+          </a:xfrm>
+          <a:prstGeom prst="rect">
+            <a:avLst/>
+          </a:prstGeom>
+          <a:noFill/>
+        </p:spPr>
+        <p:txBody>
+          <a:bodyPr wrap="square">
+            <a:spAutoFit/>
+          </a:bodyPr>
+          <a:lstStyle/>
+          <a:p>
+            <a:pPr>
+              <a:spcAft>
+                <a:spcPts val="600"/>
+              </a:spcAft>
+            </a:pPr>
+            <a:r>
+              <a:rPr sz="1300" b="0">
+                <a:solidFill>
+                  <a:srgbClr val="3D4450"/>
+                </a:solidFill>
+                <a:latin typeface="Calibri"/>
+              </a:rPr>
+              <a:t>Review recent changes in the source organization and select the components to move. OrgFlow assembles the package; staff do not author XML.</a:t>
+            </a:r>
+          </a:p>
+        </p:txBody>
+      </p:sp>
+      <p:sp>
+        <p:nvSpPr>
+          <p:cNvPr id="13" name="Rectangle 12"/>
+          <p:cNvSpPr/>
+          <p:nvPr/>
+        </p:nvSpPr>
+        <p:spPr>
+          <a:xfrm>
+            <a:off x="6172200" y="1737360"/>
+            <a:ext cx="2697480" cy="54864"/>
+          </a:xfrm>
+          <a:prstGeom prst="rect">
+            <a:avLst/>
+          </a:prstGeom>
+          <a:solidFill>
+            <a:srgbClr val="1B365D"/>
+          </a:solidFill>
+          <a:ln>
+            <a:noFill/>
+          </a:ln>
+        </p:spPr>
+        <p:style>
+          <a:lnRef idx="1">
+            <a:schemeClr val="accent1"/>
+          </a:lnRef>
+          <a:fillRef idx="3">
+            <a:schemeClr val="accent1"/>
+          </a:fillRef>
+          <a:effectRef idx="2">
+            <a:schemeClr val="accent1"/>
+          </a:effectRef>
+          <a:fontRef idx="minor">
+            <a:schemeClr val="lt1"/>
+          </a:fontRef>
+        </p:style>
+        <p:txBody>
+          <a:bodyPr rtlCol="0" anchor="ctr"/>
+          <a:lstStyle/>
+          <a:p>
+            <a:pPr algn="ctr"/>
+          </a:p>
+        </p:txBody>
+      </p:sp>
+      <p:sp>
+        <p:nvSpPr>
+          <p:cNvPr id="14" name="Rectangle 13"/>
+          <p:cNvSpPr/>
+          <p:nvPr/>
+        </p:nvSpPr>
+        <p:spPr>
+          <a:xfrm>
+            <a:off x="6172200" y="1792224"/>
+            <a:ext cx="2697480" cy="4105656"/>
+          </a:xfrm>
+          <a:prstGeom prst="rect">
+            <a:avLst/>
+          </a:prstGeom>
+          <a:solidFill>
+            <a:srgbClr val="F4F6F9"/>
+          </a:solidFill>
+          <a:ln>
+            <a:noFill/>
+          </a:ln>
+        </p:spPr>
+        <p:style>
+          <a:lnRef idx="1">
+            <a:schemeClr val="accent1"/>
+          </a:lnRef>
+          <a:fillRef idx="3">
+            <a:schemeClr val="accent1"/>
+          </a:fillRef>
+          <a:effectRef idx="2">
+            <a:schemeClr val="accent1"/>
+          </a:effectRef>
+          <a:fontRef idx="minor">
+            <a:schemeClr val="lt1"/>
+          </a:fontRef>
+        </p:style>
+        <p:txBody>
+          <a:bodyPr rtlCol="0" anchor="ctr"/>
+          <a:lstStyle/>
+          <a:p>
+            <a:pPr algn="ctr"/>
+          </a:p>
+        </p:txBody>
+      </p:sp>
+      <p:sp>
+        <p:nvSpPr>
+          <p:cNvPr id="15" name="TextBox 14"/>
+          <p:cNvSpPr txBox="1"/>
+          <p:nvPr/>
+        </p:nvSpPr>
+        <p:spPr>
+          <a:xfrm>
+            <a:off x="6318504" y="1883664"/>
+            <a:ext cx="2404872" cy="329184"/>
+          </a:xfrm>
+          <a:prstGeom prst="rect">
+            <a:avLst/>
+          </a:prstGeom>
+          <a:noFill/>
+        </p:spPr>
+        <p:txBody>
+          <a:bodyPr wrap="square">
+            <a:spAutoFit/>
+          </a:bodyPr>
+          <a:lstStyle/>
+          <a:p>
+            <a:r>
+              <a:rPr sz="1400" b="1">
+                <a:solidFill>
+                  <a:srgbClr val="1B365D"/>
+                </a:solidFill>
+                <a:latin typeface="Calibri"/>
+              </a:rPr>
+              <a:t>3. Retrieve</a:t>
+            </a:r>
+          </a:p>
+        </p:txBody>
+      </p:sp>
+      <p:sp>
+        <p:nvSpPr>
+          <p:cNvPr id="16" name="TextBox 15"/>
+          <p:cNvSpPr txBox="1"/>
+          <p:nvPr/>
+        </p:nvSpPr>
+        <p:spPr>
+          <a:xfrm>
+            <a:off x="6318504" y="2212848"/>
+            <a:ext cx="2404872" cy="3538728"/>
+          </a:xfrm>
+          <a:prstGeom prst="rect">
+            <a:avLst/>
+          </a:prstGeom>
+          <a:noFill/>
+        </p:spPr>
+        <p:txBody>
+          <a:bodyPr wrap="square">
+            <a:spAutoFit/>
+          </a:bodyPr>
+          <a:lstStyle/>
+          <a:p>
+            <a:pPr>
+              <a:spcAft>
+                <a:spcPts val="600"/>
+              </a:spcAft>
+            </a:pPr>
+            <a:r>
+              <a:rPr sz="1300" b="0">
+                <a:solidFill>
+                  <a:srgbClr val="3D4450"/>
+                </a:solidFill>
+                <a:latin typeface="Calibri"/>
+              </a:rPr>
+              <a:t>Retrieve a snapshot from the source. Jira is optional when storing on the device, and required if a shared repository is enabled.</a:t>
+            </a:r>
+          </a:p>
+        </p:txBody>
+      </p:sp>
+      <p:sp>
+        <p:nvSpPr>
+          <p:cNvPr id="17" name="Rectangle 16"/>
+          <p:cNvSpPr/>
+          <p:nvPr/>
+        </p:nvSpPr>
+        <p:spPr>
+          <a:xfrm>
+            <a:off x="9006840" y="1737360"/>
+            <a:ext cx="2697480" cy="54864"/>
+          </a:xfrm>
+          <a:prstGeom prst="rect">
+            <a:avLst/>
+          </a:prstGeom>
+          <a:solidFill>
+            <a:srgbClr val="1B365D"/>
+          </a:solidFill>
+          <a:ln>
+            <a:noFill/>
+          </a:ln>
+        </p:spPr>
+        <p:style>
+          <a:lnRef idx="1">
+            <a:schemeClr val="accent1"/>
+          </a:lnRef>
+          <a:fillRef idx="3">
+            <a:schemeClr val="accent1"/>
+          </a:fillRef>
+          <a:effectRef idx="2">
+            <a:schemeClr val="accent1"/>
+          </a:effectRef>
+          <a:fontRef idx="minor">
+            <a:schemeClr val="lt1"/>
+          </a:fontRef>
+        </p:style>
+        <p:txBody>
+          <a:bodyPr rtlCol="0" anchor="ctr"/>
+          <a:lstStyle/>
+          <a:p>
+            <a:pPr algn="ctr"/>
+          </a:p>
+        </p:txBody>
+      </p:sp>
+      <p:sp>
+        <p:nvSpPr>
+          <p:cNvPr id="18" name="Rectangle 17"/>
+          <p:cNvSpPr/>
+          <p:nvPr/>
+        </p:nvSpPr>
+        <p:spPr>
+          <a:xfrm>
+            <a:off x="9006840" y="1792224"/>
+            <a:ext cx="2697480" cy="4105656"/>
+          </a:xfrm>
+          <a:prstGeom prst="rect">
+            <a:avLst/>
+          </a:prstGeom>
+          <a:solidFill>
+            <a:srgbClr val="F4F6F9"/>
+          </a:solidFill>
+          <a:ln>
+            <a:noFill/>
+          </a:ln>
+        </p:spPr>
+        <p:style>
+          <a:lnRef idx="1">
+            <a:schemeClr val="accent1"/>
+          </a:lnRef>
+          <a:fillRef idx="3">
+            <a:schemeClr val="accent1"/>
+          </a:fillRef>
+          <a:effectRef idx="2">
+            <a:schemeClr val="accent1"/>
+          </a:effectRef>
+          <a:fontRef idx="minor">
+            <a:schemeClr val="lt1"/>
+          </a:fontRef>
+        </p:style>
+        <p:txBody>
+          <a:bodyPr rtlCol="0" anchor="ctr"/>
+          <a:lstStyle/>
+          <a:p>
+            <a:pPr algn="ctr"/>
+          </a:p>
+        </p:txBody>
+      </p:sp>
+      <p:sp>
+        <p:nvSpPr>
+          <p:cNvPr id="19" name="TextBox 18"/>
+          <p:cNvSpPr txBox="1"/>
+          <p:nvPr/>
+        </p:nvSpPr>
+        <p:spPr>
+          <a:xfrm>
+            <a:off x="9153144" y="1883664"/>
+            <a:ext cx="2404872" cy="329184"/>
+          </a:xfrm>
+          <a:prstGeom prst="rect">
+            <a:avLst/>
+          </a:prstGeom>
+          <a:noFill/>
+        </p:spPr>
+        <p:txBody>
+          <a:bodyPr wrap="square">
+            <a:spAutoFit/>
+          </a:bodyPr>
+          <a:lstStyle/>
+          <a:p>
+            <a:r>
+              <a:rPr sz="1400" b="1">
+                <a:solidFill>
+                  <a:srgbClr val="1B365D"/>
+                </a:solidFill>
+                <a:latin typeface="Calibri"/>
+              </a:rPr>
+              <a:t>4. Confirm</a:t>
+            </a:r>
+          </a:p>
+        </p:txBody>
+      </p:sp>
+      <p:sp>
+        <p:nvSpPr>
+          <p:cNvPr id="20" name="TextBox 19"/>
+          <p:cNvSpPr txBox="1"/>
+          <p:nvPr/>
+        </p:nvSpPr>
+        <p:spPr>
+          <a:xfrm>
+            <a:off x="9153144" y="2212848"/>
+            <a:ext cx="2404872" cy="3538728"/>
+          </a:xfrm>
+          <a:prstGeom prst="rect">
+            <a:avLst/>
+          </a:prstGeom>
+          <a:noFill/>
+        </p:spPr>
+        <p:txBody>
+          <a:bodyPr wrap="square">
+            <a:spAutoFit/>
+          </a:bodyPr>
+          <a:lstStyle/>
+          <a:p>
+            <a:pPr>
+              <a:spcAft>
+                <a:spcPts val="600"/>
+              </a:spcAft>
+            </a:pPr>
+            <a:r>
+              <a:rPr sz="1300" b="0">
+                <a:solidFill>
+                  <a:srgbClr val="3D4450"/>
+                </a:solidFill>
+                <a:latin typeface="Calibri"/>
+              </a:rPr>
+              <a:t>Review the path and contents. Run a validation (dry run) if required. Deploy. The same snapshot can be promoted to the next environment.</a:t>
+            </a:r>
+          </a:p>
+        </p:txBody>
+      </p:sp>
+      <p:sp>
+        <p:nvSpPr>
+          <p:cNvPr id="21" name="Rectangle 20"/>
+          <p:cNvSpPr/>
+          <p:nvPr/>
+        </p:nvSpPr>
+        <p:spPr>
+          <a:xfrm>
+            <a:off x="0" y="6537960"/>
+            <a:ext cx="12191695" cy="320040"/>
+          </a:xfrm>
+          <a:prstGeom prst="rect">
+            <a:avLst/>
+          </a:prstGeom>
+          <a:solidFill>
+            <a:srgbClr val="FFFFFF"/>
+          </a:solidFill>
+          <a:ln>
+            <a:noFill/>
+          </a:ln>
+        </p:spPr>
+        <p:style>
+          <a:lnRef idx="1">
+            <a:schemeClr val="accent1"/>
+          </a:lnRef>
+          <a:fillRef idx="3">
+            <a:schemeClr val="accent1"/>
+          </a:fillRef>
+          <a:effectRef idx="2">
+            <a:schemeClr val="accent1"/>
+          </a:effectRef>
+          <a:fontRef idx="minor">
+            <a:schemeClr val="lt1"/>
+          </a:fontRef>
+        </p:style>
+        <p:txBody>
+          <a:bodyPr rtlCol="0" anchor="ctr"/>
+          <a:lstStyle/>
+          <a:p>
+            <a:pPr algn="ctr"/>
+          </a:p>
+        </p:txBody>
+      </p:sp>
+      <p:sp>
+        <p:nvSpPr>
+          <p:cNvPr id="22" name="Rectangle 21"/>
+          <p:cNvSpPr/>
+          <p:nvPr/>
+        </p:nvSpPr>
+        <p:spPr>
+          <a:xfrm>
+            <a:off x="0" y="6537960"/>
+            <a:ext cx="12191695" cy="12700"/>
+          </a:xfrm>
+          <a:prstGeom prst="rect">
+            <a:avLst/>
+          </a:prstGeom>
+          <a:solidFill>
+            <a:srgbClr val="D8DEE6"/>
+          </a:solidFill>
+          <a:ln>
+            <a:noFill/>
+          </a:ln>
+        </p:spPr>
+        <p:style>
+          <a:lnRef idx="1">
+            <a:schemeClr val="accent1"/>
+          </a:lnRef>
+          <a:fillRef idx="3">
+            <a:schemeClr val="accent1"/>
+          </a:fillRef>
+          <a:effectRef idx="2">
+            <a:schemeClr val="accent1"/>
+          </a:effectRef>
+          <a:fontRef idx="minor">
+            <a:schemeClr val="lt1"/>
+          </a:fontRef>
+        </p:style>
+        <p:txBody>
+          <a:bodyPr rtlCol="0" anchor="ctr"/>
+          <a:lstStyle/>
+          <a:p>
+            <a:pPr algn="ctr"/>
+          </a:p>
+        </p:txBody>
+      </p:sp>
+      <p:sp>
+        <p:nvSpPr>
+          <p:cNvPr id="23" name="TextBox 22"/>
+          <p:cNvSpPr txBox="1"/>
+          <p:nvPr/>
+        </p:nvSpPr>
+        <p:spPr>
+          <a:xfrm>
+            <a:off x="640080" y="6565392"/>
+            <a:ext cx="6400800" cy="256032"/>
+          </a:xfrm>
+          <a:prstGeom prst="rect">
+            <a:avLst/>
+          </a:prstGeom>
+          <a:noFill/>
+        </p:spPr>
+        <p:txBody>
+          <a:bodyPr wrap="square">
+            <a:spAutoFit/>
+          </a:bodyPr>
+          <a:lstStyle/>
+          <a:p>
+            <a:r>
+              <a:rPr sz="1100" b="0">
+                <a:solidFill>
+                  <a:srgbClr val="6B7280"/>
+                </a:solidFill>
+                <a:latin typeface="Calibri"/>
+              </a:rPr>
+              <a:t>OrgFlow  ·  Internal use</a:t>
+            </a:r>
+          </a:p>
+        </p:txBody>
+      </p:sp>
+      <p:sp>
+        <p:nvSpPr>
+          <p:cNvPr id="24" name="TextBox 23"/>
+          <p:cNvSpPr txBox="1"/>
+          <p:nvPr/>
+        </p:nvSpPr>
+        <p:spPr>
+          <a:xfrm>
+            <a:off x="9326880" y="6565392"/>
+            <a:ext cx="2194560" cy="256032"/>
+          </a:xfrm>
+          <a:prstGeom prst="rect">
+            <a:avLst/>
+          </a:prstGeom>
+          <a:noFill/>
+        </p:spPr>
+        <p:txBody>
+          <a:bodyPr wrap="none">
+            <a:spAutoFit/>
+          </a:bodyPr>
+          <a:lstStyle/>
+          <a:p>
+            <a:pPr algn="r"/>
+            <a:r>
+              <a:rPr sz="1100" b="0">
+                <a:solidFill>
+                  <a:srgbClr val="6B7280"/>
+                </a:solidFill>
+                <a:latin typeface="Calibri"/>
+              </a:rPr>
+              <a:t>6  /  11</a:t>
+            </a:r>
+          </a:p>
+        </p:txBody>
+      </p:sp>
     </p:spTree>
   </p:cSld>
   <p:clrMapOvr>
@@ -5633,7 +8638,7 @@
             <a:avLst/>
           </a:prstGeom>
           <a:solidFill>
-            <a:srgbClr val="12151C"/>
+            <a:srgbClr val="FFFFFF"/>
           </a:solidFill>
           <a:ln>
             <a:noFill/>
@@ -5670,7 +8675,7 @@
         <p:spPr>
           <a:xfrm>
             <a:off x="640080" y="347472"/>
-            <a:ext cx="10972800" cy="320040"/>
+            <a:ext cx="10972800" cy="256032"/>
           </a:xfrm>
           <a:prstGeom prst="rect">
             <a:avLst/>
@@ -5683,16 +8688,14 @@
           </a:bodyPr>
           <a:lstStyle/>
           <a:p>
-            <a:pPr>
-              <a:defRPr sz="1200" b="1">
-                <a:solidFill>
-                  <a:srgbClr val="C5BBA8"/>
-                </a:solidFill>
-                <a:latin typeface="Calibri"/>
-              </a:defRPr>
-            </a:pPr>
-            <a:r>
-              <a:t>VERSUS VS CODE</a:t>
+            <a:r>
+              <a:rPr sz="1100" b="1">
+                <a:solidFill>
+                  <a:srgbClr val="8A7348"/>
+                </a:solidFill>
+                <a:latin typeface="Calibri"/>
+              </a:rPr>
+              <a:t>COMPARISON</a:t>
             </a:r>
           </a:p>
         </p:txBody>
@@ -5705,8 +8708,8 @@
         </p:nvSpPr>
         <p:spPr>
           <a:xfrm>
-            <a:off x="640080" y="658368"/>
-            <a:ext cx="10972800" cy="1051560"/>
+            <a:off x="640080" y="621792"/>
+            <a:ext cx="10972800" cy="822960"/>
           </a:xfrm>
           <a:prstGeom prst="rect">
             <a:avLst/>
@@ -5719,16 +8722,14 @@
           </a:bodyPr>
           <a:lstStyle/>
           <a:p>
-            <a:pPr>
-              <a:defRPr sz="3200" b="1">
-                <a:solidFill>
-                  <a:srgbClr val="FFFFFF"/>
-                </a:solidFill>
-                <a:latin typeface="Calibri"/>
-              </a:defRPr>
-            </a:pPr>
-            <a:r>
-              <a:t>Do not send configurators into an IDE to move a layout</a:t>
+            <a:r>
+              <a:rPr sz="2200" b="1">
+                <a:solidFill>
+                  <a:srgbClr val="1B365D"/>
+                </a:solidFill>
+                <a:latin typeface="Calibri"/>
+              </a:rPr>
+              <a:t>Positioning against tools already in the stack</a:t>
             </a:r>
           </a:p>
         </p:txBody>
@@ -5742,8 +8743,8 @@
           <p:nvPr/>
         </p:nvGraphicFramePr>
         <p:xfrm>
-          <a:off x="640080" y="1874519"/>
-          <a:ext cx="10881360" cy="4206240"/>
+          <a:off x="502920" y="1691640"/>
+          <a:ext cx="11155680" cy="4297680"/>
         </p:xfrm>
         <a:graphic>
           <a:graphicData uri="http://schemas.openxmlformats.org/drawingml/2006/table">
@@ -5752,29 +8753,21 @@
                 <a:tableStyleId>{5C22544A-7EE6-4342-B048-85BDC9FD1C3A}</a:tableStyleId>
               </a:tblPr>
               <a:tblGrid>
-                <a:gridCol w="2011680"/>
-                <a:gridCol w="4434840"/>
-                <a:gridCol w="4434840"/>
+                <a:gridCol w="1828800"/>
+                <a:gridCol w="3108960"/>
+                <a:gridCol w="3108960"/>
+                <a:gridCol w="3108960"/>
               </a:tblGrid>
-              <a:tr h="841248">
+              <a:tr h="859536">
                 <a:tc>
                   <a:txBody>
                     <a:bodyPr/>
                     <a:lstStyle/>
-                    <a:p>
-                      <a:pPr>
-                        <a:defRPr sz="1100" b="1">
-                          <a:solidFill>
-                            <a:srgbClr val="C5BBA8"/>
-                          </a:solidFill>
-                          <a:latin typeface="Calibri"/>
-                        </a:defRPr>
-                      </a:pPr>
-                    </a:p>
+                    <a:p/>
                   </a:txBody>
-                  <a:tcPr>
+                  <a:tcPr marL="73152" marR="73152" marT="54864" marB="54864">
                     <a:solidFill>
-                      <a:srgbClr val="1C212C"/>
+                      <a:srgbClr val="1B365D"/>
                     </a:solidFill>
                   </a:tcPr>
                 </a:tc>
@@ -5783,22 +8776,20 @@
                     <a:bodyPr/>
                     <a:lstStyle/>
                     <a:p>
-                      <a:pPr>
-                        <a:defRPr sz="1100" b="1">
+                      <a:r>
+                        <a:rPr sz="1000" b="1">
                           <a:solidFill>
-                            <a:srgbClr val="C5BBA8"/>
+                            <a:srgbClr val="FFFFFF"/>
                           </a:solidFill>
                           <a:latin typeface="Calibri"/>
-                        </a:defRPr>
-                      </a:pPr>
-                      <a:r>
-                        <a:t>VS Code + Salesforce CLI</a:t>
+                        </a:rPr>
+                        <a:t>Workbench</a:t>
                       </a:r>
                     </a:p>
                   </a:txBody>
-                  <a:tcPr>
+                  <a:tcPr marL="73152" marR="73152" marT="54864" marB="54864">
                     <a:solidFill>
-                      <a:srgbClr val="1C212C"/>
+                      <a:srgbClr val="1B365D"/>
                     </a:solidFill>
                   </a:tcPr>
                 </a:tc>
@@ -5807,48 +8798,20 @@
                     <a:bodyPr/>
                     <a:lstStyle/>
                     <a:p>
-                      <a:pPr>
-                        <a:defRPr sz="1100" b="1">
+                      <a:r>
+                        <a:rPr sz="1000" b="1">
                           <a:solidFill>
-                            <a:srgbClr val="C5BBA8"/>
+                            <a:srgbClr val="FFFFFF"/>
                           </a:solidFill>
                           <a:latin typeface="Calibri"/>
-                        </a:defRPr>
-                      </a:pPr>
-                      <a:r>
-                        <a:t>OrgFlow</a:t>
+                        </a:rPr>
+                        <a:t>VS Code and Salesforce CLI</a:t>
                       </a:r>
                     </a:p>
                   </a:txBody>
-                  <a:tcPr>
+                  <a:tcPr marL="73152" marR="73152" marT="54864" marB="54864">
                     <a:solidFill>
-                      <a:srgbClr val="1C212C"/>
-                    </a:solidFill>
-                  </a:tcPr>
-                </a:tc>
-              </a:tr>
-              <a:tr h="841248">
-                <a:tc>
-                  <a:txBody>
-                    <a:bodyPr/>
-                    <a:lstStyle/>
-                    <a:p>
-                      <a:pPr>
-                        <a:defRPr sz="1200" b="0">
-                          <a:solidFill>
-                            <a:srgbClr val="E6E4DE"/>
-                          </a:solidFill>
-                          <a:latin typeface="Calibri"/>
-                        </a:defRPr>
-                      </a:pPr>
-                      <a:r>
-                        <a:t>Staffing</a:t>
-                      </a:r>
-                    </a:p>
-                  </a:txBody>
-                  <a:tcPr>
-                    <a:solidFill>
-                      <a:srgbClr val="1C212C"/>
+                      <a:srgbClr val="1B365D"/>
                     </a:solidFill>
                   </a:tcPr>
                 </a:tc>
@@ -5857,22 +8820,44 @@
                     <a:bodyPr/>
                     <a:lstStyle/>
                     <a:p>
-                      <a:pPr>
-                        <a:defRPr sz="1200" b="0">
+                      <a:r>
+                        <a:rPr sz="1000" b="1">
                           <a:solidFill>
-                            <a:srgbClr val="E6E4DE"/>
+                            <a:srgbClr val="FFFFFF"/>
                           </a:solidFill>
                           <a:latin typeface="Calibri"/>
-                        </a:defRPr>
-                      </a:pPr>
-                      <a:r>
-                        <a:t>Developers and technical admins. Scratch orgs, source, CI.</a:t>
+                        </a:rPr>
+                        <a:t>OrgFlow</a:t>
                       </a:r>
                     </a:p>
                   </a:txBody>
-                  <a:tcPr>
+                  <a:tcPr marL="73152" marR="73152" marT="54864" marB="54864">
                     <a:solidFill>
-                      <a:srgbClr val="1C212C"/>
+                      <a:srgbClr val="1B365D"/>
+                    </a:solidFill>
+                  </a:tcPr>
+                </a:tc>
+              </a:tr>
+              <a:tr h="859536">
+                <a:tc>
+                  <a:txBody>
+                    <a:bodyPr/>
+                    <a:lstStyle/>
+                    <a:p>
+                      <a:r>
+                        <a:rPr sz="1100" b="1">
+                          <a:solidFill>
+                            <a:srgbClr val="1B365D"/>
+                          </a:solidFill>
+                          <a:latin typeface="Calibri"/>
+                        </a:rPr>
+                        <a:t>Primary job</a:t>
+                      </a:r>
+                    </a:p>
+                  </a:txBody>
+                  <a:tcPr marL="73152" marR="73152" marT="54864" marB="54864">
+                    <a:solidFill>
+                      <a:srgbClr val="FFFFFF"/>
                     </a:solidFill>
                   </a:tcPr>
                 </a:tc>
@@ -5881,48 +8866,20 @@
                     <a:bodyPr/>
                     <a:lstStyle/>
                     <a:p>
-                      <a:pPr>
-                        <a:defRPr sz="1200" b="0">
+                      <a:r>
+                        <a:rPr sz="1100" b="0">
                           <a:solidFill>
-                            <a:srgbClr val="E6E4DE"/>
+                            <a:srgbClr val="3D4450"/>
                           </a:solidFill>
                           <a:latin typeface="Calibri"/>
-                        </a:defRPr>
-                      </a:pPr>
-                      <a:r>
-                        <a:t>Configurators who work in Setup all day.</a:t>
+                        </a:rPr>
+                        <a:t>API console for a prepared retrieve or deploy zip</a:t>
                       </a:r>
                     </a:p>
                   </a:txBody>
-                  <a:tcPr>
+                  <a:tcPr marL="73152" marR="73152" marT="54864" marB="54864">
                     <a:solidFill>
-                      <a:srgbClr val="1C212C"/>
-                    </a:solidFill>
-                  </a:tcPr>
-                </a:tc>
-              </a:tr>
-              <a:tr h="841248">
-                <a:tc>
-                  <a:txBody>
-                    <a:bodyPr/>
-                    <a:lstStyle/>
-                    <a:p>
-                      <a:pPr>
-                        <a:defRPr sz="1200" b="0">
-                          <a:solidFill>
-                            <a:srgbClr val="E6E4DE"/>
-                          </a:solidFill>
-                          <a:latin typeface="Calibri"/>
-                        </a:defRPr>
-                      </a:pPr>
-                      <a:r>
-                        <a:t>Onboarding</a:t>
-                      </a:r>
-                    </a:p>
-                  </a:txBody>
-                  <a:tcPr>
-                    <a:solidFill>
-                      <a:srgbClr val="1C212C"/>
+                      <a:srgbClr val="FFFFFF"/>
                     </a:solidFill>
                   </a:tcPr>
                 </a:tc>
@@ -5931,22 +8888,20 @@
                     <a:bodyPr/>
                     <a:lstStyle/>
                     <a:p>
-                      <a:pPr>
-                        <a:defRPr sz="1200" b="0">
+                      <a:r>
+                        <a:rPr sz="1100" b="0">
                           <a:solidFill>
-                            <a:srgbClr val="E6E4DE"/>
+                            <a:srgbClr val="3D4450"/>
                           </a:solidFill>
                           <a:latin typeface="Calibri"/>
-                        </a:defRPr>
-                      </a:pPr>
-                      <a:r>
-                        <a:t>Authorize an org, create a DX project, learn retrieve/deploy.</a:t>
+                        </a:rPr>
+                        <a:t>Source-driven development and CI</a:t>
                       </a:r>
                     </a:p>
                   </a:txBody>
-                  <a:tcPr>
+                  <a:tcPr marL="73152" marR="73152" marT="54864" marB="54864">
                     <a:solidFill>
-                      <a:srgbClr val="1C212C"/>
+                      <a:srgbClr val="FFFFFF"/>
                     </a:solidFill>
                   </a:tcPr>
                 </a:tc>
@@ -5955,48 +8910,44 @@
                     <a:bodyPr/>
                     <a:lstStyle/>
                     <a:p>
-                      <a:pPr>
-                        <a:defRPr sz="1200" b="0">
+                      <a:r>
+                        <a:rPr sz="1100" b="0">
                           <a:solidFill>
-                            <a:srgbClr val="E6E4DE"/>
+                            <a:srgbClr val="3D4450"/>
                           </a:solidFill>
                           <a:latin typeface="Calibri"/>
-                        </a:defRPr>
-                      </a:pPr>
-                      <a:r>
-                        <a:t>Install a Chrome extension. Detect orgs. Follow Next.</a:t>
+                        </a:rPr>
+                        <a:t>Administrator-led promotion of named configuration</a:t>
                       </a:r>
                     </a:p>
                   </a:txBody>
-                  <a:tcPr>
+                  <a:tcPr marL="73152" marR="73152" marT="54864" marB="54864">
                     <a:solidFill>
-                      <a:srgbClr val="1C212C"/>
+                      <a:srgbClr val="FFFFFF"/>
                     </a:solidFill>
                   </a:tcPr>
                 </a:tc>
               </a:tr>
-              <a:tr h="841248">
+              <a:tr h="859536">
                 <a:tc>
                   <a:txBody>
                     <a:bodyPr/>
                     <a:lstStyle/>
                     <a:p>
-                      <a:pPr>
-                        <a:defRPr sz="1200" b="0">
+                      <a:r>
+                        <a:rPr sz="1100" b="1">
                           <a:solidFill>
-                            <a:srgbClr val="E6E4DE"/>
+                            <a:srgbClr val="1B365D"/>
                           </a:solidFill>
                           <a:latin typeface="Calibri"/>
-                        </a:defRPr>
-                      </a:pPr>
-                      <a:r>
-                        <a:t>System of record</a:t>
+                        </a:rPr>
+                        <a:t>Skill required</a:t>
                       </a:r>
                     </a:p>
                   </a:txBody>
-                  <a:tcPr>
+                  <a:tcPr marL="73152" marR="73152" marT="54864" marB="54864">
                     <a:solidFill>
-                      <a:srgbClr val="1C212C"/>
+                      <a:srgbClr val="F4F6F9"/>
                     </a:solidFill>
                   </a:tcPr>
                 </a:tc>
@@ -6005,22 +8956,20 @@
                     <a:bodyPr/>
                     <a:lstStyle/>
                     <a:p>
-                      <a:pPr>
-                        <a:defRPr sz="1200" b="0">
+                      <a:r>
+                        <a:rPr sz="1100" b="0">
                           <a:solidFill>
-                            <a:srgbClr val="E6E4DE"/>
+                            <a:srgbClr val="3D4450"/>
                           </a:solidFill>
                           <a:latin typeface="Calibri"/>
-                        </a:defRPr>
-                      </a:pPr>
-                      <a:r>
-                        <a:t>The Git repo is the product. Correct for engineering.</a:t>
+                        </a:rPr>
+                        <a:t>Metadata API and package.xml</a:t>
                       </a:r>
                     </a:p>
                   </a:txBody>
-                  <a:tcPr>
+                  <a:tcPr marL="73152" marR="73152" marT="54864" marB="54864">
                     <a:solidFill>
-                      <a:srgbClr val="1C212C"/>
+                      <a:srgbClr val="F4F6F9"/>
                     </a:solidFill>
                   </a:tcPr>
                 </a:tc>
@@ -6029,48 +8978,20 @@
                     <a:bodyPr/>
                     <a:lstStyle/>
                     <a:p>
-                      <a:pPr>
-                        <a:defRPr sz="1200" b="0">
+                      <a:r>
+                        <a:rPr sz="1100" b="0">
                           <a:solidFill>
-                            <a:srgbClr val="E6E4DE"/>
+                            <a:srgbClr val="3D4450"/>
                           </a:solidFill>
                           <a:latin typeface="Calibri"/>
-                        </a:defRPr>
-                      </a:pPr>
-                      <a:r>
-                        <a:t>Git is optional. A shared repo is a later decision, not a gate.</a:t>
+                        </a:rPr>
+                        <a:t>DX project, authorize, retrieve, deploy</a:t>
                       </a:r>
                     </a:p>
                   </a:txBody>
-                  <a:tcPr>
+                  <a:tcPr marL="73152" marR="73152" marT="54864" marB="54864">
                     <a:solidFill>
-                      <a:srgbClr val="1C212C"/>
-                    </a:solidFill>
-                  </a:tcPr>
-                </a:tc>
-              </a:tr>
-              <a:tr h="841248">
-                <a:tc>
-                  <a:txBody>
-                    <a:bodyPr/>
-                    <a:lstStyle/>
-                    <a:p>
-                      <a:pPr>
-                        <a:defRPr sz="1200" b="0">
-                          <a:solidFill>
-                            <a:srgbClr val="E6E4DE"/>
-                          </a:solidFill>
-                          <a:latin typeface="Calibri"/>
-                        </a:defRPr>
-                      </a:pPr>
-                      <a:r>
-                        <a:t>Small change</a:t>
-                      </a:r>
-                    </a:p>
-                  </a:txBody>
-                  <a:tcPr>
-                    <a:solidFill>
-                      <a:srgbClr val="1C212C"/>
+                      <a:srgbClr val="F4F6F9"/>
                     </a:solidFill>
                   </a:tcPr>
                 </a:tc>
@@ -6079,22 +9000,44 @@
                     <a:bodyPr/>
                     <a:lstStyle/>
                     <a:p>
-                      <a:pPr>
-                        <a:defRPr sz="1200" b="0">
+                      <a:r>
+                        <a:rPr sz="1100" b="0">
                           <a:solidFill>
-                            <a:srgbClr val="E6E4DE"/>
+                            <a:srgbClr val="3D4450"/>
                           </a:solidFill>
                           <a:latin typeface="Calibri"/>
-                        </a:defRPr>
-                      </a:pPr>
-                      <a:r>
-                        <a:t>Worth it for Apex and LWC. Overhead for one field and a layout.</a:t>
+                        </a:rPr>
+                        <a:t>Salesforce Setup and a Chrome sign-in</a:t>
                       </a:r>
                     </a:p>
                   </a:txBody>
-                  <a:tcPr>
+                  <a:tcPr marL="73152" marR="73152" marT="54864" marB="54864">
                     <a:solidFill>
-                      <a:srgbClr val="1C212C"/>
+                      <a:srgbClr val="F4F6F9"/>
+                    </a:solidFill>
+                  </a:tcPr>
+                </a:tc>
+              </a:tr>
+              <a:tr h="859536">
+                <a:tc>
+                  <a:txBody>
+                    <a:bodyPr/>
+                    <a:lstStyle/>
+                    <a:p>
+                      <a:r>
+                        <a:rPr sz="1100" b="1">
+                          <a:solidFill>
+                            <a:srgbClr val="1B365D"/>
+                          </a:solidFill>
+                          <a:latin typeface="Calibri"/>
+                        </a:rPr>
+                        <a:t>Repeatability</a:t>
+                      </a:r>
+                    </a:p>
+                  </a:txBody>
+                  <a:tcPr marL="73152" marR="73152" marT="54864" marB="54864">
+                    <a:solidFill>
+                      <a:srgbClr val="FFFFFF"/>
                     </a:solidFill>
                   </a:tcPr>
                 </a:tc>
@@ -6103,22 +9046,154 @@
                     <a:bodyPr/>
                     <a:lstStyle/>
                     <a:p>
-                      <a:pPr>
-                        <a:defRPr sz="1200" b="0">
+                      <a:r>
+                        <a:rPr sz="1100" b="0">
                           <a:solidFill>
-                            <a:srgbClr val="E6E4DE"/>
+                            <a:srgbClr val="3D4450"/>
                           </a:solidFill>
                           <a:latin typeface="Calibri"/>
-                        </a:defRPr>
-                      </a:pPr>
-                      <a:r>
-                        <a:t>Built for that small change.</a:t>
+                        </a:rPr>
+                        <a:t>Each organization is a new session</a:t>
                       </a:r>
                     </a:p>
                   </a:txBody>
-                  <a:tcPr>
+                  <a:tcPr marL="73152" marR="73152" marT="54864" marB="54864">
                     <a:solidFill>
-                      <a:srgbClr val="1C212C"/>
+                      <a:srgbClr val="FFFFFF"/>
+                    </a:solidFill>
+                  </a:tcPr>
+                </a:tc>
+                <a:tc>
+                  <a:txBody>
+                    <a:bodyPr/>
+                    <a:lstStyle/>
+                    <a:p>
+                      <a:r>
+                        <a:rPr sz="1100" b="0">
+                          <a:solidFill>
+                            <a:srgbClr val="3D4450"/>
+                          </a:solidFill>
+                          <a:latin typeface="Calibri"/>
+                        </a:rPr>
+                        <a:t>Repository is the system of record</a:t>
+                      </a:r>
+                    </a:p>
+                  </a:txBody>
+                  <a:tcPr marL="73152" marR="73152" marT="54864" marB="54864">
+                    <a:solidFill>
+                      <a:srgbClr val="FFFFFF"/>
+                    </a:solidFill>
+                  </a:tcPr>
+                </a:tc>
+                <a:tc>
+                  <a:txBody>
+                    <a:bodyPr/>
+                    <a:lstStyle/>
+                    <a:p>
+                      <a:r>
+                        <a:rPr sz="1100" b="0">
+                          <a:solidFill>
+                            <a:srgbClr val="3D4450"/>
+                          </a:solidFill>
+                          <a:latin typeface="Calibri"/>
+                        </a:rPr>
+                        <a:t>One snapshot can move source → QA → production</a:t>
+                      </a:r>
+                    </a:p>
+                  </a:txBody>
+                  <a:tcPr marL="73152" marR="73152" marT="54864" marB="54864">
+                    <a:solidFill>
+                      <a:srgbClr val="FFFFFF"/>
+                    </a:solidFill>
+                  </a:tcPr>
+                </a:tc>
+              </a:tr>
+              <a:tr h="859536">
+                <a:tc>
+                  <a:txBody>
+                    <a:bodyPr/>
+                    <a:lstStyle/>
+                    <a:p>
+                      <a:r>
+                        <a:rPr sz="1100" b="1">
+                          <a:solidFill>
+                            <a:srgbClr val="1B365D"/>
+                          </a:solidFill>
+                          <a:latin typeface="Calibri"/>
+                        </a:rPr>
+                        <a:t>Oversight</a:t>
+                      </a:r>
+                    </a:p>
+                  </a:txBody>
+                  <a:tcPr marL="73152" marR="73152" marT="54864" marB="54864">
+                    <a:solidFill>
+                      <a:srgbClr val="F4F6F9"/>
+                    </a:solidFill>
+                  </a:tcPr>
+                </a:tc>
+                <a:tc>
+                  <a:txBody>
+                    <a:bodyPr/>
+                    <a:lstStyle/>
+                    <a:p>
+                      <a:r>
+                        <a:rPr sz="1100" b="0">
+                          <a:solidFill>
+                            <a:srgbClr val="3D4450"/>
+                          </a:solidFill>
+                          <a:latin typeface="Calibri"/>
+                        </a:rPr>
+                        <a:t>No enforced source and target pair</a:t>
+                      </a:r>
+                    </a:p>
+                  </a:txBody>
+                  <a:tcPr marL="73152" marR="73152" marT="54864" marB="54864">
+                    <a:solidFill>
+                      <a:srgbClr val="F4F6F9"/>
+                    </a:solidFill>
+                  </a:tcPr>
+                </a:tc>
+                <a:tc>
+                  <a:txBody>
+                    <a:bodyPr/>
+                    <a:lstStyle/>
+                    <a:p>
+                      <a:r>
+                        <a:rPr sz="1100" b="0">
+                          <a:solidFill>
+                            <a:srgbClr val="3D4450"/>
+                          </a:solidFill>
+                          <a:latin typeface="Calibri"/>
+                        </a:rPr>
+                        <a:t>Governed by branch and pipeline policy</a:t>
+                      </a:r>
+                    </a:p>
+                  </a:txBody>
+                  <a:tcPr marL="73152" marR="73152" marT="54864" marB="54864">
+                    <a:solidFill>
+                      <a:srgbClr val="F4F6F9"/>
+                    </a:solidFill>
+                  </a:tcPr>
+                </a:tc>
+                <a:tc>
+                  <a:txBody>
+                    <a:bodyPr/>
+                    <a:lstStyle/>
+                    <a:p>
+                      <a:r>
+                        <a:rPr sz="1100" b="0">
+                          <a:solidFill>
+                            <a:srgbClr val="3D4450"/>
+                          </a:solidFill>
+                          <a:latin typeface="Calibri"/>
+                        </a:rPr>
+                        <a:t>Source and target must differ; confirmation precedes deploy</a:t>
+                      </a:r>
+                    </a:p>
+                  </a:txBody>
+                  <a:tcPr marL="73152" marR="73152" marT="54864" marB="54864">
+                    <a:solidFill>
+                      <a:srgbClr val="F4F6F9"/>
                     </a:solidFill>
                   </a:tcPr>
                 </a:tc>
@@ -6127,6 +9202,161 @@
           </a:graphicData>
         </a:graphic>
       </p:graphicFrame>
+      <p:sp>
+        <p:nvSpPr>
+          <p:cNvPr id="6" name="Rectangle 5"/>
+          <p:cNvSpPr/>
+          <p:nvPr/>
+        </p:nvSpPr>
+        <p:spPr>
+          <a:xfrm>
+            <a:off x="0" y="6537960"/>
+            <a:ext cx="12191695" cy="320040"/>
+          </a:xfrm>
+          <a:prstGeom prst="rect">
+            <a:avLst/>
+          </a:prstGeom>
+          <a:solidFill>
+            <a:srgbClr val="FFFFFF"/>
+          </a:solidFill>
+          <a:ln>
+            <a:noFill/>
+          </a:ln>
+        </p:spPr>
+        <p:style>
+          <a:lnRef idx="1">
+            <a:schemeClr val="accent1"/>
+          </a:lnRef>
+          <a:fillRef idx="3">
+            <a:schemeClr val="accent1"/>
+          </a:fillRef>
+          <a:effectRef idx="2">
+            <a:schemeClr val="accent1"/>
+          </a:effectRef>
+          <a:fontRef idx="minor">
+            <a:schemeClr val="lt1"/>
+          </a:fontRef>
+        </p:style>
+        <p:txBody>
+          <a:bodyPr rtlCol="0" anchor="ctr"/>
+          <a:lstStyle/>
+          <a:p>
+            <a:pPr algn="ctr"/>
+          </a:p>
+        </p:txBody>
+      </p:sp>
+      <p:sp>
+        <p:nvSpPr>
+          <p:cNvPr id="7" name="Rectangle 6"/>
+          <p:cNvSpPr/>
+          <p:nvPr/>
+        </p:nvSpPr>
+        <p:spPr>
+          <a:xfrm>
+            <a:off x="0" y="6537960"/>
+            <a:ext cx="12191695" cy="12700"/>
+          </a:xfrm>
+          <a:prstGeom prst="rect">
+            <a:avLst/>
+          </a:prstGeom>
+          <a:solidFill>
+            <a:srgbClr val="D8DEE6"/>
+          </a:solidFill>
+          <a:ln>
+            <a:noFill/>
+          </a:ln>
+        </p:spPr>
+        <p:style>
+          <a:lnRef idx="1">
+            <a:schemeClr val="accent1"/>
+          </a:lnRef>
+          <a:fillRef idx="3">
+            <a:schemeClr val="accent1"/>
+          </a:fillRef>
+          <a:effectRef idx="2">
+            <a:schemeClr val="accent1"/>
+          </a:effectRef>
+          <a:fontRef idx="minor">
+            <a:schemeClr val="lt1"/>
+          </a:fontRef>
+        </p:style>
+        <p:txBody>
+          <a:bodyPr rtlCol="0" anchor="ctr"/>
+          <a:lstStyle/>
+          <a:p>
+            <a:pPr algn="ctr"/>
+          </a:p>
+        </p:txBody>
+      </p:sp>
+      <p:sp>
+        <p:nvSpPr>
+          <p:cNvPr id="8" name="TextBox 7"/>
+          <p:cNvSpPr txBox="1"/>
+          <p:nvPr/>
+        </p:nvSpPr>
+        <p:spPr>
+          <a:xfrm>
+            <a:off x="640080" y="6565392"/>
+            <a:ext cx="6400800" cy="256032"/>
+          </a:xfrm>
+          <a:prstGeom prst="rect">
+            <a:avLst/>
+          </a:prstGeom>
+          <a:noFill/>
+        </p:spPr>
+        <p:txBody>
+          <a:bodyPr wrap="square">
+            <a:spAutoFit/>
+          </a:bodyPr>
+          <a:lstStyle/>
+          <a:p>
+            <a:r>
+              <a:rPr sz="1100" b="0">
+                <a:solidFill>
+                  <a:srgbClr val="6B7280"/>
+                </a:solidFill>
+                <a:latin typeface="Calibri"/>
+              </a:rPr>
+              <a:t>OrgFlow  ·  Internal use</a:t>
+            </a:r>
+          </a:p>
+        </p:txBody>
+      </p:sp>
+      <p:sp>
+        <p:nvSpPr>
+          <p:cNvPr id="9" name="TextBox 8"/>
+          <p:cNvSpPr txBox="1"/>
+          <p:nvPr/>
+        </p:nvSpPr>
+        <p:spPr>
+          <a:xfrm>
+            <a:off x="9326880" y="6565392"/>
+            <a:ext cx="2194560" cy="256032"/>
+          </a:xfrm>
+          <a:prstGeom prst="rect">
+            <a:avLst/>
+          </a:prstGeom>
+          <a:noFill/>
+        </p:spPr>
+        <p:txBody>
+          <a:bodyPr wrap="none">
+            <a:spAutoFit/>
+          </a:bodyPr>
+          <a:lstStyle/>
+          <a:p>
+            <a:pPr algn="r"/>
+            <a:r>
+              <a:rPr sz="1100" b="0">
+                <a:solidFill>
+                  <a:srgbClr val="6B7280"/>
+                </a:solidFill>
+                <a:latin typeface="Calibri"/>
+              </a:rPr>
+              <a:t>7  /  11</a:t>
+            </a:r>
+          </a:p>
+        </p:txBody>
+      </p:sp>
     </p:spTree>
   </p:cSld>
   <p:clrMapOvr>
@@ -6160,7 +9390,7 @@
             <a:avLst/>
           </a:prstGeom>
           <a:solidFill>
-            <a:srgbClr val="12151C"/>
+            <a:srgbClr val="FFFFFF"/>
           </a:solidFill>
           <a:ln>
             <a:noFill/>
@@ -6197,7 +9427,7 @@
         <p:spPr>
           <a:xfrm>
             <a:off x="640080" y="347472"/>
-            <a:ext cx="10972800" cy="320040"/>
+            <a:ext cx="10972800" cy="256032"/>
           </a:xfrm>
           <a:prstGeom prst="rect">
             <a:avLst/>
@@ -6210,16 +9440,14 @@
           </a:bodyPr>
           <a:lstStyle/>
           <a:p>
-            <a:pPr>
-              <a:defRPr sz="1200" b="1">
-                <a:solidFill>
-                  <a:srgbClr val="C5BBA8"/>
-                </a:solidFill>
-                <a:latin typeface="Calibri"/>
-              </a:defRPr>
-            </a:pPr>
-            <a:r>
-              <a:t>VERSUS TOOLS YOU MAY ALREADY PAY FOR</a:t>
+            <a:r>
+              <a:rPr sz="1100" b="1">
+                <a:solidFill>
+                  <a:srgbClr val="8A7348"/>
+                </a:solidFill>
+                <a:latin typeface="Calibri"/>
+              </a:rPr>
+              <a:t>COMPARISON</a:t>
             </a:r>
           </a:p>
         </p:txBody>
@@ -6232,8 +9460,8 @@
         </p:nvSpPr>
         <p:spPr>
           <a:xfrm>
-            <a:off x="640080" y="658368"/>
-            <a:ext cx="10972800" cy="1051560"/>
+            <a:off x="640080" y="621792"/>
+            <a:ext cx="10972800" cy="822960"/>
           </a:xfrm>
           <a:prstGeom prst="rect">
             <a:avLst/>
@@ -6246,41 +9474,37 @@
           </a:bodyPr>
           <a:lstStyle/>
           <a:p>
-            <a:pPr>
-              <a:defRPr sz="3200" b="1">
-                <a:solidFill>
-                  <a:srgbClr val="FFFFFF"/>
-                </a:solidFill>
-                <a:latin typeface="Calibri"/>
-              </a:defRPr>
-            </a:pPr>
-            <a:r>
-              <a:t>Complement, do not rip and replace</a:t>
-            </a:r>
-          </a:p>
-        </p:txBody>
-      </p:sp>
-      <p:sp>
-        <p:nvSpPr>
-          <p:cNvPr id="5" name="Rounded Rectangle 4"/>
+            <a:r>
+              <a:rPr sz="2200" b="1">
+                <a:solidFill>
+                  <a:srgbClr val="1B365D"/>
+                </a:solidFill>
+                <a:latin typeface="Calibri"/>
+              </a:rPr>
+              <a:t>Change sets and enterprise DevOps platforms</a:t>
+            </a:r>
+          </a:p>
+        </p:txBody>
+      </p:sp>
+      <p:sp>
+        <p:nvSpPr>
+          <p:cNvPr id="5" name="Rectangle 4"/>
           <p:cNvSpPr/>
           <p:nvPr/>
         </p:nvSpPr>
         <p:spPr>
           <a:xfrm>
-            <a:off x="640080" y="1874519"/>
-            <a:ext cx="5303520" cy="1920240"/>
-          </a:xfrm>
-          <a:prstGeom prst="roundRect">
+            <a:off x="640080" y="1645920"/>
+            <a:ext cx="5349240" cy="54864"/>
+          </a:xfrm>
+          <a:prstGeom prst="rect">
             <a:avLst/>
           </a:prstGeom>
           <a:solidFill>
-            <a:srgbClr val="1C212C"/>
+            <a:srgbClr val="1B365D"/>
           </a:solidFill>
           <a:ln>
-            <a:solidFill>
-              <a:srgbClr val="3A3F4A"/>
-            </a:solidFill>
+            <a:noFill/>
           </a:ln>
         </p:spPr>
         <p:style>
@@ -6298,60 +9522,32 @@
           </a:fontRef>
         </p:style>
         <p:txBody>
-          <a:bodyPr rtlCol="0" anchor="ctr" wrap="square" lIns="146304" rIns="146304" tIns="109728"/>
-          <a:lstStyle/>
-          <a:p>
-            <a:pPr algn="ctr">
-              <a:defRPr sz="1600" b="1">
-                <a:solidFill>
-                  <a:srgbClr val="FFFFFF"/>
-                </a:solidFill>
-                <a:latin typeface="Calibri"/>
-              </a:defRPr>
-            </a:pPr>
-            <a:r>
-              <a:t>Change Sets</a:t>
-            </a:r>
-          </a:p>
-          <a:p>
-            <a:pPr>
-              <a:spcBef>
-                <a:spcPts val="800"/>
-              </a:spcBef>
-              <a:defRPr sz="1300">
-                <a:solidFill>
-                  <a:srgbClr val="8F96A3"/>
-                </a:solidFill>
-                <a:latin typeface="Calibri"/>
-              </a:defRPr>
-            </a:pPr>
-            <a:r>
-              <a:t>Slow, easy to miss a dependency, awkward to reuse. OrgFlow is a named list, one hop, result on the same screen.</a:t>
-            </a:r>
-          </a:p>
-        </p:txBody>
-      </p:sp>
-      <p:sp>
-        <p:nvSpPr>
-          <p:cNvPr id="6" name="Rounded Rectangle 5"/>
+          <a:bodyPr rtlCol="0" anchor="ctr"/>
+          <a:lstStyle/>
+          <a:p>
+            <a:pPr algn="ctr"/>
+          </a:p>
+        </p:txBody>
+      </p:sp>
+      <p:sp>
+        <p:nvSpPr>
+          <p:cNvPr id="6" name="Rectangle 5"/>
           <p:cNvSpPr/>
           <p:nvPr/>
         </p:nvSpPr>
         <p:spPr>
           <a:xfrm>
-            <a:off x="6217920" y="1874519"/>
-            <a:ext cx="5303520" cy="1920240"/>
-          </a:xfrm>
-          <a:prstGeom prst="roundRect">
+            <a:off x="640080" y="1700784"/>
+            <a:ext cx="5349240" cy="2093976"/>
+          </a:xfrm>
+          <a:prstGeom prst="rect">
             <a:avLst/>
           </a:prstGeom>
           <a:solidFill>
-            <a:srgbClr val="1C212C"/>
+            <a:srgbClr val="F4F6F9"/>
           </a:solidFill>
           <a:ln>
-            <a:solidFill>
-              <a:srgbClr val="3A3F4A"/>
-            </a:solidFill>
+            <a:noFill/>
           </a:ln>
         </p:spPr>
         <p:style>
@@ -6369,60 +9565,105 @@
           </a:fontRef>
         </p:style>
         <p:txBody>
-          <a:bodyPr rtlCol="0" anchor="ctr" wrap="square" lIns="146304" rIns="146304" tIns="109728"/>
-          <a:lstStyle/>
-          <a:p>
-            <a:pPr algn="ctr">
-              <a:defRPr sz="1600" b="1">
-                <a:solidFill>
-                  <a:srgbClr val="FFFFFF"/>
-                </a:solidFill>
-                <a:latin typeface="Calibri"/>
-              </a:defRPr>
+          <a:bodyPr rtlCol="0" anchor="ctr"/>
+          <a:lstStyle/>
+          <a:p>
+            <a:pPr algn="ctr"/>
+          </a:p>
+        </p:txBody>
+      </p:sp>
+      <p:sp>
+        <p:nvSpPr>
+          <p:cNvPr id="7" name="TextBox 6"/>
+          <p:cNvSpPr txBox="1"/>
+          <p:nvPr/>
+        </p:nvSpPr>
+        <p:spPr>
+          <a:xfrm>
+            <a:off x="786384" y="1792224"/>
+            <a:ext cx="5056632" cy="329184"/>
+          </a:xfrm>
+          <a:prstGeom prst="rect">
+            <a:avLst/>
+          </a:prstGeom>
+          <a:noFill/>
+        </p:spPr>
+        <p:txBody>
+          <a:bodyPr wrap="square">
+            <a:spAutoFit/>
+          </a:bodyPr>
+          <a:lstStyle/>
+          <a:p>
+            <a:r>
+              <a:rPr sz="1400" b="1">
+                <a:solidFill>
+                  <a:srgbClr val="1B365D"/>
+                </a:solidFill>
+                <a:latin typeface="Calibri"/>
+              </a:rPr>
+              <a:t>Change sets</a:t>
+            </a:r>
+          </a:p>
+        </p:txBody>
+      </p:sp>
+      <p:sp>
+        <p:nvSpPr>
+          <p:cNvPr id="8" name="TextBox 7"/>
+          <p:cNvSpPr txBox="1"/>
+          <p:nvPr/>
+        </p:nvSpPr>
+        <p:spPr>
+          <a:xfrm>
+            <a:off x="786384" y="2121408"/>
+            <a:ext cx="5056632" cy="1527048"/>
+          </a:xfrm>
+          <a:prstGeom prst="rect">
+            <a:avLst/>
+          </a:prstGeom>
+          <a:noFill/>
+        </p:spPr>
+        <p:txBody>
+          <a:bodyPr wrap="square">
+            <a:spAutoFit/>
+          </a:bodyPr>
+          <a:lstStyle/>
+          <a:p>
+            <a:pPr>
+              <a:spcAft>
+                <a:spcPts val="600"/>
+              </a:spcAft>
             </a:pPr>
             <a:r>
-              <a:t>Copado / Gearset / Flosum</a:t>
-            </a:r>
-          </a:p>
-          <a:p>
-            <a:pPr>
-              <a:spcBef>
-                <a:spcPts val="800"/>
-              </a:spcBef>
-              <a:defRPr sz="1300">
-                <a:solidFill>
-                  <a:srgbClr val="8F96A3"/>
-                </a:solidFill>
-                <a:latin typeface="Calibri"/>
-              </a:defRPr>
-            </a:pPr>
-            <a:r>
-              <a:t>Right for release trains and compliance programs. Wrong as the only way to send two fields to QA. OrgFlow sits beside those platforms.</a:t>
-            </a:r>
-          </a:p>
-        </p:txBody>
-      </p:sp>
-      <p:sp>
-        <p:nvSpPr>
-          <p:cNvPr id="7" name="Rounded Rectangle 6"/>
+              <a:rPr sz="1300" b="0">
+                <a:solidFill>
+                  <a:srgbClr val="3D4450"/>
+                </a:solidFill>
+                <a:latin typeface="Calibri"/>
+              </a:rPr>
+              <a:t>Effective for occasional, well-known components. Slow to assemble, easy to omit a related item, and inconvenient to reuse. OrgFlow keeps a single named list and a single snapshot.</a:t>
+            </a:r>
+          </a:p>
+        </p:txBody>
+      </p:sp>
+      <p:sp>
+        <p:nvSpPr>
+          <p:cNvPr id="9" name="Rectangle 8"/>
           <p:cNvSpPr/>
           <p:nvPr/>
         </p:nvSpPr>
         <p:spPr>
           <a:xfrm>
-            <a:off x="640080" y="3977639"/>
-            <a:ext cx="5303520" cy="1920240"/>
-          </a:xfrm>
-          <a:prstGeom prst="roundRect">
+            <a:off x="6217920" y="1645920"/>
+            <a:ext cx="5349240" cy="54864"/>
+          </a:xfrm>
+          <a:prstGeom prst="rect">
             <a:avLst/>
           </a:prstGeom>
           <a:solidFill>
-            <a:srgbClr val="1C212C"/>
+            <a:srgbClr val="1B365D"/>
           </a:solidFill>
           <a:ln>
-            <a:solidFill>
-              <a:srgbClr val="3A3F4A"/>
-            </a:solidFill>
+            <a:noFill/>
           </a:ln>
         </p:spPr>
         <p:style>
@@ -6440,60 +9681,32 @@
           </a:fontRef>
         </p:style>
         <p:txBody>
-          <a:bodyPr rtlCol="0" anchor="ctr" wrap="square" lIns="146304" rIns="146304" tIns="109728"/>
-          <a:lstStyle/>
-          <a:p>
-            <a:pPr algn="ctr">
-              <a:defRPr sz="1600" b="1">
-                <a:solidFill>
-                  <a:srgbClr val="FFFFFF"/>
-                </a:solidFill>
-                <a:latin typeface="Calibri"/>
-              </a:defRPr>
-            </a:pPr>
-            <a:r>
-              <a:t>Git-only process</a:t>
-            </a:r>
-          </a:p>
-          <a:p>
-            <a:pPr>
-              <a:spcBef>
-                <a:spcPts val="800"/>
-              </a:spcBef>
-              <a:defRPr sz="1300">
-                <a:solidFill>
-                  <a:srgbClr val="8F96A3"/>
-                </a:solidFill>
-                <a:latin typeface="Calibri"/>
-              </a:defRPr>
-            </a:pPr>
-            <a:r>
-              <a:t>A repo without a simple picker still requires a developer. OrgFlow can write versions into GitHub, GitLab, or Azure after members are chosen.</a:t>
-            </a:r>
-          </a:p>
-        </p:txBody>
-      </p:sp>
-      <p:sp>
-        <p:nvSpPr>
-          <p:cNvPr id="8" name="Rounded Rectangle 7"/>
+          <a:bodyPr rtlCol="0" anchor="ctr"/>
+          <a:lstStyle/>
+          <a:p>
+            <a:pPr algn="ctr"/>
+          </a:p>
+        </p:txBody>
+      </p:sp>
+      <p:sp>
+        <p:nvSpPr>
+          <p:cNvPr id="10" name="Rectangle 9"/>
           <p:cNvSpPr/>
           <p:nvPr/>
         </p:nvSpPr>
         <p:spPr>
           <a:xfrm>
-            <a:off x="6217920" y="3977639"/>
-            <a:ext cx="5303520" cy="1920240"/>
-          </a:xfrm>
-          <a:prstGeom prst="roundRect">
+            <a:off x="6217920" y="1700784"/>
+            <a:ext cx="5349240" cy="2093976"/>
+          </a:xfrm>
+          <a:prstGeom prst="rect">
             <a:avLst/>
           </a:prstGeom>
           <a:solidFill>
-            <a:srgbClr val="1C212C"/>
+            <a:srgbClr val="F4F6F9"/>
           </a:solidFill>
           <a:ln>
-            <a:solidFill>
-              <a:srgbClr val="3A3F4A"/>
-            </a:solidFill>
+            <a:noFill/>
           </a:ln>
         </p:spPr>
         <p:style>
@@ -6511,35 +9724,555 @@
           </a:fontRef>
         </p:style>
         <p:txBody>
-          <a:bodyPr rtlCol="0" anchor="ctr" wrap="square" lIns="146304" rIns="146304" tIns="109728"/>
-          <a:lstStyle/>
-          <a:p>
-            <a:pPr algn="ctr">
-              <a:defRPr sz="1600" b="1">
-                <a:solidFill>
-                  <a:srgbClr val="FFFFFF"/>
-                </a:solidFill>
-                <a:latin typeface="Calibri"/>
-              </a:defRPr>
+          <a:bodyPr rtlCol="0" anchor="ctr"/>
+          <a:lstStyle/>
+          <a:p>
+            <a:pPr algn="ctr"/>
+          </a:p>
+        </p:txBody>
+      </p:sp>
+      <p:sp>
+        <p:nvSpPr>
+          <p:cNvPr id="11" name="TextBox 10"/>
+          <p:cNvSpPr txBox="1"/>
+          <p:nvPr/>
+        </p:nvSpPr>
+        <p:spPr>
+          <a:xfrm>
+            <a:off x="6364224" y="1792224"/>
+            <a:ext cx="5056632" cy="329184"/>
+          </a:xfrm>
+          <a:prstGeom prst="rect">
+            <a:avLst/>
+          </a:prstGeom>
+          <a:noFill/>
+        </p:spPr>
+        <p:txBody>
+          <a:bodyPr wrap="square">
+            <a:spAutoFit/>
+          </a:bodyPr>
+          <a:lstStyle/>
+          <a:p>
+            <a:r>
+              <a:rPr sz="1400" b="1">
+                <a:solidFill>
+                  <a:srgbClr val="1B365D"/>
+                </a:solidFill>
+                <a:latin typeface="Calibri"/>
+              </a:rPr>
+              <a:t>Copado, Gearset, Flosum</a:t>
+            </a:r>
+          </a:p>
+        </p:txBody>
+      </p:sp>
+      <p:sp>
+        <p:nvSpPr>
+          <p:cNvPr id="12" name="TextBox 11"/>
+          <p:cNvSpPr txBox="1"/>
+          <p:nvPr/>
+        </p:nvSpPr>
+        <p:spPr>
+          <a:xfrm>
+            <a:off x="6364224" y="2121408"/>
+            <a:ext cx="5056632" cy="1527048"/>
+          </a:xfrm>
+          <a:prstGeom prst="rect">
+            <a:avLst/>
+          </a:prstGeom>
+          <a:noFill/>
+        </p:spPr>
+        <p:txBody>
+          <a:bodyPr wrap="square">
+            <a:spAutoFit/>
+          </a:bodyPr>
+          <a:lstStyle/>
+          <a:p>
+            <a:pPr>
+              <a:spcAft>
+                <a:spcPts val="600"/>
+              </a:spcAft>
             </a:pPr>
             <a:r>
-              <a:t>Explicit limits</a:t>
-            </a:r>
-          </a:p>
+              <a:rPr sz="1300" b="0">
+                <a:solidFill>
+                  <a:srgbClr val="3D4450"/>
+                </a:solidFill>
+                <a:latin typeface="Calibri"/>
+              </a:rPr>
+              <a:t>Appropriate for multi-team release trains, compliance, and broad org comparison. Disproportionate for a two-item configuration move. OrgFlow is intended to sit beside those platforms.</a:t>
+            </a:r>
+          </a:p>
+        </p:txBody>
+      </p:sp>
+      <p:sp>
+        <p:nvSpPr>
+          <p:cNvPr id="13" name="Rectangle 12"/>
+          <p:cNvSpPr/>
+          <p:nvPr/>
+        </p:nvSpPr>
+        <p:spPr>
+          <a:xfrm>
+            <a:off x="640080" y="3977639"/>
+            <a:ext cx="5349240" cy="54864"/>
+          </a:xfrm>
+          <a:prstGeom prst="rect">
+            <a:avLst/>
+          </a:prstGeom>
+          <a:solidFill>
+            <a:srgbClr val="1B365D"/>
+          </a:solidFill>
+          <a:ln>
+            <a:noFill/>
+          </a:ln>
+        </p:spPr>
+        <p:style>
+          <a:lnRef idx="1">
+            <a:schemeClr val="accent1"/>
+          </a:lnRef>
+          <a:fillRef idx="3">
+            <a:schemeClr val="accent1"/>
+          </a:fillRef>
+          <a:effectRef idx="2">
+            <a:schemeClr val="accent1"/>
+          </a:effectRef>
+          <a:fontRef idx="minor">
+            <a:schemeClr val="lt1"/>
+          </a:fontRef>
+        </p:style>
+        <p:txBody>
+          <a:bodyPr rtlCol="0" anchor="ctr"/>
+          <a:lstStyle/>
+          <a:p>
+            <a:pPr algn="ctr"/>
+          </a:p>
+        </p:txBody>
+      </p:sp>
+      <p:sp>
+        <p:nvSpPr>
+          <p:cNvPr id="14" name="Rectangle 13"/>
+          <p:cNvSpPr/>
+          <p:nvPr/>
+        </p:nvSpPr>
+        <p:spPr>
+          <a:xfrm>
+            <a:off x="640080" y="4032503"/>
+            <a:ext cx="5349240" cy="1956816"/>
+          </a:xfrm>
+          <a:prstGeom prst="rect">
+            <a:avLst/>
+          </a:prstGeom>
+          <a:solidFill>
+            <a:srgbClr val="F4F6F9"/>
+          </a:solidFill>
+          <a:ln>
+            <a:noFill/>
+          </a:ln>
+        </p:spPr>
+        <p:style>
+          <a:lnRef idx="1">
+            <a:schemeClr val="accent1"/>
+          </a:lnRef>
+          <a:fillRef idx="3">
+            <a:schemeClr val="accent1"/>
+          </a:fillRef>
+          <a:effectRef idx="2">
+            <a:schemeClr val="accent1"/>
+          </a:effectRef>
+          <a:fontRef idx="minor">
+            <a:schemeClr val="lt1"/>
+          </a:fontRef>
+        </p:style>
+        <p:txBody>
+          <a:bodyPr rtlCol="0" anchor="ctr"/>
+          <a:lstStyle/>
+          <a:p>
+            <a:pPr algn="ctr"/>
+          </a:p>
+        </p:txBody>
+      </p:sp>
+      <p:sp>
+        <p:nvSpPr>
+          <p:cNvPr id="15" name="TextBox 14"/>
+          <p:cNvSpPr txBox="1"/>
+          <p:nvPr/>
+        </p:nvSpPr>
+        <p:spPr>
+          <a:xfrm>
+            <a:off x="786384" y="4123943"/>
+            <a:ext cx="5056632" cy="329184"/>
+          </a:xfrm>
+          <a:prstGeom prst="rect">
+            <a:avLst/>
+          </a:prstGeom>
+          <a:noFill/>
+        </p:spPr>
+        <p:txBody>
+          <a:bodyPr wrap="square">
+            <a:spAutoFit/>
+          </a:bodyPr>
+          <a:lstStyle/>
+          <a:p>
+            <a:r>
+              <a:rPr sz="1400" b="1">
+                <a:solidFill>
+                  <a:srgbClr val="1B365D"/>
+                </a:solidFill>
+                <a:latin typeface="Calibri"/>
+              </a:rPr>
+              <a:t>Repository-only process</a:t>
+            </a:r>
+          </a:p>
+        </p:txBody>
+      </p:sp>
+      <p:sp>
+        <p:nvSpPr>
+          <p:cNvPr id="16" name="TextBox 15"/>
+          <p:cNvSpPr txBox="1"/>
+          <p:nvPr/>
+        </p:nvSpPr>
+        <p:spPr>
+          <a:xfrm>
+            <a:off x="786384" y="4453127"/>
+            <a:ext cx="5056632" cy="1389888"/>
+          </a:xfrm>
+          <a:prstGeom prst="rect">
+            <a:avLst/>
+          </a:prstGeom>
+          <a:noFill/>
+        </p:spPr>
+        <p:txBody>
+          <a:bodyPr wrap="square">
+            <a:spAutoFit/>
+          </a:bodyPr>
+          <a:lstStyle/>
           <a:p>
             <a:pPr>
-              <a:spcBef>
-                <a:spcPts val="800"/>
-              </a:spcBef>
-              <a:defRPr sz="1300">
-                <a:solidFill>
-                  <a:srgbClr val="8F96A3"/>
-                </a:solidFill>
-                <a:latin typeface="Calibri"/>
-              </a:defRPr>
+              <a:spcAft>
+                <a:spcPts val="600"/>
+              </a:spcAft>
             </a:pPr>
             <a:r>
-              <a:t>No data (records). No full-org compare. No automatic dependency graph. People promote what they selected, not what a scanner guessed.</a:t>
+              <a:rPr sz="1300" b="0">
+                <a:solidFill>
+                  <a:srgbClr val="3D4450"/>
+                </a:solidFill>
+                <a:latin typeface="Calibri"/>
+              </a:rPr>
+              <a:t>A Git repository without a selection interface still requires a developer. OrgFlow can write versioned snapshots to GitHub, GitLab, or Azure DevOps after components are selected.</a:t>
+            </a:r>
+          </a:p>
+        </p:txBody>
+      </p:sp>
+      <p:sp>
+        <p:nvSpPr>
+          <p:cNvPr id="17" name="Rectangle 16"/>
+          <p:cNvSpPr/>
+          <p:nvPr/>
+        </p:nvSpPr>
+        <p:spPr>
+          <a:xfrm>
+            <a:off x="6217920" y="3977639"/>
+            <a:ext cx="5349240" cy="54864"/>
+          </a:xfrm>
+          <a:prstGeom prst="rect">
+            <a:avLst/>
+          </a:prstGeom>
+          <a:solidFill>
+            <a:srgbClr val="1B365D"/>
+          </a:solidFill>
+          <a:ln>
+            <a:noFill/>
+          </a:ln>
+        </p:spPr>
+        <p:style>
+          <a:lnRef idx="1">
+            <a:schemeClr val="accent1"/>
+          </a:lnRef>
+          <a:fillRef idx="3">
+            <a:schemeClr val="accent1"/>
+          </a:fillRef>
+          <a:effectRef idx="2">
+            <a:schemeClr val="accent1"/>
+          </a:effectRef>
+          <a:fontRef idx="minor">
+            <a:schemeClr val="lt1"/>
+          </a:fontRef>
+        </p:style>
+        <p:txBody>
+          <a:bodyPr rtlCol="0" anchor="ctr"/>
+          <a:lstStyle/>
+          <a:p>
+            <a:pPr algn="ctr"/>
+          </a:p>
+        </p:txBody>
+      </p:sp>
+      <p:sp>
+        <p:nvSpPr>
+          <p:cNvPr id="18" name="Rectangle 17"/>
+          <p:cNvSpPr/>
+          <p:nvPr/>
+        </p:nvSpPr>
+        <p:spPr>
+          <a:xfrm>
+            <a:off x="6217920" y="4032503"/>
+            <a:ext cx="5349240" cy="1956816"/>
+          </a:xfrm>
+          <a:prstGeom prst="rect">
+            <a:avLst/>
+          </a:prstGeom>
+          <a:solidFill>
+            <a:srgbClr val="F4F6F9"/>
+          </a:solidFill>
+          <a:ln>
+            <a:noFill/>
+          </a:ln>
+        </p:spPr>
+        <p:style>
+          <a:lnRef idx="1">
+            <a:schemeClr val="accent1"/>
+          </a:lnRef>
+          <a:fillRef idx="3">
+            <a:schemeClr val="accent1"/>
+          </a:fillRef>
+          <a:effectRef idx="2">
+            <a:schemeClr val="accent1"/>
+          </a:effectRef>
+          <a:fontRef idx="minor">
+            <a:schemeClr val="lt1"/>
+          </a:fontRef>
+        </p:style>
+        <p:txBody>
+          <a:bodyPr rtlCol="0" anchor="ctr"/>
+          <a:lstStyle/>
+          <a:p>
+            <a:pPr algn="ctr"/>
+          </a:p>
+        </p:txBody>
+      </p:sp>
+      <p:sp>
+        <p:nvSpPr>
+          <p:cNvPr id="19" name="TextBox 18"/>
+          <p:cNvSpPr txBox="1"/>
+          <p:nvPr/>
+        </p:nvSpPr>
+        <p:spPr>
+          <a:xfrm>
+            <a:off x="6364224" y="4123943"/>
+            <a:ext cx="5056632" cy="329184"/>
+          </a:xfrm>
+          <a:prstGeom prst="rect">
+            <a:avLst/>
+          </a:prstGeom>
+          <a:noFill/>
+        </p:spPr>
+        <p:txBody>
+          <a:bodyPr wrap="square">
+            <a:spAutoFit/>
+          </a:bodyPr>
+          <a:lstStyle/>
+          <a:p>
+            <a:r>
+              <a:rPr sz="1400" b="1">
+                <a:solidFill>
+                  <a:srgbClr val="1B365D"/>
+                </a:solidFill>
+                <a:latin typeface="Calibri"/>
+              </a:rPr>
+              <a:t>Deliberate limits</a:t>
+            </a:r>
+          </a:p>
+        </p:txBody>
+      </p:sp>
+      <p:sp>
+        <p:nvSpPr>
+          <p:cNvPr id="20" name="TextBox 19"/>
+          <p:cNvSpPr txBox="1"/>
+          <p:nvPr/>
+        </p:nvSpPr>
+        <p:spPr>
+          <a:xfrm>
+            <a:off x="6364224" y="4453127"/>
+            <a:ext cx="5056632" cy="1389888"/>
+          </a:xfrm>
+          <a:prstGeom prst="rect">
+            <a:avLst/>
+          </a:prstGeom>
+          <a:noFill/>
+        </p:spPr>
+        <p:txBody>
+          <a:bodyPr wrap="square">
+            <a:spAutoFit/>
+          </a:bodyPr>
+          <a:lstStyle/>
+          <a:p>
+            <a:pPr>
+              <a:spcAft>
+                <a:spcPts val="600"/>
+              </a:spcAft>
+            </a:pPr>
+            <a:r>
+              <a:rPr sz="1300" b="0">
+                <a:solidFill>
+                  <a:srgbClr val="3D4450"/>
+                </a:solidFill>
+                <a:latin typeface="Calibri"/>
+              </a:rPr>
+              <a:t>OrgFlow does not migrate records, compare entire organizations, or infer dependencies. Staff promote what they selected. That constraint is a control.</a:t>
+            </a:r>
+          </a:p>
+        </p:txBody>
+      </p:sp>
+      <p:sp>
+        <p:nvSpPr>
+          <p:cNvPr id="21" name="Rectangle 20"/>
+          <p:cNvSpPr/>
+          <p:nvPr/>
+        </p:nvSpPr>
+        <p:spPr>
+          <a:xfrm>
+            <a:off x="0" y="6537960"/>
+            <a:ext cx="12191695" cy="320040"/>
+          </a:xfrm>
+          <a:prstGeom prst="rect">
+            <a:avLst/>
+          </a:prstGeom>
+          <a:solidFill>
+            <a:srgbClr val="FFFFFF"/>
+          </a:solidFill>
+          <a:ln>
+            <a:noFill/>
+          </a:ln>
+        </p:spPr>
+        <p:style>
+          <a:lnRef idx="1">
+            <a:schemeClr val="accent1"/>
+          </a:lnRef>
+          <a:fillRef idx="3">
+            <a:schemeClr val="accent1"/>
+          </a:fillRef>
+          <a:effectRef idx="2">
+            <a:schemeClr val="accent1"/>
+          </a:effectRef>
+          <a:fontRef idx="minor">
+            <a:schemeClr val="lt1"/>
+          </a:fontRef>
+        </p:style>
+        <p:txBody>
+          <a:bodyPr rtlCol="0" anchor="ctr"/>
+          <a:lstStyle/>
+          <a:p>
+            <a:pPr algn="ctr"/>
+          </a:p>
+        </p:txBody>
+      </p:sp>
+      <p:sp>
+        <p:nvSpPr>
+          <p:cNvPr id="22" name="Rectangle 21"/>
+          <p:cNvSpPr/>
+          <p:nvPr/>
+        </p:nvSpPr>
+        <p:spPr>
+          <a:xfrm>
+            <a:off x="0" y="6537960"/>
+            <a:ext cx="12191695" cy="12700"/>
+          </a:xfrm>
+          <a:prstGeom prst="rect">
+            <a:avLst/>
+          </a:prstGeom>
+          <a:solidFill>
+            <a:srgbClr val="D8DEE6"/>
+          </a:solidFill>
+          <a:ln>
+            <a:noFill/>
+          </a:ln>
+        </p:spPr>
+        <p:style>
+          <a:lnRef idx="1">
+            <a:schemeClr val="accent1"/>
+          </a:lnRef>
+          <a:fillRef idx="3">
+            <a:schemeClr val="accent1"/>
+          </a:fillRef>
+          <a:effectRef idx="2">
+            <a:schemeClr val="accent1"/>
+          </a:effectRef>
+          <a:fontRef idx="minor">
+            <a:schemeClr val="lt1"/>
+          </a:fontRef>
+        </p:style>
+        <p:txBody>
+          <a:bodyPr rtlCol="0" anchor="ctr"/>
+          <a:lstStyle/>
+          <a:p>
+            <a:pPr algn="ctr"/>
+          </a:p>
+        </p:txBody>
+      </p:sp>
+      <p:sp>
+        <p:nvSpPr>
+          <p:cNvPr id="23" name="TextBox 22"/>
+          <p:cNvSpPr txBox="1"/>
+          <p:nvPr/>
+        </p:nvSpPr>
+        <p:spPr>
+          <a:xfrm>
+            <a:off x="640080" y="6565392"/>
+            <a:ext cx="6400800" cy="256032"/>
+          </a:xfrm>
+          <a:prstGeom prst="rect">
+            <a:avLst/>
+          </a:prstGeom>
+          <a:noFill/>
+        </p:spPr>
+        <p:txBody>
+          <a:bodyPr wrap="square">
+            <a:spAutoFit/>
+          </a:bodyPr>
+          <a:lstStyle/>
+          <a:p>
+            <a:r>
+              <a:rPr sz="1100" b="0">
+                <a:solidFill>
+                  <a:srgbClr val="6B7280"/>
+                </a:solidFill>
+                <a:latin typeface="Calibri"/>
+              </a:rPr>
+              <a:t>OrgFlow  ·  Internal use</a:t>
+            </a:r>
+          </a:p>
+        </p:txBody>
+      </p:sp>
+      <p:sp>
+        <p:nvSpPr>
+          <p:cNvPr id="24" name="TextBox 23"/>
+          <p:cNvSpPr txBox="1"/>
+          <p:nvPr/>
+        </p:nvSpPr>
+        <p:spPr>
+          <a:xfrm>
+            <a:off x="9326880" y="6565392"/>
+            <a:ext cx="2194560" cy="256032"/>
+          </a:xfrm>
+          <a:prstGeom prst="rect">
+            <a:avLst/>
+          </a:prstGeom>
+          <a:noFill/>
+        </p:spPr>
+        <p:txBody>
+          <a:bodyPr wrap="none">
+            <a:spAutoFit/>
+          </a:bodyPr>
+          <a:lstStyle/>
+          <a:p>
+            <a:pPr algn="r"/>
+            <a:r>
+              <a:rPr sz="1100" b="0">
+                <a:solidFill>
+                  <a:srgbClr val="6B7280"/>
+                </a:solidFill>
+                <a:latin typeface="Calibri"/>
+              </a:rPr>
+              <a:t>8  /  11</a:t>
             </a:r>
           </a:p>
         </p:txBody>
@@ -6577,7 +10310,7 @@
             <a:avLst/>
           </a:prstGeom>
           <a:solidFill>
-            <a:srgbClr val="12151C"/>
+            <a:srgbClr val="FFFFFF"/>
           </a:solidFill>
           <a:ln>
             <a:noFill/>
@@ -6614,7 +10347,7 @@
         <p:spPr>
           <a:xfrm>
             <a:off x="640080" y="347472"/>
-            <a:ext cx="10972800" cy="320040"/>
+            <a:ext cx="10972800" cy="256032"/>
           </a:xfrm>
           <a:prstGeom prst="rect">
             <a:avLst/>
@@ -6627,16 +10360,14 @@
           </a:bodyPr>
           <a:lstStyle/>
           <a:p>
-            <a:pPr>
-              <a:defRPr sz="1200" b="1">
-                <a:solidFill>
-                  <a:srgbClr val="C5BBA8"/>
-                </a:solidFill>
-                <a:latin typeface="Calibri"/>
-              </a:defRPr>
-            </a:pPr>
-            <a:r>
-              <a:t>CONTROLS</a:t>
+            <a:r>
+              <a:rPr sz="1100" b="1">
+                <a:solidFill>
+                  <a:srgbClr val="8A7348"/>
+                </a:solidFill>
+                <a:latin typeface="Calibri"/>
+              </a:rPr>
+              <a:t>GOVERNANCE</a:t>
             </a:r>
           </a:p>
         </p:txBody>
@@ -6649,8 +10380,8 @@
         </p:nvSpPr>
         <p:spPr>
           <a:xfrm>
-            <a:off x="640080" y="658368"/>
-            <a:ext cx="10972800" cy="1051560"/>
+            <a:off x="640080" y="621792"/>
+            <a:ext cx="10972800" cy="822960"/>
           </a:xfrm>
           <a:prstGeom prst="rect">
             <a:avLst/>
@@ -6663,41 +10394,37 @@
           </a:bodyPr>
           <a:lstStyle/>
           <a:p>
-            <a:pPr>
-              <a:defRPr sz="3200" b="1">
-                <a:solidFill>
-                  <a:srgbClr val="FFFFFF"/>
-                </a:solidFill>
-                <a:latin typeface="Calibri"/>
-              </a:defRPr>
-            </a:pPr>
-            <a:r>
-              <a:t>What you can tell security and release owners</a:t>
-            </a:r>
-          </a:p>
-        </p:txBody>
-      </p:sp>
-      <p:sp>
-        <p:nvSpPr>
-          <p:cNvPr id="5" name="Rounded Rectangle 4"/>
+            <a:r>
+              <a:rPr sz="2600" b="1">
+                <a:solidFill>
+                  <a:srgbClr val="1B365D"/>
+                </a:solidFill>
+                <a:latin typeface="Calibri"/>
+              </a:rPr>
+              <a:t>Access, blast radius, and audit</a:t>
+            </a:r>
+          </a:p>
+        </p:txBody>
+      </p:sp>
+      <p:sp>
+        <p:nvSpPr>
+          <p:cNvPr id="5" name="Rectangle 4"/>
           <p:cNvSpPr/>
           <p:nvPr/>
         </p:nvSpPr>
         <p:spPr>
           <a:xfrm>
-            <a:off x="640080" y="1920240"/>
-            <a:ext cx="3474720" cy="3931920"/>
-          </a:xfrm>
-          <a:prstGeom prst="roundRect">
+            <a:off x="640080" y="1691640"/>
+            <a:ext cx="3520440" cy="54864"/>
+          </a:xfrm>
+          <a:prstGeom prst="rect">
             <a:avLst/>
           </a:prstGeom>
           <a:solidFill>
-            <a:srgbClr val="1C212C"/>
+            <a:srgbClr val="1B365D"/>
           </a:solidFill>
           <a:ln>
-            <a:solidFill>
-              <a:srgbClr val="3A3F4A"/>
-            </a:solidFill>
+            <a:noFill/>
           </a:ln>
         </p:spPr>
         <p:style>
@@ -6715,60 +10442,32 @@
           </a:fontRef>
         </p:style>
         <p:txBody>
-          <a:bodyPr rtlCol="0" anchor="ctr" wrap="square" lIns="146304" rIns="146304" tIns="109728"/>
-          <a:lstStyle/>
-          <a:p>
-            <a:pPr algn="ctr">
-              <a:defRPr sz="1600" b="1">
-                <a:solidFill>
-                  <a:srgbClr val="FFFFFF"/>
-                </a:solidFill>
-                <a:latin typeface="Calibri"/>
-              </a:defRPr>
-            </a:pPr>
-            <a:r>
-              <a:t>Access</a:t>
-            </a:r>
-          </a:p>
-          <a:p>
-            <a:pPr>
-              <a:spcBef>
-                <a:spcPts val="800"/>
-              </a:spcBef>
-              <a:defRPr sz="1300">
-                <a:solidFill>
-                  <a:srgbClr val="8F96A3"/>
-                </a:solidFill>
-                <a:latin typeface="Calibri"/>
-              </a:defRPr>
-            </a:pPr>
-            <a:r>
-              <a:t>Uses the Salesforce session already in Chrome. No Connected App to approve. Git tokens, if used, stay in that browser.</a:t>
-            </a:r>
-          </a:p>
-        </p:txBody>
-      </p:sp>
-      <p:sp>
-        <p:nvSpPr>
-          <p:cNvPr id="6" name="Rounded Rectangle 5"/>
+          <a:bodyPr rtlCol="0" anchor="ctr"/>
+          <a:lstStyle/>
+          <a:p>
+            <a:pPr algn="ctr"/>
+          </a:p>
+        </p:txBody>
+      </p:sp>
+      <p:sp>
+        <p:nvSpPr>
+          <p:cNvPr id="6" name="Rectangle 5"/>
           <p:cNvSpPr/>
           <p:nvPr/>
         </p:nvSpPr>
         <p:spPr>
           <a:xfrm>
-            <a:off x="4297680" y="1920240"/>
-            <a:ext cx="3474720" cy="3931920"/>
-          </a:xfrm>
-          <a:prstGeom prst="roundRect">
+            <a:off x="640080" y="1746504"/>
+            <a:ext cx="3520440" cy="4197096"/>
+          </a:xfrm>
+          <a:prstGeom prst="rect">
             <a:avLst/>
           </a:prstGeom>
           <a:solidFill>
-            <a:srgbClr val="1C212C"/>
+            <a:srgbClr val="F4F6F9"/>
           </a:solidFill>
           <a:ln>
-            <a:solidFill>
-              <a:srgbClr val="3A3F4A"/>
-            </a:solidFill>
+            <a:noFill/>
           </a:ln>
         </p:spPr>
         <p:style>
@@ -6786,60 +10485,105 @@
           </a:fontRef>
         </p:style>
         <p:txBody>
-          <a:bodyPr rtlCol="0" anchor="ctr" wrap="square" lIns="146304" rIns="146304" tIns="109728"/>
-          <a:lstStyle/>
-          <a:p>
-            <a:pPr algn="ctr">
-              <a:defRPr sz="1600" b="1">
-                <a:solidFill>
-                  <a:srgbClr val="FFFFFF"/>
-                </a:solidFill>
-                <a:latin typeface="Calibri"/>
-              </a:defRPr>
+          <a:bodyPr rtlCol="0" anchor="ctr"/>
+          <a:lstStyle/>
+          <a:p>
+            <a:pPr algn="ctr"/>
+          </a:p>
+        </p:txBody>
+      </p:sp>
+      <p:sp>
+        <p:nvSpPr>
+          <p:cNvPr id="7" name="TextBox 6"/>
+          <p:cNvSpPr txBox="1"/>
+          <p:nvPr/>
+        </p:nvSpPr>
+        <p:spPr>
+          <a:xfrm>
+            <a:off x="786384" y="1837944"/>
+            <a:ext cx="3227832" cy="329184"/>
+          </a:xfrm>
+          <a:prstGeom prst="rect">
+            <a:avLst/>
+          </a:prstGeom>
+          <a:noFill/>
+        </p:spPr>
+        <p:txBody>
+          <a:bodyPr wrap="square">
+            <a:spAutoFit/>
+          </a:bodyPr>
+          <a:lstStyle/>
+          <a:p>
+            <a:r>
+              <a:rPr sz="1400" b="1">
+                <a:solidFill>
+                  <a:srgbClr val="1B365D"/>
+                </a:solidFill>
+                <a:latin typeface="Calibri"/>
+              </a:rPr>
+              <a:t>Access</a:t>
+            </a:r>
+          </a:p>
+        </p:txBody>
+      </p:sp>
+      <p:sp>
+        <p:nvSpPr>
+          <p:cNvPr id="8" name="TextBox 7"/>
+          <p:cNvSpPr txBox="1"/>
+          <p:nvPr/>
+        </p:nvSpPr>
+        <p:spPr>
+          <a:xfrm>
+            <a:off x="786384" y="2167128"/>
+            <a:ext cx="3227832" cy="3630168"/>
+          </a:xfrm>
+          <a:prstGeom prst="rect">
+            <a:avLst/>
+          </a:prstGeom>
+          <a:noFill/>
+        </p:spPr>
+        <p:txBody>
+          <a:bodyPr wrap="square">
+            <a:spAutoFit/>
+          </a:bodyPr>
+          <a:lstStyle/>
+          <a:p>
+            <a:pPr>
+              <a:spcAft>
+                <a:spcPts val="600"/>
+              </a:spcAft>
             </a:pPr>
             <a:r>
-              <a:t>Blast radius</a:t>
-            </a:r>
-          </a:p>
-          <a:p>
-            <a:pPr>
-              <a:spcBef>
-                <a:spcPts val="800"/>
-              </a:spcBef>
-              <a:defRPr sz="1300">
-                <a:solidFill>
-                  <a:srgbClr val="8F96A3"/>
-                </a:solidFill>
-                <a:latin typeface="Calibri"/>
-              </a:defRPr>
-            </a:pPr>
-            <a:r>
-              <a:t>Named members only. From and To cannot be the same org. Validate is a dry run. Production can still run Apex tests.</a:t>
-            </a:r>
-          </a:p>
-        </p:txBody>
-      </p:sp>
-      <p:sp>
-        <p:nvSpPr>
-          <p:cNvPr id="7" name="Rounded Rectangle 6"/>
+              <a:rPr sz="1300" b="0">
+                <a:solidFill>
+                  <a:srgbClr val="3D4450"/>
+                </a:solidFill>
+                <a:latin typeface="Calibri"/>
+              </a:rPr>
+              <a:t>Uses the Salesforce session already present in Chrome. No Connected App. Optional Git credentials remain in that browser profile and are not written to the repository.</a:t>
+            </a:r>
+          </a:p>
+        </p:txBody>
+      </p:sp>
+      <p:sp>
+        <p:nvSpPr>
+          <p:cNvPr id="9" name="Rectangle 8"/>
           <p:cNvSpPr/>
           <p:nvPr/>
         </p:nvSpPr>
         <p:spPr>
           <a:xfrm>
-            <a:off x="7955279" y="1920240"/>
-            <a:ext cx="3474720" cy="3931920"/>
-          </a:xfrm>
-          <a:prstGeom prst="roundRect">
+            <a:off x="4343400" y="1691640"/>
+            <a:ext cx="3520440" cy="54864"/>
+          </a:xfrm>
+          <a:prstGeom prst="rect">
             <a:avLst/>
           </a:prstGeom>
           <a:solidFill>
-            <a:srgbClr val="1C212C"/>
+            <a:srgbClr val="1B365D"/>
           </a:solidFill>
           <a:ln>
-            <a:solidFill>
-              <a:srgbClr val="3A3F4A"/>
-            </a:solidFill>
+            <a:noFill/>
           </a:ln>
         </p:spPr>
         <p:style>
@@ -6857,35 +10601,439 @@
           </a:fontRef>
         </p:style>
         <p:txBody>
-          <a:bodyPr rtlCol="0" anchor="ctr" wrap="square" lIns="146304" rIns="146304" tIns="109728"/>
-          <a:lstStyle/>
-          <a:p>
-            <a:pPr algn="ctr">
-              <a:defRPr sz="1600" b="1">
-                <a:solidFill>
-                  <a:srgbClr val="FFFFFF"/>
-                </a:solidFill>
-                <a:latin typeface="Calibri"/>
-              </a:defRPr>
+          <a:bodyPr rtlCol="0" anchor="ctr"/>
+          <a:lstStyle/>
+          <a:p>
+            <a:pPr algn="ctr"/>
+          </a:p>
+        </p:txBody>
+      </p:sp>
+      <p:sp>
+        <p:nvSpPr>
+          <p:cNvPr id="10" name="Rectangle 9"/>
+          <p:cNvSpPr/>
+          <p:nvPr/>
+        </p:nvSpPr>
+        <p:spPr>
+          <a:xfrm>
+            <a:off x="4343400" y="1746504"/>
+            <a:ext cx="3520440" cy="4197096"/>
+          </a:xfrm>
+          <a:prstGeom prst="rect">
+            <a:avLst/>
+          </a:prstGeom>
+          <a:solidFill>
+            <a:srgbClr val="F4F6F9"/>
+          </a:solidFill>
+          <a:ln>
+            <a:noFill/>
+          </a:ln>
+        </p:spPr>
+        <p:style>
+          <a:lnRef idx="1">
+            <a:schemeClr val="accent1"/>
+          </a:lnRef>
+          <a:fillRef idx="3">
+            <a:schemeClr val="accent1"/>
+          </a:fillRef>
+          <a:effectRef idx="2">
+            <a:schemeClr val="accent1"/>
+          </a:effectRef>
+          <a:fontRef idx="minor">
+            <a:schemeClr val="lt1"/>
+          </a:fontRef>
+        </p:style>
+        <p:txBody>
+          <a:bodyPr rtlCol="0" anchor="ctr"/>
+          <a:lstStyle/>
+          <a:p>
+            <a:pPr algn="ctr"/>
+          </a:p>
+        </p:txBody>
+      </p:sp>
+      <p:sp>
+        <p:nvSpPr>
+          <p:cNvPr id="11" name="TextBox 10"/>
+          <p:cNvSpPr txBox="1"/>
+          <p:nvPr/>
+        </p:nvSpPr>
+        <p:spPr>
+          <a:xfrm>
+            <a:off x="4489704" y="1837944"/>
+            <a:ext cx="3227832" cy="329184"/>
+          </a:xfrm>
+          <a:prstGeom prst="rect">
+            <a:avLst/>
+          </a:prstGeom>
+          <a:noFill/>
+        </p:spPr>
+        <p:txBody>
+          <a:bodyPr wrap="square">
+            <a:spAutoFit/>
+          </a:bodyPr>
+          <a:lstStyle/>
+          <a:p>
+            <a:r>
+              <a:rPr sz="1400" b="1">
+                <a:solidFill>
+                  <a:srgbClr val="1B365D"/>
+                </a:solidFill>
+                <a:latin typeface="Calibri"/>
+              </a:rPr>
+              <a:t>Blast radius</a:t>
+            </a:r>
+          </a:p>
+        </p:txBody>
+      </p:sp>
+      <p:sp>
+        <p:nvSpPr>
+          <p:cNvPr id="12" name="TextBox 11"/>
+          <p:cNvSpPr txBox="1"/>
+          <p:nvPr/>
+        </p:nvSpPr>
+        <p:spPr>
+          <a:xfrm>
+            <a:off x="4489704" y="2167128"/>
+            <a:ext cx="3227832" cy="3630168"/>
+          </a:xfrm>
+          <a:prstGeom prst="rect">
+            <a:avLst/>
+          </a:prstGeom>
+          <a:noFill/>
+        </p:spPr>
+        <p:txBody>
+          <a:bodyPr wrap="square">
+            <a:spAutoFit/>
+          </a:bodyPr>
+          <a:lstStyle/>
+          <a:p>
+            <a:pPr>
+              <a:spcAft>
+                <a:spcPts val="600"/>
+              </a:spcAft>
             </a:pPr>
             <a:r>
+              <a:rPr sz="1300" b="0">
+                <a:solidFill>
+                  <a:srgbClr val="3D4450"/>
+                </a:solidFill>
+                <a:latin typeface="Calibri"/>
+              </a:rPr>
+              <a:t>Only named metadata is deployed. Source and target cannot be the same organization. Validation is available as a dry run. Apex tests may be executed in production if policy requires coverage.</a:t>
+            </a:r>
+          </a:p>
+        </p:txBody>
+      </p:sp>
+      <p:sp>
+        <p:nvSpPr>
+          <p:cNvPr id="13" name="Rectangle 12"/>
+          <p:cNvSpPr/>
+          <p:nvPr/>
+        </p:nvSpPr>
+        <p:spPr>
+          <a:xfrm>
+            <a:off x="8046720" y="1691640"/>
+            <a:ext cx="3520440" cy="54864"/>
+          </a:xfrm>
+          <a:prstGeom prst="rect">
+            <a:avLst/>
+          </a:prstGeom>
+          <a:solidFill>
+            <a:srgbClr val="1B365D"/>
+          </a:solidFill>
+          <a:ln>
+            <a:noFill/>
+          </a:ln>
+        </p:spPr>
+        <p:style>
+          <a:lnRef idx="1">
+            <a:schemeClr val="accent1"/>
+          </a:lnRef>
+          <a:fillRef idx="3">
+            <a:schemeClr val="accent1"/>
+          </a:fillRef>
+          <a:effectRef idx="2">
+            <a:schemeClr val="accent1"/>
+          </a:effectRef>
+          <a:fontRef idx="minor">
+            <a:schemeClr val="lt1"/>
+          </a:fontRef>
+        </p:style>
+        <p:txBody>
+          <a:bodyPr rtlCol="0" anchor="ctr"/>
+          <a:lstStyle/>
+          <a:p>
+            <a:pPr algn="ctr"/>
+          </a:p>
+        </p:txBody>
+      </p:sp>
+      <p:sp>
+        <p:nvSpPr>
+          <p:cNvPr id="14" name="Rectangle 13"/>
+          <p:cNvSpPr/>
+          <p:nvPr/>
+        </p:nvSpPr>
+        <p:spPr>
+          <a:xfrm>
+            <a:off x="8046720" y="1746504"/>
+            <a:ext cx="3520440" cy="4197096"/>
+          </a:xfrm>
+          <a:prstGeom prst="rect">
+            <a:avLst/>
+          </a:prstGeom>
+          <a:solidFill>
+            <a:srgbClr val="F4F6F9"/>
+          </a:solidFill>
+          <a:ln>
+            <a:noFill/>
+          </a:ln>
+        </p:spPr>
+        <p:style>
+          <a:lnRef idx="1">
+            <a:schemeClr val="accent1"/>
+          </a:lnRef>
+          <a:fillRef idx="3">
+            <a:schemeClr val="accent1"/>
+          </a:fillRef>
+          <a:effectRef idx="2">
+            <a:schemeClr val="accent1"/>
+          </a:effectRef>
+          <a:fontRef idx="minor">
+            <a:schemeClr val="lt1"/>
+          </a:fontRef>
+        </p:style>
+        <p:txBody>
+          <a:bodyPr rtlCol="0" anchor="ctr"/>
+          <a:lstStyle/>
+          <a:p>
+            <a:pPr algn="ctr"/>
+          </a:p>
+        </p:txBody>
+      </p:sp>
+      <p:sp>
+        <p:nvSpPr>
+          <p:cNvPr id="15" name="TextBox 14"/>
+          <p:cNvSpPr txBox="1"/>
+          <p:nvPr/>
+        </p:nvSpPr>
+        <p:spPr>
+          <a:xfrm>
+            <a:off x="8193024" y="1837944"/>
+            <a:ext cx="3227832" cy="329184"/>
+          </a:xfrm>
+          <a:prstGeom prst="rect">
+            <a:avLst/>
+          </a:prstGeom>
+          <a:noFill/>
+        </p:spPr>
+        <p:txBody>
+          <a:bodyPr wrap="square">
+            <a:spAutoFit/>
+          </a:bodyPr>
+          <a:lstStyle/>
+          <a:p>
+            <a:r>
+              <a:rPr sz="1400" b="1">
+                <a:solidFill>
+                  <a:srgbClr val="1B365D"/>
+                </a:solidFill>
+                <a:latin typeface="Calibri"/>
+              </a:rPr>
               <a:t>Audit</a:t>
             </a:r>
           </a:p>
+        </p:txBody>
+      </p:sp>
+      <p:sp>
+        <p:nvSpPr>
+          <p:cNvPr id="16" name="TextBox 15"/>
+          <p:cNvSpPr txBox="1"/>
+          <p:nvPr/>
+        </p:nvSpPr>
+        <p:spPr>
+          <a:xfrm>
+            <a:off x="8193024" y="2167128"/>
+            <a:ext cx="3227832" cy="3630168"/>
+          </a:xfrm>
+          <a:prstGeom prst="rect">
+            <a:avLst/>
+          </a:prstGeom>
+          <a:noFill/>
+        </p:spPr>
+        <p:txBody>
+          <a:bodyPr wrap="square">
+            <a:spAutoFit/>
+          </a:bodyPr>
+          <a:lstStyle/>
           <a:p>
             <a:pPr>
-              <a:spcBef>
-                <a:spcPts val="800"/>
-              </a:spcBef>
-              <a:defRPr sz="1300">
-                <a:solidFill>
-                  <a:srgbClr val="8F96A3"/>
-                </a:solidFill>
-                <a:latin typeface="Calibri"/>
-              </a:defRPr>
+              <a:spcAft>
+                <a:spcPts val="600"/>
+              </a:spcAft>
             </a:pPr>
             <a:r>
-              <a:t>On this device: local snapshots, optional Jira. With a release repo: Jira key and comment are required; versions live in the team warehouse.</a:t>
+              <a:rPr sz="1300" b="0">
+                <a:solidFill>
+                  <a:srgbClr val="3D4450"/>
+                </a:solidFill>
+                <a:latin typeface="Calibri"/>
+              </a:rPr>
+              <a:t>Device storage: local snapshots; Jira optional. Shared repository: Jira key and comment required; versions reside in the team warehouse under a known folder structure.</a:t>
+            </a:r>
+          </a:p>
+        </p:txBody>
+      </p:sp>
+      <p:sp>
+        <p:nvSpPr>
+          <p:cNvPr id="17" name="Rectangle 16"/>
+          <p:cNvSpPr/>
+          <p:nvPr/>
+        </p:nvSpPr>
+        <p:spPr>
+          <a:xfrm>
+            <a:off x="0" y="6537960"/>
+            <a:ext cx="12191695" cy="320040"/>
+          </a:xfrm>
+          <a:prstGeom prst="rect">
+            <a:avLst/>
+          </a:prstGeom>
+          <a:solidFill>
+            <a:srgbClr val="FFFFFF"/>
+          </a:solidFill>
+          <a:ln>
+            <a:noFill/>
+          </a:ln>
+        </p:spPr>
+        <p:style>
+          <a:lnRef idx="1">
+            <a:schemeClr val="accent1"/>
+          </a:lnRef>
+          <a:fillRef idx="3">
+            <a:schemeClr val="accent1"/>
+          </a:fillRef>
+          <a:effectRef idx="2">
+            <a:schemeClr val="accent1"/>
+          </a:effectRef>
+          <a:fontRef idx="minor">
+            <a:schemeClr val="lt1"/>
+          </a:fontRef>
+        </p:style>
+        <p:txBody>
+          <a:bodyPr rtlCol="0" anchor="ctr"/>
+          <a:lstStyle/>
+          <a:p>
+            <a:pPr algn="ctr"/>
+          </a:p>
+        </p:txBody>
+      </p:sp>
+      <p:sp>
+        <p:nvSpPr>
+          <p:cNvPr id="18" name="Rectangle 17"/>
+          <p:cNvSpPr/>
+          <p:nvPr/>
+        </p:nvSpPr>
+        <p:spPr>
+          <a:xfrm>
+            <a:off x="0" y="6537960"/>
+            <a:ext cx="12191695" cy="12700"/>
+          </a:xfrm>
+          <a:prstGeom prst="rect">
+            <a:avLst/>
+          </a:prstGeom>
+          <a:solidFill>
+            <a:srgbClr val="D8DEE6"/>
+          </a:solidFill>
+          <a:ln>
+            <a:noFill/>
+          </a:ln>
+        </p:spPr>
+        <p:style>
+          <a:lnRef idx="1">
+            <a:schemeClr val="accent1"/>
+          </a:lnRef>
+          <a:fillRef idx="3">
+            <a:schemeClr val="accent1"/>
+          </a:fillRef>
+          <a:effectRef idx="2">
+            <a:schemeClr val="accent1"/>
+          </a:effectRef>
+          <a:fontRef idx="minor">
+            <a:schemeClr val="lt1"/>
+          </a:fontRef>
+        </p:style>
+        <p:txBody>
+          <a:bodyPr rtlCol="0" anchor="ctr"/>
+          <a:lstStyle/>
+          <a:p>
+            <a:pPr algn="ctr"/>
+          </a:p>
+        </p:txBody>
+      </p:sp>
+      <p:sp>
+        <p:nvSpPr>
+          <p:cNvPr id="19" name="TextBox 18"/>
+          <p:cNvSpPr txBox="1"/>
+          <p:nvPr/>
+        </p:nvSpPr>
+        <p:spPr>
+          <a:xfrm>
+            <a:off x="640080" y="6565392"/>
+            <a:ext cx="6400800" cy="256032"/>
+          </a:xfrm>
+          <a:prstGeom prst="rect">
+            <a:avLst/>
+          </a:prstGeom>
+          <a:noFill/>
+        </p:spPr>
+        <p:txBody>
+          <a:bodyPr wrap="square">
+            <a:spAutoFit/>
+          </a:bodyPr>
+          <a:lstStyle/>
+          <a:p>
+            <a:r>
+              <a:rPr sz="1100" b="0">
+                <a:solidFill>
+                  <a:srgbClr val="6B7280"/>
+                </a:solidFill>
+                <a:latin typeface="Calibri"/>
+              </a:rPr>
+              <a:t>OrgFlow  ·  Internal use</a:t>
+            </a:r>
+          </a:p>
+        </p:txBody>
+      </p:sp>
+      <p:sp>
+        <p:nvSpPr>
+          <p:cNvPr id="20" name="TextBox 19"/>
+          <p:cNvSpPr txBox="1"/>
+          <p:nvPr/>
+        </p:nvSpPr>
+        <p:spPr>
+          <a:xfrm>
+            <a:off x="9326880" y="6565392"/>
+            <a:ext cx="2194560" cy="256032"/>
+          </a:xfrm>
+          <a:prstGeom prst="rect">
+            <a:avLst/>
+          </a:prstGeom>
+          <a:noFill/>
+        </p:spPr>
+        <p:txBody>
+          <a:bodyPr wrap="none">
+            <a:spAutoFit/>
+          </a:bodyPr>
+          <a:lstStyle/>
+          <a:p>
+            <a:pPr algn="r"/>
+            <a:r>
+              <a:rPr sz="1100" b="0">
+                <a:solidFill>
+                  <a:srgbClr val="6B7280"/>
+                </a:solidFill>
+                <a:latin typeface="Calibri"/>
+              </a:rPr>
+              <a:t>9  /  11</a:t>
             </a:r>
           </a:p>
         </p:txBody>
